--- a/Presentacion_Defensa_Tesis_MTCI_UNAN_Minimal.pptx
+++ b/Presentacion_Defensa_Tesis_MTCI_UNAN_Minimal.pptx
@@ -21,6 +21,7 @@
     <p:sldId id="269" r:id="rId20"/>
     <p:sldId id="270" r:id="rId21"/>
     <p:sldId id="271" r:id="rId22"/>
+    <p:sldId id="272" r:id="rId23"/>
   </p:sldIdLst>
   <p:sldSz cx="12191695" cy="6858000" type="screen4x3"/>
   <p:notesSz cx="6858000" cy="9144000"/>
@@ -3127,8 +3128,8 @@
         </p:blipFill>
         <p:spPr>
           <a:xfrm>
-            <a:off x="822960" y="731520"/>
-            <a:ext cx="1799013" cy="960120"/>
+            <a:off x="822960" y="685800"/>
+            <a:ext cx="1884680" cy="1005840"/>
           </a:xfrm>
           <a:prstGeom prst="rect">
             <a:avLst/>
@@ -3143,7 +3144,7 @@
         </p:nvSpPr>
         <p:spPr>
           <a:xfrm>
-            <a:off x="2834640" y="777240"/>
+            <a:off x="2834640" y="749808"/>
             <a:ext cx="8503920" cy="868680"/>
           </a:xfrm>
           <a:prstGeom prst="rect">
@@ -3158,7 +3159,7 @@
           <a:lstStyle/>
           <a:p>
             <a:pPr>
-              <a:defRPr sz="1400" b="1">
+              <a:defRPr sz="1350" b="1">
                 <a:solidFill>
                   <a:srgbClr val="FFFFFF"/>
                 </a:solidFill>
@@ -3171,7 +3172,7 @@
           </a:p>
           <a:p>
             <a:pPr>
-              <a:defRPr sz="1050" b="1">
+              <a:defRPr sz="1000" b="1">
                 <a:solidFill>
                   <a:srgbClr val="F59E0B"/>
                 </a:solidFill>
@@ -3192,7 +3193,7 @@
               </a:defRPr>
             </a:pPr>
             <a:r>
-              <a:t>Departamento de Educación y Humanidades | Carrera de Psicología</a:t>
+              <a:t>Departamento de Educación y Humanidades | Carrera de Licenciatura en Psicología</a:t>
             </a:r>
           </a:p>
         </p:txBody>
@@ -3248,8 +3249,8 @@
         </p:nvSpPr>
         <p:spPr>
           <a:xfrm>
-            <a:off x="822960" y="2240280"/>
-            <a:ext cx="10515600" cy="2194560"/>
+            <a:off x="822960" y="2194560"/>
+            <a:ext cx="10515600" cy="2286000"/>
           </a:xfrm>
           <a:prstGeom prst="rect">
             <a:avLst/>
@@ -3264,25 +3265,25 @@
           <a:p>
             <a:pPr>
               <a:spcAft>
+                <a:spcPts val="1000"/>
+              </a:spcAft>
+              <a:defRPr sz="1050" b="1">
+                <a:solidFill>
+                  <a:srgbClr val="14B8A6"/>
+                </a:solidFill>
+                <a:latin typeface="Calibri"/>
+              </a:defRPr>
+            </a:pPr>
+            <a:r>
+              <a:t>TRABAJO DE INVESTIGACIÓN PARA OPTAR AL GRADO DE LICENCIADOS EN PSICOLOGÍA</a:t>
+            </a:r>
+          </a:p>
+          <a:p>
+            <a:pPr>
+              <a:spcAft>
                 <a:spcPts val="1200"/>
               </a:spcAft>
-              <a:defRPr sz="1100" b="1">
-                <a:solidFill>
-                  <a:srgbClr val="14B8A6"/>
-                </a:solidFill>
-                <a:latin typeface="Calibri"/>
-              </a:defRPr>
-            </a:pPr>
-            <a:r>
-              <a:t>TRABAJO DE INVESTIGACIÓN PARA OPTAR AL GRADO DE LICENCIADOS EN PSICOLOGÍA</a:t>
-            </a:r>
-          </a:p>
-          <a:p>
-            <a:pPr>
-              <a:spcAft>
-                <a:spcPts val="1400"/>
-              </a:spcAft>
-              <a:defRPr sz="3200" b="1">
+              <a:defRPr sz="3100" b="1">
                 <a:solidFill>
                   <a:srgbClr val="FFFFFF"/>
                 </a:solidFill>
@@ -3299,7 +3300,7 @@
           </a:p>
           <a:p>
             <a:pPr>
-              <a:defRPr sz="1350">
+              <a:defRPr sz="1300">
                 <a:solidFill>
                   <a:srgbClr val="E2E8F0"/>
                 </a:solidFill>
@@ -3307,7 +3308,7 @@
               </a:defRPr>
             </a:pPr>
             <a:r>
-              <a:t>Estudio Mixto con Estudiantes y Docentes del CUR-Estelí y Facilitadores Locales del Municipio de Estelí</a:t>
+              <a:t>Estudio Mixto con Estudiantes y Docentes del CUR-Estelí y Facilitadores Locales del Municipio de Estelí (Segundo Semestre, 2026)</a:t>
             </a:r>
           </a:p>
         </p:txBody>
@@ -3364,7 +3365,7 @@
         <p:spPr>
           <a:xfrm>
             <a:off x="822960" y="4892040"/>
-            <a:ext cx="3291840" cy="1463040"/>
+            <a:ext cx="3291840" cy="1371600"/>
           </a:xfrm>
           <a:prstGeom prst="rect">
             <a:avLst/>
@@ -3379,9 +3380,9 @@
           <a:p>
             <a:pPr>
               <a:spcAft>
-                <a:spcPts val="600"/>
-              </a:spcAft>
-              <a:defRPr sz="950" b="1">
+                <a:spcPts val="500"/>
+              </a:spcAft>
+              <a:defRPr sz="900" b="1">
                 <a:solidFill>
                   <a:srgbClr val="F59E0B"/>
                 </a:solidFill>
@@ -3395,9 +3396,9 @@
           <a:p>
             <a:pPr>
               <a:spcAft>
-                <a:spcPts val="300"/>
-              </a:spcAft>
-              <a:defRPr sz="1100">
+                <a:spcPts val="200"/>
+              </a:spcAft>
+              <a:defRPr sz="1050">
                 <a:solidFill>
                   <a:srgbClr val="FFFFFF"/>
                 </a:solidFill>
@@ -3411,9 +3412,9 @@
           <a:p>
             <a:pPr>
               <a:spcAft>
-                <a:spcPts val="300"/>
-              </a:spcAft>
-              <a:defRPr sz="1100">
+                <a:spcPts val="200"/>
+              </a:spcAft>
+              <a:defRPr sz="1050">
                 <a:solidFill>
                   <a:srgbClr val="FFFFFF"/>
                 </a:solidFill>
@@ -3427,9 +3428,9 @@
           <a:p>
             <a:pPr>
               <a:spcAft>
-                <a:spcPts val="300"/>
-              </a:spcAft>
-              <a:defRPr sz="1100">
+                <a:spcPts val="200"/>
+              </a:spcAft>
+              <a:defRPr sz="1050">
                 <a:solidFill>
                   <a:srgbClr val="FFFFFF"/>
                 </a:solidFill>
@@ -3494,7 +3495,7 @@
         <p:spPr>
           <a:xfrm>
             <a:off x="4617720" y="4892040"/>
-            <a:ext cx="3291840" cy="1463040"/>
+            <a:ext cx="3291840" cy="1371600"/>
           </a:xfrm>
           <a:prstGeom prst="rect">
             <a:avLst/>
@@ -3509,9 +3510,9 @@
           <a:p>
             <a:pPr>
               <a:spcAft>
-                <a:spcPts val="600"/>
-              </a:spcAft>
-              <a:defRPr sz="950" b="1">
+                <a:spcPts val="500"/>
+              </a:spcAft>
+              <a:defRPr sz="900" b="1">
                 <a:solidFill>
                   <a:srgbClr val="14B8A6"/>
                 </a:solidFill>
@@ -3524,7 +3525,7 @@
           </a:p>
           <a:p>
             <a:pPr>
-              <a:defRPr sz="1100" b="1">
+              <a:defRPr sz="1050" b="1">
                 <a:solidFill>
                   <a:srgbClr val="FFFFFF"/>
                 </a:solidFill>
@@ -3537,7 +3538,7 @@
           </a:p>
           <a:p>
             <a:pPr>
-              <a:defRPr sz="1000">
+              <a:defRPr sz="950">
                 <a:solidFill>
                   <a:srgbClr val="94A3B8"/>
                 </a:solidFill>
@@ -3606,7 +3607,7 @@
         <p:spPr>
           <a:xfrm>
             <a:off x="8412480" y="4892040"/>
-            <a:ext cx="3291840" cy="1463040"/>
+            <a:ext cx="3291840" cy="1371600"/>
           </a:xfrm>
           <a:prstGeom prst="rect">
             <a:avLst/>
@@ -3621,9 +3622,9 @@
           <a:p>
             <a:pPr>
               <a:spcAft>
-                <a:spcPts val="600"/>
-              </a:spcAft>
-              <a:defRPr sz="950" b="1">
+                <a:spcPts val="500"/>
+              </a:spcAft>
+              <a:defRPr sz="900" b="1">
                 <a:solidFill>
                   <a:srgbClr val="E2E8F0"/>
                 </a:solidFill>
@@ -3636,7 +3637,7 @@
           </a:p>
           <a:p>
             <a:pPr>
-              <a:defRPr sz="1100">
+              <a:defRPr sz="1050">
                 <a:solidFill>
                   <a:srgbClr val="FFFFFF"/>
                 </a:solidFill>
@@ -3649,7 +3650,7 @@
           </a:p>
           <a:p>
             <a:pPr>
-              <a:defRPr sz="1000">
+              <a:defRPr sz="950">
                 <a:solidFill>
                   <a:srgbClr val="94A3B8"/>
                 </a:solidFill>
@@ -3704,7 +3705,7 @@
         <p:spPr>
           <a:xfrm>
             <a:off x="777240" y="438912"/>
-            <a:ext cx="9601200" cy="274320"/>
+            <a:ext cx="9601200" cy="256032"/>
           </a:xfrm>
           <a:prstGeom prst="rect">
             <a:avLst/>
@@ -3718,7 +3719,7 @@
           <a:lstStyle/>
           <a:p>
             <a:pPr>
-              <a:defRPr sz="1000" b="1">
+              <a:defRPr sz="950" b="1">
                 <a:solidFill>
                   <a:srgbClr val="0D9488"/>
                 </a:solidFill>
@@ -3726,7 +3727,7 @@
               </a:defRPr>
             </a:pPr>
             <a:r>
-              <a:t>CAPÍTULO IV • RESULTADOS EMPÍRICOS (1/4)</a:t>
+              <a:t>CAPÍTULO IV • RESULTADOS EN ESTUDIANTES (1/2)</a:t>
             </a:r>
           </a:p>
         </p:txBody>
@@ -3739,7 +3740,7 @@
         </p:nvSpPr>
         <p:spPr>
           <a:xfrm>
-            <a:off x="777240" y="713232"/>
+            <a:off x="777240" y="694944"/>
             <a:ext cx="9875520" cy="685800"/>
           </a:xfrm>
           <a:prstGeom prst="rect">
@@ -3754,7 +3755,7 @@
           <a:lstStyle/>
           <a:p>
             <a:pPr>
-              <a:defRPr sz="2800" b="1">
+              <a:defRPr sz="2600" b="1">
                 <a:solidFill>
                   <a:srgbClr val="0F172A"/>
                 </a:solidFill>
@@ -3762,7 +3763,7 @@
               </a:defRPr>
             </a:pPr>
             <a:r>
-              <a:t>Perfil Sociodemográfico y Formativo del Estudiantado (n = 68)</a:t>
+              <a:t>Perfil Sociodemográfico y Grado de Dominio Conceptual y Normativo</a:t>
             </a:r>
           </a:p>
         </p:txBody>
@@ -3799,7 +3800,7 @@
         </p:nvSpPr>
         <p:spPr>
           <a:xfrm>
-            <a:off x="777240" y="6473952"/>
+            <a:off x="777240" y="6492240"/>
             <a:ext cx="9601200" cy="228600"/>
           </a:xfrm>
           <a:prstGeom prst="rect">
@@ -3814,7 +3815,7 @@
           <a:lstStyle/>
           <a:p>
             <a:pPr>
-              <a:defRPr sz="900">
+              <a:defRPr sz="850">
                 <a:solidFill>
                   <a:srgbClr val="64748B"/>
                 </a:solidFill>
@@ -3835,7 +3836,7 @@
         </p:nvSpPr>
         <p:spPr>
           <a:xfrm>
-            <a:off x="10789920" y="6473952"/>
+            <a:off x="10789920" y="6492240"/>
             <a:ext cx="640080" cy="228600"/>
           </a:xfrm>
           <a:prstGeom prst="rect">
@@ -3850,7 +3851,7 @@
           <a:lstStyle/>
           <a:p>
             <a:pPr algn="r">
-              <a:defRPr sz="900" b="1">
+              <a:defRPr sz="850" b="1">
                 <a:solidFill>
                   <a:srgbClr val="64748B"/>
                 </a:solidFill>
@@ -3858,14 +3859,14 @@
               </a:defRPr>
             </a:pPr>
             <a:r>
-              <a:t>10 / 16</a:t>
+              <a:t>10 / 17</a:t>
             </a:r>
           </a:p>
         </p:txBody>
       </p:sp>
       <p:pic>
         <p:nvPicPr>
-          <p:cNvPr id="7" name="Picture 6" descr="figura_03_demografia_estudiantes.png"/>
+          <p:cNvPr id="7" name="Picture 6" descr="figura_04_dominio_conceptual_normativo_estudiantes.png"/>
           <p:cNvPicPr>
             <a:picLocks noChangeAspect="1"/>
           </p:cNvPicPr>
@@ -3880,7 +3881,7 @@
         <p:spPr>
           <a:xfrm>
             <a:off x="777240" y="1600200"/>
-            <a:ext cx="10607040" cy="3696733"/>
+            <a:ext cx="5669280" cy="2806007"/>
           </a:xfrm>
           <a:prstGeom prst="rect">
             <a:avLst/>
@@ -3895,8 +3896,8 @@
         </p:nvSpPr>
         <p:spPr>
           <a:xfrm>
-            <a:off x="777240" y="5303520"/>
-            <a:ext cx="10607040" cy="1005840"/>
+            <a:off x="6720840" y="1600200"/>
+            <a:ext cx="4663440" cy="4663440"/>
           </a:xfrm>
           <a:prstGeom prst="rect">
             <a:avLst/>
@@ -3911,30 +3912,121 @@
           <a:p>
             <a:pPr>
               <a:spcAft>
-                <a:spcPts val="400"/>
-              </a:spcAft>
-              <a:defRPr b="1" sz="1100">
+                <a:spcPts val="1200"/>
+              </a:spcAft>
+              <a:defRPr b="1" sz="1400">
+                <a:solidFill>
+                  <a:srgbClr val="0F172A"/>
+                </a:solidFill>
+                <a:latin typeface="Cambria"/>
+              </a:defRPr>
+            </a:pPr>
+            <a:r>
+              <a:t>Hallazgos en la Muestra Estudiantil (n = 68)</a:t>
+            </a:r>
+          </a:p>
+          <a:p>
+            <a:pPr>
+              <a:spcAft>
+                <a:spcPts val="800"/>
+              </a:spcAft>
+            </a:pPr>
+            <a:r>
+              <a:rPr b="1" sz="1100">
                 <a:solidFill>
                   <a:srgbClr val="0D9488"/>
                 </a:solidFill>
                 <a:latin typeface="Calibri"/>
-              </a:defRPr>
-            </a:pPr>
-            <a:r>
-              <a:t>Interpretación Sociodemográfica y Relevancia Clínica:</a:t>
-            </a:r>
-          </a:p>
-          <a:p>
-            <a:pPr>
-              <a:defRPr sz="1100">
+              </a:rPr>
+              <a:t>✦ Perfil Demográfico Consolidado:
+</a:t>
+            </a:r>
+            <a:r>
+              <a:rPr sz="1050">
                 <a:solidFill>
                   <a:srgbClr val="1E293B"/>
                 </a:solidFill>
                 <a:latin typeface="Calibri"/>
-              </a:defRPr>
-            </a:pPr>
-            <a:r>
-              <a:t>Predominio femenino significativo (82.4%, n = 56) y concentración etaria entre 21 y 25 años (67.6%, n = 46). El 77.9% cursa 4.º año enfrentando el inicio de la atención en la Clínica Psicosocial. El perfil refleja una cohorte receptiva a enfoques integrativos, pero altamente vulnerable al estrés somático por la sobrecarga lectiva y práctica.</a:t>
+              </a:rPr>
+              <a:t>Marcada feminización (82.4% mujeres, n = 56) y concentración en adultos jóvenes de 20 a 22 años (61.8%). El 77.9% cursa 4.º año enfrentando el inicio de la práctica clínica supervisada.</a:t>
+            </a:r>
+          </a:p>
+          <a:p>
+            <a:pPr>
+              <a:spcAft>
+                <a:spcPts val="800"/>
+              </a:spcAft>
+            </a:pPr>
+            <a:r>
+              <a:rPr b="1" sz="1100">
+                <a:solidFill>
+                  <a:srgbClr val="0D9488"/>
+                </a:solidFill>
+                <a:latin typeface="Calibri"/>
+              </a:rPr>
+              <a:t>✦ Acierto Conceptual Técnico (67.6%):
+</a:t>
+            </a:r>
+            <a:r>
+              <a:rPr sz="1050">
+                <a:solidFill>
+                  <a:srgbClr val="1E293B"/>
+                </a:solidFill>
+                <a:latin typeface="Calibri"/>
+              </a:rPr>
+              <a:t>La mayoría identifica correctamente la definición de MTCI de la OMS, reconociéndola como saberes de salud integral; no obstante, el 75.0% declara familiaridad práctica baja o nula.</a:t>
+            </a:r>
+          </a:p>
+          <a:p>
+            <a:pPr>
+              <a:spcAft>
+                <a:spcPts val="800"/>
+              </a:spcAft>
+            </a:pPr>
+            <a:r>
+              <a:rPr b="1" sz="1100">
+                <a:solidFill>
+                  <a:srgbClr val="0D9488"/>
+                </a:solidFill>
+                <a:latin typeface="Calibri"/>
+              </a:rPr>
+              <a:t>✦ Brecha Normativa Ley No. 774 (58.8%):
+</a:t>
+            </a:r>
+            <a:r>
+              <a:rPr sz="1050">
+                <a:solidFill>
+                  <a:srgbClr val="1E293B"/>
+                </a:solidFill>
+                <a:latin typeface="Calibri"/>
+              </a:rPr>
+              <a:t>El 58.8% desconoce el propósito integrador de la ley de medicina natural o sostiene concepciones distorsionadas sobre su alcance en el sistema de salud.</a:t>
+            </a:r>
+          </a:p>
+          <a:p>
+            <a:pPr>
+              <a:spcAft>
+                <a:spcPts val="800"/>
+              </a:spcAft>
+            </a:pPr>
+            <a:r>
+              <a:rPr b="1" sz="1100">
+                <a:solidFill>
+                  <a:srgbClr val="0D9488"/>
+                </a:solidFill>
+                <a:latin typeface="Calibri"/>
+              </a:rPr>
+              <a:t>✦ Vacío Legal Crítico Ley No. 292 (64.7%):
+</a:t>
+            </a:r>
+            <a:r>
+              <a:rPr sz="1050">
+                <a:solidFill>
+                  <a:srgbClr val="1E293B"/>
+                </a:solidFill>
+                <a:latin typeface="Calibri"/>
+              </a:rPr>
+              <a:t>Apenas el 35.3% reconoce con precisión la inhabilitación taxativa del psicólogo para prescribir fármacos, evidenciando una urgente necesidad de formación deontológica.</a:t>
             </a:r>
           </a:p>
         </p:txBody>
@@ -3977,7 +4069,7 @@
         <p:spPr>
           <a:xfrm>
             <a:off x="777240" y="438912"/>
-            <a:ext cx="9601200" cy="274320"/>
+            <a:ext cx="9601200" cy="256032"/>
           </a:xfrm>
           <a:prstGeom prst="rect">
             <a:avLst/>
@@ -3991,7 +4083,7 @@
           <a:lstStyle/>
           <a:p>
             <a:pPr>
-              <a:defRPr sz="1000" b="1">
+              <a:defRPr sz="950" b="1">
                 <a:solidFill>
                   <a:srgbClr val="0D9488"/>
                 </a:solidFill>
@@ -3999,7 +4091,7 @@
               </a:defRPr>
             </a:pPr>
             <a:r>
-              <a:t>CAPÍTULO IV • RESULTADOS EMPÍRICOS (2/4)</a:t>
+              <a:t>CAPÍTULO IV • RESULTADOS EN ESTUDIANTES (2/2)</a:t>
             </a:r>
           </a:p>
         </p:txBody>
@@ -4012,7 +4104,7 @@
         </p:nvSpPr>
         <p:spPr>
           <a:xfrm>
-            <a:off x="777240" y="713232"/>
+            <a:off x="777240" y="694944"/>
             <a:ext cx="9875520" cy="685800"/>
           </a:xfrm>
           <a:prstGeom prst="rect">
@@ -4027,7 +4119,7 @@
           <a:lstStyle/>
           <a:p>
             <a:pPr>
-              <a:defRPr sz="2800" b="1">
+              <a:defRPr sz="2600" b="1">
                 <a:solidFill>
                   <a:srgbClr val="0F172A"/>
                 </a:solidFill>
@@ -4035,7 +4127,7 @@
               </a:defRPr>
             </a:pPr>
             <a:r>
-              <a:t>La Paradoja Formativa: Alta Pertinencia frente al Desamparo Curricular (OE1)</a:t>
+              <a:t>Frecuencia de Uso, Bienestar Percibido y Brecha Formativa (OE1)</a:t>
             </a:r>
           </a:p>
         </p:txBody>
@@ -4072,7 +4164,7 @@
         </p:nvSpPr>
         <p:spPr>
           <a:xfrm>
-            <a:off x="777240" y="6473952"/>
+            <a:off x="777240" y="6492240"/>
             <a:ext cx="9601200" cy="228600"/>
           </a:xfrm>
           <a:prstGeom prst="rect">
@@ -4087,7 +4179,7 @@
           <a:lstStyle/>
           <a:p>
             <a:pPr>
-              <a:defRPr sz="900">
+              <a:defRPr sz="850">
                 <a:solidFill>
                   <a:srgbClr val="64748B"/>
                 </a:solidFill>
@@ -4108,7 +4200,7 @@
         </p:nvSpPr>
         <p:spPr>
           <a:xfrm>
-            <a:off x="10789920" y="6473952"/>
+            <a:off x="10789920" y="6492240"/>
             <a:ext cx="640080" cy="228600"/>
           </a:xfrm>
           <a:prstGeom prst="rect">
@@ -4123,7 +4215,7 @@
           <a:lstStyle/>
           <a:p>
             <a:pPr algn="r">
-              <a:defRPr sz="900" b="1">
+              <a:defRPr sz="850" b="1">
                 <a:solidFill>
                   <a:srgbClr val="64748B"/>
                 </a:solidFill>
@@ -4131,7 +4223,7 @@
               </a:defRPr>
             </a:pPr>
             <a:r>
-              <a:t>11 / 16</a:t>
+              <a:t>11 / 17</a:t>
             </a:r>
           </a:p>
         </p:txBody>
@@ -4159,7 +4251,7 @@
           <a:lstStyle/>
           <a:p>
             <a:pPr>
-              <a:defRPr b="1" sz="3800">
+              <a:defRPr b="1" sz="3600">
                 <a:solidFill>
                   <a:srgbClr val="0D9488"/>
                 </a:solidFill>
@@ -4172,7 +4264,7 @@
           </a:p>
           <a:p>
             <a:pPr>
-              <a:defRPr b="1" sz="1200">
+              <a:defRPr b="1" sz="1150">
                 <a:solidFill>
                   <a:srgbClr val="0F172A"/>
                 </a:solidFill>
@@ -4180,7 +4272,7 @@
               </a:defRPr>
             </a:pPr>
             <a:r>
-              <a:t>Pertinencia Asistencial</a:t>
+              <a:t>Pertinencia Clínica Asistencial</a:t>
             </a:r>
           </a:p>
           <a:p>
@@ -4188,7 +4280,7 @@
               <a:spcAft>
                 <a:spcPts val="1000"/>
               </a:spcAft>
-              <a:defRPr sz="1100">
+              <a:defRPr sz="1050">
                 <a:solidFill>
                   <a:srgbClr val="1E293B"/>
                 </a:solidFill>
@@ -4196,12 +4288,12 @@
               </a:defRPr>
             </a:pPr>
             <a:r>
-              <a:t>Considera necesario y urgente articular la MTCI en el ejercicio de la psicología clínica.</a:t>
-            </a:r>
-          </a:p>
-          <a:p>
-            <a:pPr>
-              <a:defRPr b="1" sz="3800">
+              <a:t>Considera necesario y conveniente incorporar la MTCI como complemento en el ejercicio de la psicología.</a:t>
+            </a:r>
+          </a:p>
+          <a:p>
+            <a:pPr>
+              <a:defRPr b="1" sz="3600">
                 <a:solidFill>
                   <a:srgbClr val="DC2626"/>
                 </a:solidFill>
@@ -4214,7 +4306,7 @@
           </a:p>
           <a:p>
             <a:pPr>
-              <a:defRPr b="1" sz="1200">
+              <a:defRPr b="1" sz="1150">
                 <a:solidFill>
                   <a:srgbClr val="0F172A"/>
                 </a:solidFill>
@@ -4222,7 +4314,7 @@
               </a:defRPr>
             </a:pPr>
             <a:r>
-              <a:t>Desamparo Curricular</a:t>
+              <a:t>Preparación Insuficiente para Derivación</a:t>
             </a:r>
           </a:p>
           <a:p>
@@ -4230,7 +4322,7 @@
               <a:spcAft>
                 <a:spcPts val="1000"/>
               </a:spcAft>
-              <a:defRPr sz="1100">
+              <a:defRPr sz="1050">
                 <a:solidFill>
                   <a:srgbClr val="1E293B"/>
                 </a:solidFill>
@@ -4238,12 +4330,12 @@
               </a:defRPr>
             </a:pPr>
             <a:r>
-              <a:t>Reconoce no haber recibido preparación formal alguna para orientar o derivar en MTCI.</a:t>
-            </a:r>
-          </a:p>
-          <a:p>
-            <a:pPr>
-              <a:defRPr b="1" sz="3800">
+              <a:t>Reconoce poseer preparación nula o insuficiente para derivar pacientes hacia facilitadores autorizados.</a:t>
+            </a:r>
+          </a:p>
+          <a:p>
+            <a:pPr>
+              <a:defRPr b="1" sz="3600">
                 <a:solidFill>
                   <a:srgbClr val="D97706"/>
                 </a:solidFill>
@@ -4256,7 +4348,7 @@
           </a:p>
           <a:p>
             <a:pPr>
-              <a:defRPr b="1" sz="1200">
+              <a:defRPr b="1" sz="1150">
                 <a:solidFill>
                   <a:srgbClr val="0F172A"/>
                 </a:solidFill>
@@ -4264,7 +4356,7 @@
               </a:defRPr>
             </a:pPr>
             <a:r>
-              <a:t>Inseguridad Psicoeducativa</a:t>
+              <a:t>Preparación Insuficiente para Psicoeducación</a:t>
             </a:r>
           </a:p>
           <a:p>
@@ -4272,7 +4364,7 @@
               <a:spcAft>
                 <a:spcPts val="1000"/>
               </a:spcAft>
-              <a:defRPr sz="1100">
+              <a:defRPr sz="1050">
                 <a:solidFill>
                   <a:srgbClr val="1E293B"/>
                 </a:solidFill>
@@ -4280,7 +4372,7 @@
               </a:defRPr>
             </a:pPr>
             <a:r>
-              <a:t>Autopercibe competencias nulas o insuficientes para dialogar sobre remedios tradicionales.</a:t>
+              <a:t>Autopercibe competencias nulas o insuficientes para orientar a consultantes sobre el uso de terapias tradicionales.</a:t>
             </a:r>
           </a:p>
         </p:txBody>
@@ -4317,7 +4409,7 @@
         </p:nvSpPr>
         <p:spPr>
           <a:xfrm>
-            <a:off x="5486400" y="4983480"/>
+            <a:off x="5486400" y="5029200"/>
             <a:ext cx="5852160" cy="1280160"/>
           </a:xfrm>
           <a:prstGeom prst="rect">
@@ -4343,12 +4435,12 @@
               </a:defRPr>
             </a:pPr>
             <a:r>
-              <a:t>Uso Personal y Eficacia Somática Percibida:</a:t>
-            </a:r>
-          </a:p>
-          <a:p>
-            <a:pPr>
-              <a:defRPr sz="1100">
+              <a:t>Uso Personal Reactivo y Efectos en el Bienestar:</a:t>
+            </a:r>
+          </a:p>
+          <a:p>
+            <a:pPr>
+              <a:defRPr sz="1050">
                 <a:solidFill>
                   <a:srgbClr val="1E293B"/>
                 </a:solidFill>
@@ -4356,11 +4448,11 @@
               </a:defRPr>
             </a:pPr>
             <a:r>
-              <a:t>• Carácter Reactivo: 52.9% no usa MTCI preventivamente; recurren únicamente ante crisis o sobrecarga.</a:t>
+              <a:t>• Carácter Reactivo: 52.9% no utiliza MTCI de forma preventiva regular; acuden solo ante sobrecarga académica.</a:t>
             </a:r>
             <a:br/>
             <a:r>
-              <a:t>• Eficacia Plena: 86.7% de usuarios reales reporta alivio muscular y bienestar; 0.0% efectos adversos.</a:t>
+              <a:t>• Eficacia en Usuarios (n = 30): 86.7% reporta alivio muscular y serenidad; 0.0% reporta efectos adversos.</a:t>
             </a:r>
           </a:p>
         </p:txBody>
@@ -4403,7 +4495,7 @@
         <p:spPr>
           <a:xfrm>
             <a:off x="777240" y="438912"/>
-            <a:ext cx="9601200" cy="274320"/>
+            <a:ext cx="9601200" cy="256032"/>
           </a:xfrm>
           <a:prstGeom prst="rect">
             <a:avLst/>
@@ -4417,7 +4509,7 @@
           <a:lstStyle/>
           <a:p>
             <a:pPr>
-              <a:defRPr sz="1000" b="1">
+              <a:defRPr sz="950" b="1">
                 <a:solidFill>
                   <a:srgbClr val="0D9488"/>
                 </a:solidFill>
@@ -4425,7 +4517,7 @@
               </a:defRPr>
             </a:pPr>
             <a:r>
-              <a:t>CAPÍTULO IV • RESULTADOS EMPÍRICOS (3/4)</a:t>
+              <a:t>CAPÍTULO IV • RESULTADOS EN FACILITADORES LOCALES</a:t>
             </a:r>
           </a:p>
         </p:txBody>
@@ -4438,7 +4530,7 @@
         </p:nvSpPr>
         <p:spPr>
           <a:xfrm>
-            <a:off x="777240" y="713232"/>
+            <a:off x="777240" y="694944"/>
             <a:ext cx="9875520" cy="685800"/>
           </a:xfrm>
           <a:prstGeom prst="rect">
@@ -4453,7 +4545,7 @@
           <a:lstStyle/>
           <a:p>
             <a:pPr>
-              <a:defRPr sz="2800" b="1">
+              <a:defRPr sz="2600" b="1">
                 <a:solidFill>
                   <a:srgbClr val="0F172A"/>
                 </a:solidFill>
@@ -4461,7 +4553,7 @@
               </a:defRPr>
             </a:pPr>
             <a:r>
-              <a:t>Perspectiva de Facilitadores Locales de Estelí y Claustro Docente</a:t>
+              <a:t>Modalidades Terapéuticas, Eficacia Somática y Barreras en Estelí (OE2)</a:t>
             </a:r>
           </a:p>
         </p:txBody>
@@ -4498,7 +4590,7 @@
         </p:nvSpPr>
         <p:spPr>
           <a:xfrm>
-            <a:off x="777240" y="6473952"/>
+            <a:off x="777240" y="6492240"/>
             <a:ext cx="9601200" cy="228600"/>
           </a:xfrm>
           <a:prstGeom prst="rect">
@@ -4513,7 +4605,7 @@
           <a:lstStyle/>
           <a:p>
             <a:pPr>
-              <a:defRPr sz="900">
+              <a:defRPr sz="850">
                 <a:solidFill>
                   <a:srgbClr val="64748B"/>
                 </a:solidFill>
@@ -4534,7 +4626,7 @@
         </p:nvSpPr>
         <p:spPr>
           <a:xfrm>
-            <a:off x="10789920" y="6473952"/>
+            <a:off x="10789920" y="6492240"/>
             <a:ext cx="640080" cy="228600"/>
           </a:xfrm>
           <a:prstGeom prst="rect">
@@ -4549,7 +4641,7 @@
           <a:lstStyle/>
           <a:p>
             <a:pPr algn="r">
-              <a:defRPr sz="900" b="1">
+              <a:defRPr sz="850" b="1">
                 <a:solidFill>
                   <a:srgbClr val="64748B"/>
                 </a:solidFill>
@@ -4557,21 +4649,69 @@
               </a:defRPr>
             </a:pPr>
             <a:r>
-              <a:t>12 / 16</a:t>
-            </a:r>
-          </a:p>
-        </p:txBody>
-      </p:sp>
-      <p:sp>
-        <p:nvSpPr>
-          <p:cNvPr id="7" name="TextBox 6"/>
+              <a:t>12 / 17</a:t>
+            </a:r>
+          </a:p>
+        </p:txBody>
+      </p:sp>
+      <p:pic>
+        <p:nvPicPr>
+          <p:cNvPr id="7" name="Picture 6" descr="figura_12_practicas_actores_locales.png"/>
+          <p:cNvPicPr>
+            <a:picLocks noChangeAspect="1"/>
+          </p:cNvPicPr>
+          <p:nvPr/>
+        </p:nvPicPr>
+        <p:blipFill>
+          <a:blip r:embed="rId3"/>
+          <a:stretch>
+            <a:fillRect/>
+          </a:stretch>
+        </p:blipFill>
+        <p:spPr>
+          <a:xfrm>
+            <a:off x="777240" y="1600200"/>
+            <a:ext cx="5303520" cy="2764601"/>
+          </a:xfrm>
+          <a:prstGeom prst="rect">
+            <a:avLst/>
+          </a:prstGeom>
+        </p:spPr>
+      </p:pic>
+      <p:pic>
+        <p:nvPicPr>
+          <p:cNvPr id="8" name="Picture 7" descr="figura_14_apertura_emocional_usuarios_actores.png"/>
+          <p:cNvPicPr>
+            <a:picLocks noChangeAspect="1"/>
+          </p:cNvPicPr>
+          <p:nvPr/>
+        </p:nvPicPr>
+        <p:blipFill>
+          <a:blip r:embed="rId4"/>
+          <a:stretch>
+            <a:fillRect/>
+          </a:stretch>
+        </p:blipFill>
+        <p:spPr>
+          <a:xfrm>
+            <a:off x="6583680" y="1600200"/>
+            <a:ext cx="2926080" cy="2129938"/>
+          </a:xfrm>
+          <a:prstGeom prst="rect">
+            <a:avLst/>
+          </a:prstGeom>
+        </p:spPr>
+      </p:pic>
+      <p:sp>
+        <p:nvSpPr>
+          <p:cNvPr id="9" name="TextBox 8"/>
           <p:cNvSpPr txBox="1"/>
           <p:nvPr/>
         </p:nvSpPr>
         <p:spPr>
           <a:xfrm>
-            <a:off x="777240" y="1645920"/>
-            <a:ext cx="5120640" cy="4572000"/>
+            <a:off x="6400800" y="4114800"/>
+            <a:ext cx="5029200" cy="2103120"/>
           </a:xfrm>
           <a:prstGeom prst="rect">
             <a:avLst/>
@@ -4585,326 +4725,118 @@
           <a:lstStyle/>
           <a:p>
             <a:pPr>
-              <a:defRPr b="1" sz="4000">
+              <a:spcAft>
+                <a:spcPts val="400"/>
+              </a:spcAft>
+              <a:defRPr b="1" sz="1100">
+                <a:solidFill>
+                  <a:srgbClr val="0F172A"/>
+                </a:solidFill>
+                <a:latin typeface="Calibri"/>
+              </a:defRPr>
+            </a:pPr>
+            <a:r>
+              <a:t>Hallazgos Empíricos en Facilitadores de Estelí (n = 9):</a:t>
+            </a:r>
+          </a:p>
+          <a:p>
+            <a:pPr>
+              <a:spcAft>
+                <a:spcPts val="300"/>
+              </a:spcAft>
+            </a:pPr>
+            <a:r>
+              <a:rPr b="1" sz="1000">
                 <a:solidFill>
                   <a:srgbClr val="0D9488"/>
                 </a:solidFill>
-                <a:latin typeface="Cambria"/>
-              </a:defRPr>
-            </a:pPr>
-            <a:r>
-              <a:t>100%</a:t>
-            </a:r>
-          </a:p>
-          <a:p>
-            <a:pPr>
-              <a:spcAft>
-                <a:spcPts val="1200"/>
-              </a:spcAft>
-              <a:defRPr b="1" sz="1200">
-                <a:solidFill>
-                  <a:srgbClr val="0F172A"/>
-                </a:solidFill>
-                <a:latin typeface="Calibri"/>
-              </a:defRPr>
-            </a:pPr>
-            <a:r>
-              <a:t>FACILITADORES LOCALES DE ESTELÍ (n = 9)</a:t>
-            </a:r>
-          </a:p>
-          <a:p>
-            <a:pPr>
-              <a:spcAft>
-                <a:spcPts val="800"/>
-              </a:spcAft>
-            </a:pPr>
-            <a:r>
-              <a:rPr b="1" sz="1150">
+                <a:latin typeface="Calibri"/>
+              </a:rPr>
+              <a:t>✦ 100% Alivio de Estrés Somático: </a:t>
+            </a:r>
+            <a:r>
+              <a:rPr sz="950">
+                <a:solidFill>
+                  <a:srgbClr val="1E293B"/>
+                </a:solidFill>
+                <a:latin typeface="Calibri"/>
+              </a:rPr>
+              <a:t>Constatan descompresión miofascial inmediata y recuperación de calma psicofisiológica en consultantes.</a:t>
+            </a:r>
+          </a:p>
+          <a:p>
+            <a:pPr>
+              <a:spcAft>
+                <a:spcPts val="300"/>
+              </a:spcAft>
+            </a:pPr>
+            <a:r>
+              <a:rPr b="1" sz="1000">
                 <a:solidFill>
                   <a:srgbClr val="0D9488"/>
                 </a:solidFill>
                 <a:latin typeface="Calibri"/>
               </a:rPr>
-              <a:t>✦ Alivio Somático Directo: </a:t>
-            </a:r>
-            <a:r>
-              <a:rPr sz="1100">
+              <a:t>✦ 88.9% Apertura Emocional: </a:t>
+            </a:r>
+            <a:r>
+              <a:rPr sz="950">
                 <a:solidFill>
                   <a:srgbClr val="1E293B"/>
                 </a:solidFill>
                 <a:latin typeface="Calibri"/>
               </a:rPr>
-              <a:t>Constatan descompresión miofascial inmediata y mayor apertura afectiva del consultante para el diálogo psicológico posterior.</a:t>
-            </a:r>
-          </a:p>
-          <a:p>
-            <a:pPr>
-              <a:spcAft>
-                <a:spcPts val="800"/>
-              </a:spcAft>
-            </a:pPr>
-            <a:r>
-              <a:rPr b="1" sz="1150">
+              <a:t>El desbloqueo corporal incrementa la receptividad reflexiva y facilita el diálogo terapéutico posterior.</a:t>
+            </a:r>
+          </a:p>
+          <a:p>
+            <a:pPr>
+              <a:spcAft>
+                <a:spcPts val="300"/>
+              </a:spcAft>
+            </a:pPr>
+            <a:r>
+              <a:rPr b="1" sz="1000">
                 <a:solidFill>
                   <a:srgbClr val="0D9488"/>
                 </a:solidFill>
                 <a:latin typeface="Calibri"/>
               </a:rPr>
-              <a:t>✦ Memoria Viva en Estelí: </a:t>
-            </a:r>
-            <a:r>
-              <a:rPr sz="1100">
+              <a:t>✦ Inocuidad Percibida (100%): </a:t>
+            </a:r>
+            <a:r>
+              <a:rPr sz="950">
                 <a:solidFill>
                   <a:srgbClr val="1E293B"/>
                 </a:solidFill>
                 <a:latin typeface="Calibri"/>
               </a:rPr>
-              <a:t>77.8% mujeres; 44.4% acumula entre 20 y 30 años de experiencia comunitaria continuada.</a:t>
-            </a:r>
-          </a:p>
-          <a:p>
-            <a:pPr>
-              <a:spcAft>
-                <a:spcPts val="800"/>
-              </a:spcAft>
-            </a:pPr>
-            <a:r>
-              <a:rPr b="1" sz="1150">
+              <a:t>Cero reporte de reacciones adversas o crisis emocionales iatrogénicas en los consultorios.</a:t>
+            </a:r>
+          </a:p>
+          <a:p>
+            <a:pPr>
+              <a:spcAft>
+                <a:spcPts val="300"/>
+              </a:spcAft>
+            </a:pPr>
+            <a:r>
+              <a:rPr b="1" sz="1000">
                 <a:solidFill>
                   <a:srgbClr val="0D9488"/>
                 </a:solidFill>
                 <a:latin typeface="Calibri"/>
               </a:rPr>
-              <a:t>✦ Estigma Sociocultural: </a:t>
-            </a:r>
-            <a:r>
-              <a:rPr sz="1100">
+              <a:t>✦ Barreras Socioculturales y Económicas: </a:t>
+            </a:r>
+            <a:r>
+              <a:rPr sz="950">
                 <a:solidFill>
                   <a:srgbClr val="1E293B"/>
                 </a:solidFill>
                 <a:latin typeface="Calibri"/>
               </a:rPr>
-              <a:t>El 100% enfrenta prejuicios religiosos y mitos urbanos respecto a las terapias naturales.</a:t>
-            </a:r>
-          </a:p>
-          <a:p>
-            <a:pPr>
-              <a:spcAft>
-                <a:spcPts val="800"/>
-              </a:spcAft>
-            </a:pPr>
-            <a:r>
-              <a:rPr b="1" sz="1150">
-                <a:solidFill>
-                  <a:srgbClr val="0D9488"/>
-                </a:solidFill>
-                <a:latin typeface="Calibri"/>
-              </a:rPr>
-              <a:t>✦ Desafío Económico: </a:t>
-            </a:r>
-            <a:r>
-              <a:rPr sz="1100">
-                <a:solidFill>
-                  <a:srgbClr val="1E293B"/>
-                </a:solidFill>
-                <a:latin typeface="Calibri"/>
-              </a:rPr>
-              <a:t>77.8% reporta que la falta de recursos de los usuarios vulnerables interrumpe la continuidad del cuidado.</a:t>
-            </a:r>
-          </a:p>
-        </p:txBody>
-      </p:sp>
-      <p:sp>
-        <p:nvSpPr>
-          <p:cNvPr id="8" name="Rectangle 7"/>
-          <p:cNvSpPr/>
-          <p:nvPr/>
-        </p:nvSpPr>
-        <p:spPr>
-          <a:xfrm>
-            <a:off x="6172200" y="1737360"/>
-            <a:ext cx="12700" cy="4297680"/>
-          </a:xfrm>
-          <a:prstGeom prst="rect">
-            <a:avLst/>
-          </a:prstGeom>
-          <a:noFill/>
-          <a:ln w="9525">
-            <a:solidFill>
-              <a:srgbClr val="E2E8F0"/>
-            </a:solidFill>
-          </a:ln>
-        </p:spPr>
-        <p:style>
-          <a:lnRef idx="1">
-            <a:schemeClr val="accent1"/>
-          </a:lnRef>
-          <a:fillRef idx="3">
-            <a:schemeClr val="accent1"/>
-          </a:fillRef>
-          <a:effectRef idx="2">
-            <a:schemeClr val="accent1"/>
-          </a:effectRef>
-          <a:fontRef idx="minor">
-            <a:schemeClr val="lt1"/>
-          </a:fontRef>
-        </p:style>
-        <p:txBody>
-          <a:bodyPr rtlCol="0" anchor="ctr"/>
-          <a:lstStyle/>
-          <a:p>
-            <a:pPr algn="ctr"/>
-          </a:p>
-        </p:txBody>
-      </p:sp>
-      <p:sp>
-        <p:nvSpPr>
-          <p:cNvPr id="9" name="TextBox 8"/>
-          <p:cNvSpPr txBox="1"/>
-          <p:nvPr/>
-        </p:nvSpPr>
-        <p:spPr>
-          <a:xfrm>
-            <a:off x="6537960" y="1645920"/>
-            <a:ext cx="5120640" cy="4572000"/>
-          </a:xfrm>
-          <a:prstGeom prst="rect">
-            <a:avLst/>
-          </a:prstGeom>
-          <a:noFill/>
-        </p:spPr>
-        <p:txBody>
-          <a:bodyPr wrap="square" lIns="0" rIns="0" tIns="0" bIns="0">
-            <a:spAutoFit/>
-          </a:bodyPr>
-          <a:lstStyle/>
-          <a:p>
-            <a:pPr>
-              <a:defRPr b="1" sz="4000">
-                <a:solidFill>
-                  <a:srgbClr val="2563EB"/>
-                </a:solidFill>
-                <a:latin typeface="Cambria"/>
-              </a:defRPr>
-            </a:pPr>
-            <a:r>
-              <a:t>100%</a:t>
-            </a:r>
-          </a:p>
-          <a:p>
-            <a:pPr>
-              <a:spcAft>
-                <a:spcPts val="1200"/>
-              </a:spcAft>
-              <a:defRPr b="1" sz="1200">
-                <a:solidFill>
-                  <a:srgbClr val="0F172A"/>
-                </a:solidFill>
-                <a:latin typeface="Calibri"/>
-              </a:defRPr>
-            </a:pPr>
-            <a:r>
-              <a:t>CLAUSTRO DOCENTE-PSICÓLOGOS (n = 9)</a:t>
-            </a:r>
-          </a:p>
-          <a:p>
-            <a:pPr>
-              <a:spcAft>
-                <a:spcPts val="800"/>
-              </a:spcAft>
-            </a:pPr>
-            <a:r>
-              <a:rPr b="1" sz="1150">
-                <a:solidFill>
-                  <a:srgbClr val="2563EB"/>
-                </a:solidFill>
-                <a:latin typeface="Calibri"/>
-              </a:rPr>
-              <a:t>✦ Respaldo Curricular Pleno: </a:t>
-            </a:r>
-            <a:r>
-              <a:rPr sz="1100">
-                <a:solidFill>
-                  <a:srgbClr val="1E293B"/>
-                </a:solidFill>
-                <a:latin typeface="Calibri"/>
-              </a:rPr>
-              <a:t>Apoyo unánime a la incorporación transversal de las MTCI bajo un enfoque crítico y científico.</a:t>
-            </a:r>
-          </a:p>
-          <a:p>
-            <a:pPr>
-              <a:spcAft>
-                <a:spcPts val="800"/>
-              </a:spcAft>
-            </a:pPr>
-            <a:r>
-              <a:rPr b="1" sz="1150">
-                <a:solidFill>
-                  <a:srgbClr val="2563EB"/>
-                </a:solidFill>
-                <a:latin typeface="Calibri"/>
-              </a:rPr>
-              <a:t>✦ Metodologías Activas (88.9%): </a:t>
-            </a:r>
-            <a:r>
-              <a:rPr sz="1100">
-                <a:solidFill>
-                  <a:srgbClr val="1E293B"/>
-                </a:solidFill>
-                <a:latin typeface="Calibri"/>
-              </a:rPr>
-              <a:t>Rechazan la enseñanza memorística; priorizan talleres vivenciales y análisis de casos clínicos.</a:t>
-            </a:r>
-          </a:p>
-          <a:p>
-            <a:pPr>
-              <a:spcAft>
-                <a:spcPts val="800"/>
-              </a:spcAft>
-            </a:pPr>
-            <a:r>
-              <a:rPr b="1" sz="1150">
-                <a:solidFill>
-                  <a:srgbClr val="2563EB"/>
-                </a:solidFill>
-                <a:latin typeface="Calibri"/>
-              </a:rPr>
-              <a:t>✦ Competencias Clave: </a:t>
-            </a:r>
-            <a:r>
-              <a:rPr sz="1100">
-                <a:solidFill>
-                  <a:srgbClr val="1E293B"/>
-                </a:solidFill>
-                <a:latin typeface="Calibri"/>
-              </a:rPr>
-              <a:t>Demandan formar en juicio clínico ético, consentimiento informado y límites profesionales de no prescripción.</a:t>
-            </a:r>
-          </a:p>
-          <a:p>
-            <a:pPr>
-              <a:spcAft>
-                <a:spcPts val="800"/>
-              </a:spcAft>
-            </a:pPr>
-            <a:r>
-              <a:rPr b="1" sz="1150">
-                <a:solidFill>
-                  <a:srgbClr val="2563EB"/>
-                </a:solidFill>
-                <a:latin typeface="Calibri"/>
-              </a:rPr>
-              <a:t>✦ Capacitación Propia Urgente: </a:t>
-            </a:r>
-            <a:r>
-              <a:rPr sz="1100">
-                <a:solidFill>
-                  <a:srgbClr val="1E293B"/>
-                </a:solidFill>
-                <a:latin typeface="Calibri"/>
-              </a:rPr>
-              <a:t>El profesorado solicita formación continua en neurobiología somática y regulación Bottom-Up.</a:t>
+              <a:t>El 77.8% enfrenta ocasionalmente reservas religiosas y el 77.8% señala que la falta de recursos interrumpe el tratamiento.</a:t>
             </a:r>
           </a:p>
         </p:txBody>
@@ -4947,7 +4879,7 @@
         <p:spPr>
           <a:xfrm>
             <a:off x="777240" y="438912"/>
-            <a:ext cx="9601200" cy="274320"/>
+            <a:ext cx="9601200" cy="256032"/>
           </a:xfrm>
           <a:prstGeom prst="rect">
             <a:avLst/>
@@ -4961,7 +4893,7 @@
           <a:lstStyle/>
           <a:p>
             <a:pPr>
-              <a:defRPr sz="1000" b="1">
+              <a:defRPr sz="950" b="1">
                 <a:solidFill>
                   <a:srgbClr val="0D9488"/>
                 </a:solidFill>
@@ -4969,7 +4901,7 @@
               </a:defRPr>
             </a:pPr>
             <a:r>
-              <a:t>CAPÍTULO V • PROPUESTA OPERATIVA (OE3)</a:t>
+              <a:t>CAPÍTULO IV • RESULTADOS EN EL CLAUSTRO DOCENTE</a:t>
             </a:r>
           </a:p>
         </p:txBody>
@@ -4982,7 +4914,7 @@
         </p:nvSpPr>
         <p:spPr>
           <a:xfrm>
-            <a:off x="777240" y="713232"/>
+            <a:off x="777240" y="694944"/>
             <a:ext cx="9875520" cy="685800"/>
           </a:xfrm>
           <a:prstGeom prst="rect">
@@ -4997,7 +4929,7 @@
           <a:lstStyle/>
           <a:p>
             <a:pPr>
-              <a:defRPr sz="2800" b="1">
+              <a:defRPr sz="2600" b="1">
                 <a:solidFill>
                   <a:srgbClr val="0F172A"/>
                 </a:solidFill>
@@ -5005,7 +4937,7 @@
               </a:defRPr>
             </a:pPr>
             <a:r>
-              <a:t>Manual de Estrategias de MTCI para la Formación y Práctica Psicológica</a:t>
+              <a:t>Estrategias Pedagógicas, Didáctica Vivencial y Consenso Ético (OE3)</a:t>
             </a:r>
           </a:p>
         </p:txBody>
@@ -5042,7 +4974,7 @@
         </p:nvSpPr>
         <p:spPr>
           <a:xfrm>
-            <a:off x="777240" y="6473952"/>
+            <a:off x="777240" y="6492240"/>
             <a:ext cx="9601200" cy="228600"/>
           </a:xfrm>
           <a:prstGeom prst="rect">
@@ -5057,7 +4989,7 @@
           <a:lstStyle/>
           <a:p>
             <a:pPr>
-              <a:defRPr sz="900">
+              <a:defRPr sz="850">
                 <a:solidFill>
                   <a:srgbClr val="64748B"/>
                 </a:solidFill>
@@ -5078,7 +5010,7 @@
         </p:nvSpPr>
         <p:spPr>
           <a:xfrm>
-            <a:off x="10789920" y="6473952"/>
+            <a:off x="10789920" y="6492240"/>
             <a:ext cx="640080" cy="228600"/>
           </a:xfrm>
           <a:prstGeom prst="rect">
@@ -5093,7 +5025,7 @@
           <a:lstStyle/>
           <a:p>
             <a:pPr algn="r">
-              <a:defRPr sz="900" b="1">
+              <a:defRPr sz="850" b="1">
                 <a:solidFill>
                   <a:srgbClr val="64748B"/>
                 </a:solidFill>
@@ -5101,14 +5033,14 @@
               </a:defRPr>
             </a:pPr>
             <a:r>
-              <a:t>13 / 16</a:t>
+              <a:t>13 / 17</a:t>
             </a:r>
           </a:p>
         </p:txBody>
       </p:sp>
       <p:pic>
         <p:nvPicPr>
-          <p:cNvPr id="7" name="Picture 6" descr="portada_manual.jpg"/>
+          <p:cNvPr id="7" name="Picture 6" descr="figura_24_estrategias_academicas_docentes.png"/>
           <p:cNvPicPr>
             <a:picLocks noChangeAspect="1"/>
           </p:cNvPicPr>
@@ -5122,24 +5054,48 @@
         </p:blipFill>
         <p:spPr>
           <a:xfrm>
-            <a:off x="777240" y="1645920"/>
-            <a:ext cx="3474720" cy="2456193"/>
+            <a:off x="777240" y="1600200"/>
+            <a:ext cx="5212080" cy="2503264"/>
           </a:xfrm>
           <a:prstGeom prst="rect">
             <a:avLst/>
           </a:prstGeom>
         </p:spPr>
       </p:pic>
-      <p:sp>
-        <p:nvSpPr>
-          <p:cNvPr id="8" name="TextBox 7"/>
+      <p:pic>
+        <p:nvPicPr>
+          <p:cNvPr id="8" name="Picture 7" descr="figura_25_experiencias_favorables_docentes.png"/>
+          <p:cNvPicPr>
+            <a:picLocks noChangeAspect="1"/>
+          </p:cNvPicPr>
+          <p:nvPr/>
+        </p:nvPicPr>
+        <p:blipFill>
+          <a:blip r:embed="rId4"/>
+          <a:stretch>
+            <a:fillRect/>
+          </a:stretch>
+        </p:blipFill>
+        <p:spPr>
+          <a:xfrm>
+            <a:off x="6309360" y="1600200"/>
+            <a:ext cx="5120640" cy="2444077"/>
+          </a:xfrm>
+          <a:prstGeom prst="rect">
+            <a:avLst/>
+          </a:prstGeom>
+        </p:spPr>
+      </p:pic>
+      <p:sp>
+        <p:nvSpPr>
+          <p:cNvPr id="9" name="TextBox 8"/>
           <p:cNvSpPr txBox="1"/>
           <p:nvPr/>
         </p:nvSpPr>
         <p:spPr>
           <a:xfrm>
-            <a:off x="777240" y="3931920"/>
-            <a:ext cx="3474720" cy="2286000"/>
+            <a:off x="777240" y="4892040"/>
+            <a:ext cx="10607040" cy="1371600"/>
           </a:xfrm>
           <a:prstGeom prst="rect">
             <a:avLst/>
@@ -5156,21 +5112,21 @@
               <a:spcAft>
                 <a:spcPts val="400"/>
               </a:spcAft>
-              <a:defRPr b="1" sz="1050">
-                <a:solidFill>
-                  <a:srgbClr val="0D9488"/>
-                </a:solidFill>
-                <a:latin typeface="Calibri"/>
-              </a:defRPr>
-            </a:pPr>
-            <a:r>
-              <a:t>FICHA TÉCNICA DEL PRODUCTO</a:t>
-            </a:r>
-          </a:p>
-          <a:p>
-            <a:pPr>
-              <a:spcAft>
-                <a:spcPts val="300"/>
+              <a:defRPr b="1" sz="1100">
+                <a:solidFill>
+                  <a:srgbClr val="2563EB"/>
+                </a:solidFill>
+                <a:latin typeface="Calibri"/>
+              </a:defRPr>
+            </a:pPr>
+            <a:r>
+              <a:t>Criterios Rectores del Claustro Docente de Psicología (n = 9):</a:t>
+            </a:r>
+          </a:p>
+          <a:p>
+            <a:pPr>
+              <a:spcAft>
+                <a:spcPts val="200"/>
               </a:spcAft>
               <a:defRPr sz="1050">
                 <a:solidFill>
@@ -5180,13 +5136,13 @@
               </a:defRPr>
             </a:pPr>
             <a:r>
-              <a:t>• Extensión: 18 páginas in extenso (Anexo 16.2).</a:t>
-            </a:r>
-          </a:p>
-          <a:p>
-            <a:pPr>
-              <a:spcAft>
-                <a:spcPts val="300"/>
+              <a:t>• 100.0% Respaldo Curricular: Apoyo unánime a la incorporación transversal de la MTCI bajo un enfoque científico y no prescriptivo.</a:t>
+            </a:r>
+          </a:p>
+          <a:p>
+            <a:pPr>
+              <a:spcAft>
+                <a:spcPts val="200"/>
               </a:spcAft>
               <a:defRPr sz="1050">
                 <a:solidFill>
@@ -5196,13 +5152,13 @@
               </a:defRPr>
             </a:pPr>
             <a:r>
-              <a:t>• Destinatarios: Alumnos y docentes de Clínica Psicosocial.</a:t>
-            </a:r>
-          </a:p>
-          <a:p>
-            <a:pPr>
-              <a:spcAft>
-                <a:spcPts val="300"/>
+              <a:t>• Pedagogía Vivencial (88.9%): Priorizan talleres de autorregulación somática y descartaron la enseñanza puramente teórica o abstracta.</a:t>
+            </a:r>
+          </a:p>
+          <a:p>
+            <a:pPr>
+              <a:spcAft>
+                <a:spcPts val="200"/>
               </a:spcAft>
               <a:defRPr sz="1050">
                 <a:solidFill>
@@ -5212,13 +5168,13 @@
               </a:defRPr>
             </a:pPr>
             <a:r>
-              <a:t>• Propósito: Dotar de discernimiento ético para explorar y derivar, sin habilitar como terapeutas alternativos.</a:t>
-            </a:r>
-          </a:p>
-          <a:p>
-            <a:pPr>
-              <a:spcAft>
-                <a:spcPts val="300"/>
+              <a:t>• Vinculación Territorial (77.8%): Respaldan intercambios directos con facilitadores tradicionales y visitas a centros MINSA (66.7%).</a:t>
+            </a:r>
+          </a:p>
+          <a:p>
+            <a:pPr>
+              <a:spcAft>
+                <a:spcPts val="200"/>
               </a:spcAft>
               <a:defRPr sz="1050">
                 <a:solidFill>
@@ -5228,289 +5184,7 @@
               </a:defRPr>
             </a:pPr>
             <a:r>
-              <a:t>• Instrumento: Adaptación del cuestionario I-CAM-Q para tamizaje transcultural.</a:t>
-            </a:r>
-          </a:p>
-        </p:txBody>
-      </p:sp>
-      <p:sp>
-        <p:nvSpPr>
-          <p:cNvPr id="9" name="Rectangle 8"/>
-          <p:cNvSpPr/>
-          <p:nvPr/>
-        </p:nvSpPr>
-        <p:spPr>
-          <a:xfrm>
-            <a:off x="4480560" y="1737360"/>
-            <a:ext cx="12700" cy="4297680"/>
-          </a:xfrm>
-          <a:prstGeom prst="rect">
-            <a:avLst/>
-          </a:prstGeom>
-          <a:noFill/>
-          <a:ln w="9525">
-            <a:solidFill>
-              <a:srgbClr val="E2E8F0"/>
-            </a:solidFill>
-          </a:ln>
-        </p:spPr>
-        <p:style>
-          <a:lnRef idx="1">
-            <a:schemeClr val="accent1"/>
-          </a:lnRef>
-          <a:fillRef idx="3">
-            <a:schemeClr val="accent1"/>
-          </a:fillRef>
-          <a:effectRef idx="2">
-            <a:schemeClr val="accent1"/>
-          </a:effectRef>
-          <a:fontRef idx="minor">
-            <a:schemeClr val="lt1"/>
-          </a:fontRef>
-        </p:style>
-        <p:txBody>
-          <a:bodyPr rtlCol="0" anchor="ctr"/>
-          <a:lstStyle/>
-          <a:p>
-            <a:pPr algn="ctr"/>
-          </a:p>
-        </p:txBody>
-      </p:sp>
-      <p:sp>
-        <p:nvSpPr>
-          <p:cNvPr id="10" name="TextBox 9"/>
-          <p:cNvSpPr txBox="1"/>
-          <p:nvPr/>
-        </p:nvSpPr>
-        <p:spPr>
-          <a:xfrm>
-            <a:off x="4754880" y="1645920"/>
-            <a:ext cx="6675120" cy="4572000"/>
-          </a:xfrm>
-          <a:prstGeom prst="rect">
-            <a:avLst/>
-          </a:prstGeom>
-          <a:noFill/>
-        </p:spPr>
-        <p:txBody>
-          <a:bodyPr wrap="square" lIns="0" rIns="0" tIns="0" bIns="0">
-            <a:spAutoFit/>
-          </a:bodyPr>
-          <a:lstStyle/>
-          <a:p>
-            <a:pPr>
-              <a:spcAft>
-                <a:spcPts val="1200"/>
-              </a:spcAft>
-              <a:defRPr b="1" sz="1500">
-                <a:solidFill>
-                  <a:srgbClr val="0F172A"/>
-                </a:solidFill>
-                <a:latin typeface="Cambria"/>
-              </a:defRPr>
-            </a:pPr>
-            <a:r>
-              <a:t>Estructura Modular del Manual (8 Módulos Temáticos)</a:t>
-            </a:r>
-          </a:p>
-          <a:p>
-            <a:pPr>
-              <a:spcAft>
-                <a:spcPts val="600"/>
-              </a:spcAft>
-            </a:pPr>
-            <a:r>
-              <a:rPr b="1" sz="1100">
-                <a:solidFill>
-                  <a:srgbClr val="D97706"/>
-                </a:solidFill>
-                <a:latin typeface="Calibri"/>
-              </a:rPr>
-              <a:t>Módulo 1 • Fundamentos y Marco Legal: </a:t>
-            </a:r>
-            <a:r>
-              <a:rPr sz="1050">
-                <a:solidFill>
-                  <a:srgbClr val="1E293B"/>
-                </a:solidFill>
-                <a:latin typeface="Calibri"/>
-              </a:rPr>
-              <a:t>Definición OMS (2025) y articulación de Leyes 774, 759 y 292 de Nicaragua.</a:t>
-            </a:r>
-          </a:p>
-          <a:p>
-            <a:pPr>
-              <a:spcAft>
-                <a:spcPts val="600"/>
-              </a:spcAft>
-            </a:pPr>
-            <a:r>
-              <a:rPr b="1" sz="1100">
-                <a:solidFill>
-                  <a:srgbClr val="D97706"/>
-                </a:solidFill>
-                <a:latin typeface="Calibri"/>
-              </a:rPr>
-              <a:t>Módulo 2 • Principios Deontológicos: </a:t>
-            </a:r>
-            <a:r>
-              <a:rPr sz="1050">
-                <a:solidFill>
-                  <a:srgbClr val="1E293B"/>
-                </a:solidFill>
-                <a:latin typeface="Calibri"/>
-              </a:rPr>
-              <a:t>Consentimiento informado intercultural y complementariedad sin sustitución.</a:t>
-            </a:r>
-          </a:p>
-          <a:p>
-            <a:pPr>
-              <a:spcAft>
-                <a:spcPts val="600"/>
-              </a:spcAft>
-            </a:pPr>
-            <a:r>
-              <a:rPr b="1" sz="1100">
-                <a:solidFill>
-                  <a:srgbClr val="D97706"/>
-                </a:solidFill>
-                <a:latin typeface="Calibri"/>
-              </a:rPr>
-              <a:t>Módulo 3 • Mapa Clínico de Prácticas: </a:t>
-            </a:r>
-            <a:r>
-              <a:rPr sz="1050">
-                <a:solidFill>
-                  <a:srgbClr val="1E293B"/>
-                </a:solidFill>
-                <a:latin typeface="Calibri"/>
-              </a:rPr>
-              <a:t>Clasificación en 4 niveles: uso directo, psicoeducación, precaución y alerta médica.</a:t>
-            </a:r>
-          </a:p>
-          <a:p>
-            <a:pPr>
-              <a:spcAft>
-                <a:spcPts val="600"/>
-              </a:spcAft>
-            </a:pPr>
-            <a:r>
-              <a:rPr b="1" sz="1100">
-                <a:solidFill>
-                  <a:srgbClr val="D97706"/>
-                </a:solidFill>
-                <a:latin typeface="Calibri"/>
-              </a:rPr>
-              <a:t>Módulo 4 • Algoritmo de Derivación: </a:t>
-            </a:r>
-            <a:r>
-              <a:rPr sz="1050">
-                <a:solidFill>
-                  <a:srgbClr val="1E293B"/>
-                </a:solidFill>
-                <a:latin typeface="Calibri"/>
-              </a:rPr>
-              <a:t>Protocolo secuencial de 4 pasos para derivación clínica informada.</a:t>
-            </a:r>
-          </a:p>
-          <a:p>
-            <a:pPr>
-              <a:spcAft>
-                <a:spcPts val="600"/>
-              </a:spcAft>
-            </a:pPr>
-            <a:r>
-              <a:rPr b="1" sz="1100">
-                <a:solidFill>
-                  <a:srgbClr val="D97706"/>
-                </a:solidFill>
-                <a:latin typeface="Calibri"/>
-              </a:rPr>
-              <a:t>Módulo 5 • Habilidades de Diálogo: </a:t>
-            </a:r>
-            <a:r>
-              <a:rPr sz="1050">
-                <a:solidFill>
-                  <a:srgbClr val="1E293B"/>
-                </a:solidFill>
-                <a:latin typeface="Calibri"/>
-              </a:rPr>
-              <a:t>Técnicas de entrevista abierta para erradicar el ocultamiento terapéutico.</a:t>
-            </a:r>
-          </a:p>
-          <a:p>
-            <a:pPr>
-              <a:spcAft>
-                <a:spcPts val="600"/>
-              </a:spcAft>
-            </a:pPr>
-            <a:r>
-              <a:rPr b="1" sz="1100">
-                <a:solidFill>
-                  <a:srgbClr val="D97706"/>
-                </a:solidFill>
-                <a:latin typeface="Calibri"/>
-              </a:rPr>
-              <a:t>Módulo 6 • Red Intersectorial: </a:t>
-            </a:r>
-            <a:r>
-              <a:rPr sz="1050">
-                <a:solidFill>
-                  <a:srgbClr val="1E293B"/>
-                </a:solidFill>
-                <a:latin typeface="Calibri"/>
-              </a:rPr>
-              <a:t>Criterios de referencia bidireccional y trabajo colaborativo con facilitadores.</a:t>
-            </a:r>
-          </a:p>
-          <a:p>
-            <a:pPr>
-              <a:spcAft>
-                <a:spcPts val="600"/>
-              </a:spcAft>
-            </a:pPr>
-            <a:r>
-              <a:rPr b="1" sz="1100">
-                <a:solidFill>
-                  <a:srgbClr val="D97706"/>
-                </a:solidFill>
-                <a:latin typeface="Calibri"/>
-              </a:rPr>
-              <a:t>Módulo 7 • Ruta Pedagógica: </a:t>
-            </a:r>
-            <a:r>
-              <a:rPr sz="1050">
-                <a:solidFill>
-                  <a:srgbClr val="1E293B"/>
-                </a:solidFill>
-                <a:latin typeface="Calibri"/>
-              </a:rPr>
-              <a:t>Secuencia de 3 etapas vivenciales y propuesta de asignatura electiva.</a:t>
-            </a:r>
-          </a:p>
-          <a:p>
-            <a:pPr>
-              <a:spcAft>
-                <a:spcPts val="600"/>
-              </a:spcAft>
-            </a:pPr>
-            <a:r>
-              <a:rPr b="1" sz="1100">
-                <a:solidFill>
-                  <a:srgbClr val="D97706"/>
-                </a:solidFill>
-                <a:latin typeface="Calibri"/>
-              </a:rPr>
-              <a:t>Módulo 8 • Soporte CUR-Estelí: </a:t>
-            </a:r>
-            <a:r>
-              <a:rPr sz="1050">
-                <a:solidFill>
-                  <a:srgbClr val="1E293B"/>
-                </a:solidFill>
-                <a:latin typeface="Calibri"/>
-              </a:rPr>
-              <a:t>Creación del Comité de Bioética y plan de capacitación docente continua.</a:t>
+              <a:t>• Demanda Institucional: 77.8% del profesorado solicita capacitación continua en neurobiología somática y la creación de un Comité de Bioética.</a:t>
             </a:r>
           </a:p>
         </p:txBody>
@@ -5553,7 +5227,7 @@
         <p:spPr>
           <a:xfrm>
             <a:off x="777240" y="438912"/>
-            <a:ext cx="9601200" cy="274320"/>
+            <a:ext cx="9601200" cy="256032"/>
           </a:xfrm>
           <a:prstGeom prst="rect">
             <a:avLst/>
@@ -5567,7 +5241,7 @@
           <a:lstStyle/>
           <a:p>
             <a:pPr>
-              <a:defRPr sz="1000" b="1">
+              <a:defRPr sz="950" b="1">
                 <a:solidFill>
                   <a:srgbClr val="0D9488"/>
                 </a:solidFill>
@@ -5575,7 +5249,7 @@
               </a:defRPr>
             </a:pPr>
             <a:r>
-              <a:t>CAPÍTULO VI • SÍNTESIS CONCLUSIVA</a:t>
+              <a:t>CAPÍTULO V • PROPUESTA DE INTERVENCIÓN (OE3)</a:t>
             </a:r>
           </a:p>
         </p:txBody>
@@ -5588,7 +5262,7 @@
         </p:nvSpPr>
         <p:spPr>
           <a:xfrm>
-            <a:off x="777240" y="713232"/>
+            <a:off x="777240" y="694944"/>
             <a:ext cx="9875520" cy="685800"/>
           </a:xfrm>
           <a:prstGeom prst="rect">
@@ -5603,7 +5277,7 @@
           <a:lstStyle/>
           <a:p>
             <a:pPr>
-              <a:defRPr sz="2800" b="1">
+              <a:defRPr sz="2600" b="1">
                 <a:solidFill>
                   <a:srgbClr val="0F172A"/>
                 </a:solidFill>
@@ -5611,7 +5285,7 @@
               </a:defRPr>
             </a:pPr>
             <a:r>
-              <a:t>Conclusiones Centrales de la Investigación (Triangulación de Objetivos)</a:t>
+              <a:t>Manual de Estrategias de MTCI para la Formación y Práctica Psicológica</a:t>
             </a:r>
           </a:p>
         </p:txBody>
@@ -5648,7 +5322,7 @@
         </p:nvSpPr>
         <p:spPr>
           <a:xfrm>
-            <a:off x="777240" y="6473952"/>
+            <a:off x="777240" y="6492240"/>
             <a:ext cx="9601200" cy="228600"/>
           </a:xfrm>
           <a:prstGeom prst="rect">
@@ -5663,7 +5337,7 @@
           <a:lstStyle/>
           <a:p>
             <a:pPr>
-              <a:defRPr sz="900">
+              <a:defRPr sz="850">
                 <a:solidFill>
                   <a:srgbClr val="64748B"/>
                 </a:solidFill>
@@ -5684,7 +5358,7 @@
         </p:nvSpPr>
         <p:spPr>
           <a:xfrm>
-            <a:off x="10789920" y="6473952"/>
+            <a:off x="10789920" y="6492240"/>
             <a:ext cx="640080" cy="228600"/>
           </a:xfrm>
           <a:prstGeom prst="rect">
@@ -5699,7 +5373,7 @@
           <a:lstStyle/>
           <a:p>
             <a:pPr algn="r">
-              <a:defRPr sz="900" b="1">
+              <a:defRPr sz="850" b="1">
                 <a:solidFill>
                   <a:srgbClr val="64748B"/>
                 </a:solidFill>
@@ -5707,21 +5381,45 @@
               </a:defRPr>
             </a:pPr>
             <a:r>
-              <a:t>14 / 16</a:t>
-            </a:r>
-          </a:p>
-        </p:txBody>
-      </p:sp>
-      <p:sp>
-        <p:nvSpPr>
-          <p:cNvPr id="7" name="TextBox 6"/>
+              <a:t>14 / 17</a:t>
+            </a:r>
+          </a:p>
+        </p:txBody>
+      </p:sp>
+      <p:pic>
+        <p:nvPicPr>
+          <p:cNvPr id="7" name="Picture 6" descr="portada_manual.jpg"/>
+          <p:cNvPicPr>
+            <a:picLocks noChangeAspect="1"/>
+          </p:cNvPicPr>
+          <p:nvPr/>
+        </p:nvPicPr>
+        <p:blipFill>
+          <a:blip r:embed="rId3"/>
+          <a:stretch>
+            <a:fillRect/>
+          </a:stretch>
+        </p:blipFill>
+        <p:spPr>
+          <a:xfrm>
+            <a:off x="777240" y="1645920"/>
+            <a:ext cx="3474720" cy="2456193"/>
+          </a:xfrm>
+          <a:prstGeom prst="rect">
+            <a:avLst/>
+          </a:prstGeom>
+        </p:spPr>
+      </p:pic>
+      <p:sp>
+        <p:nvSpPr>
+          <p:cNvPr id="8" name="TextBox 7"/>
           <p:cNvSpPr txBox="1"/>
           <p:nvPr/>
         </p:nvSpPr>
         <p:spPr>
           <a:xfrm>
-            <a:off x="777240" y="1645920"/>
-            <a:ext cx="10607040" cy="4572000"/>
+            <a:off x="777240" y="3931920"/>
+            <a:ext cx="3474720" cy="2286000"/>
           </a:xfrm>
           <a:prstGeom prst="rect">
             <a:avLst/>
@@ -5736,171 +5434,363 @@
           <a:p>
             <a:pPr>
               <a:spcAft>
-                <a:spcPts val="1100"/>
-              </a:spcAft>
-            </a:pPr>
-            <a:r>
-              <a:rPr b="1" sz="1300">
+                <a:spcPts val="400"/>
+              </a:spcAft>
+              <a:defRPr b="1" sz="1000">
                 <a:solidFill>
                   <a:srgbClr val="0D9488"/>
                 </a:solidFill>
+                <a:latin typeface="Calibri"/>
+              </a:defRPr>
+            </a:pPr>
+            <a:r>
+              <a:t>FICHA TÉCNICA DEL MANUAL (ANEXO 16.2)</a:t>
+            </a:r>
+          </a:p>
+          <a:p>
+            <a:pPr>
+              <a:spcAft>
+                <a:spcPts val="300"/>
+              </a:spcAft>
+              <a:defRPr sz="1000">
+                <a:solidFill>
+                  <a:srgbClr val="1E293B"/>
+                </a:solidFill>
+                <a:latin typeface="Calibri"/>
+              </a:defRPr>
+            </a:pPr>
+            <a:r>
+              <a:t>• Extensión: 18 páginas in extenso (Capítulo 16, Anexo 16.2).</a:t>
+            </a:r>
+          </a:p>
+          <a:p>
+            <a:pPr>
+              <a:spcAft>
+                <a:spcPts val="300"/>
+              </a:spcAft>
+              <a:defRPr sz="1000">
+                <a:solidFill>
+                  <a:srgbClr val="1E293B"/>
+                </a:solidFill>
+                <a:latin typeface="Calibri"/>
+              </a:defRPr>
+            </a:pPr>
+            <a:r>
+              <a:t>• Destinatarios: Estudiantes y docentes de la Clínica Psicosocial.</a:t>
+            </a:r>
+          </a:p>
+          <a:p>
+            <a:pPr>
+              <a:spcAft>
+                <a:spcPts val="300"/>
+              </a:spcAft>
+              <a:defRPr sz="1000">
+                <a:solidFill>
+                  <a:srgbClr val="1E293B"/>
+                </a:solidFill>
+                <a:latin typeface="Calibri"/>
+              </a:defRPr>
+            </a:pPr>
+            <a:r>
+              <a:t>• Propósito: Dotar de discernimiento bioético para orientar y derivar, sin habilitar como terapeutas alternativos.</a:t>
+            </a:r>
+          </a:p>
+          <a:p>
+            <a:pPr>
+              <a:spcAft>
+                <a:spcPts val="300"/>
+              </a:spcAft>
+              <a:defRPr sz="1000">
+                <a:solidFill>
+                  <a:srgbClr val="1E293B"/>
+                </a:solidFill>
+                <a:latin typeface="Calibri"/>
+              </a:defRPr>
+            </a:pPr>
+            <a:r>
+              <a:t>• Instrumento Anexo: Cuestionario I-CAM-Q adaptado transculturalmente para tamizaje clínico en Nicaragua.</a:t>
+            </a:r>
+          </a:p>
+        </p:txBody>
+      </p:sp>
+      <p:sp>
+        <p:nvSpPr>
+          <p:cNvPr id="9" name="Rectangle 8"/>
+          <p:cNvSpPr/>
+          <p:nvPr/>
+        </p:nvSpPr>
+        <p:spPr>
+          <a:xfrm>
+            <a:off x="4480560" y="1737360"/>
+            <a:ext cx="12700" cy="4297680"/>
+          </a:xfrm>
+          <a:prstGeom prst="rect">
+            <a:avLst/>
+          </a:prstGeom>
+          <a:noFill/>
+          <a:ln w="9525">
+            <a:solidFill>
+              <a:srgbClr val="E2E8F0"/>
+            </a:solidFill>
+          </a:ln>
+        </p:spPr>
+        <p:style>
+          <a:lnRef idx="1">
+            <a:schemeClr val="accent1"/>
+          </a:lnRef>
+          <a:fillRef idx="3">
+            <a:schemeClr val="accent1"/>
+          </a:fillRef>
+          <a:effectRef idx="2">
+            <a:schemeClr val="accent1"/>
+          </a:effectRef>
+          <a:fontRef idx="minor">
+            <a:schemeClr val="lt1"/>
+          </a:fontRef>
+        </p:style>
+        <p:txBody>
+          <a:bodyPr rtlCol="0" anchor="ctr"/>
+          <a:lstStyle/>
+          <a:p>
+            <a:pPr algn="ctr"/>
+          </a:p>
+        </p:txBody>
+      </p:sp>
+      <p:sp>
+        <p:nvSpPr>
+          <p:cNvPr id="10" name="TextBox 9"/>
+          <p:cNvSpPr txBox="1"/>
+          <p:nvPr/>
+        </p:nvSpPr>
+        <p:spPr>
+          <a:xfrm>
+            <a:off x="4754880" y="1645920"/>
+            <a:ext cx="6675120" cy="4572000"/>
+          </a:xfrm>
+          <a:prstGeom prst="rect">
+            <a:avLst/>
+          </a:prstGeom>
+          <a:noFill/>
+        </p:spPr>
+        <p:txBody>
+          <a:bodyPr wrap="square" lIns="0" rIns="0" tIns="0" bIns="0">
+            <a:spAutoFit/>
+          </a:bodyPr>
+          <a:lstStyle/>
+          <a:p>
+            <a:pPr>
+              <a:spcAft>
+                <a:spcPts val="1000"/>
+              </a:spcAft>
+              <a:defRPr b="1" sz="1400">
+                <a:solidFill>
+                  <a:srgbClr val="0F172A"/>
+                </a:solidFill>
                 <a:latin typeface="Cambria"/>
-              </a:rPr>
-              <a:t>01  </a:t>
-            </a:r>
-            <a:r>
-              <a:rPr b="1" sz="1200">
-                <a:solidFill>
-                  <a:srgbClr val="0F172A"/>
-                </a:solidFill>
-                <a:latin typeface="Calibri"/>
-              </a:rPr>
-              <a:t>Cumplimiento del Objetivo General: </a:t>
-            </a:r>
-            <a:r>
-              <a:rPr sz="1150">
+              </a:defRPr>
+            </a:pPr>
+            <a:r>
+              <a:t>Estructura Modular del Manual (8 Módulos Temáticos)</a:t>
+            </a:r>
+          </a:p>
+          <a:p>
+            <a:pPr>
+              <a:spcAft>
+                <a:spcPts val="500"/>
+              </a:spcAft>
+            </a:pPr>
+            <a:r>
+              <a:rPr b="1" sz="1050">
+                <a:solidFill>
+                  <a:srgbClr val="D97706"/>
+                </a:solidFill>
+                <a:latin typeface="Calibri"/>
+              </a:rPr>
+              <a:t>Módulo 1 • Fundamentos y Marco Legal: </a:t>
+            </a:r>
+            <a:r>
+              <a:rPr sz="1000">
                 <a:solidFill>
                   <a:srgbClr val="1E293B"/>
                 </a:solidFill>
                 <a:latin typeface="Calibri"/>
               </a:rPr>
-              <a:t>Los tres colectivos investigados (N = 86) validan unánimemente a la MTCI como recurso complementario legítimo en salud mental, condicionado a un ejercicio bioético, científico y respetuoso de los límites profesionales.</a:t>
-            </a:r>
-          </a:p>
-          <a:p>
-            <a:pPr>
-              <a:spcAft>
-                <a:spcPts val="1100"/>
-              </a:spcAft>
-            </a:pPr>
-            <a:r>
-              <a:rPr b="1" sz="1300">
-                <a:solidFill>
-                  <a:srgbClr val="0D9488"/>
-                </a:solidFill>
-                <a:latin typeface="Cambria"/>
-              </a:rPr>
-              <a:t>02  </a:t>
-            </a:r>
-            <a:r>
-              <a:rPr b="1" sz="1200">
-                <a:solidFill>
-                  <a:srgbClr val="0F172A"/>
-                </a:solidFill>
-                <a:latin typeface="Calibri"/>
-              </a:rPr>
-              <a:t>Perfil y Paradoja Estudiantil (OE1): </a:t>
-            </a:r>
-            <a:r>
-              <a:rPr sz="1150">
+              <a:t>Definición OMS (2025) y articulación de Leyes 774, 759 y 292 de Nicaragua.</a:t>
+            </a:r>
+          </a:p>
+          <a:p>
+            <a:pPr>
+              <a:spcAft>
+                <a:spcPts val="500"/>
+              </a:spcAft>
+            </a:pPr>
+            <a:r>
+              <a:rPr b="1" sz="1050">
+                <a:solidFill>
+                  <a:srgbClr val="D97706"/>
+                </a:solidFill>
+                <a:latin typeface="Calibri"/>
+              </a:rPr>
+              <a:t>Módulo 2 • Principios Deontológicos: </a:t>
+            </a:r>
+            <a:r>
+              <a:rPr sz="1000">
                 <a:solidFill>
                   <a:srgbClr val="1E293B"/>
                 </a:solidFill>
                 <a:latin typeface="Calibri"/>
               </a:rPr>
-              <a:t>El estudiantado posee buen dominio conceptual básico (67.6%) y alta satisfacción somática subjetiva (86.7%), pero padece desinformación legal (58.8% desconoce Ley 774; 64.7% desconoce Ley 292) e inseguridad para derivar (88.2%).</a:t>
-            </a:r>
-          </a:p>
-          <a:p>
-            <a:pPr>
-              <a:spcAft>
-                <a:spcPts val="1100"/>
-              </a:spcAft>
-            </a:pPr>
-            <a:r>
-              <a:rPr b="1" sz="1300">
-                <a:solidFill>
-                  <a:srgbClr val="0D9488"/>
-                </a:solidFill>
-                <a:latin typeface="Cambria"/>
-              </a:rPr>
-              <a:t>03  </a:t>
-            </a:r>
-            <a:r>
-              <a:rPr b="1" sz="1200">
-                <a:solidFill>
-                  <a:srgbClr val="0F172A"/>
-                </a:solidFill>
-                <a:latin typeface="Calibri"/>
-              </a:rPr>
-              <a:t>Oferta y Resiliencia Territorial (OE2): </a:t>
-            </a:r>
-            <a:r>
-              <a:rPr sz="1150">
+              <a:t>Consentimiento informado intercultural y complementariedad sin sustitución médica.</a:t>
+            </a:r>
+          </a:p>
+          <a:p>
+            <a:pPr>
+              <a:spcAft>
+                <a:spcPts val="500"/>
+              </a:spcAft>
+            </a:pPr>
+            <a:r>
+              <a:rPr b="1" sz="1050">
+                <a:solidFill>
+                  <a:srgbClr val="D97706"/>
+                </a:solidFill>
+                <a:latin typeface="Calibri"/>
+              </a:rPr>
+              <a:t>Módulo 3 • Mapa Clínico de Prácticas: </a:t>
+            </a:r>
+            <a:r>
+              <a:rPr sz="1000">
                 <a:solidFill>
                   <a:srgbClr val="1E293B"/>
                 </a:solidFill>
                 <a:latin typeface="Calibri"/>
               </a:rPr>
-              <a:t>Los facilitadores de Estelí constatan 100% de alivio de sobrecarga muscular y mayor receptividad reflexiva (88.9%), enfrentando barreras de estigma sociocultural (100%) y limitaciones económicas de los usuarios (77.8%).</a:t>
-            </a:r>
-          </a:p>
-          <a:p>
-            <a:pPr>
-              <a:spcAft>
-                <a:spcPts val="1100"/>
-              </a:spcAft>
-            </a:pPr>
-            <a:r>
-              <a:rPr b="1" sz="1300">
-                <a:solidFill>
-                  <a:srgbClr val="0D9488"/>
-                </a:solidFill>
-                <a:latin typeface="Cambria"/>
-              </a:rPr>
-              <a:t>04  </a:t>
-            </a:r>
-            <a:r>
-              <a:rPr b="1" sz="1200">
-                <a:solidFill>
-                  <a:srgbClr val="0F172A"/>
-                </a:solidFill>
-                <a:latin typeface="Calibri"/>
-              </a:rPr>
-              <a:t>Consenso Curricular Docente (OE3): </a:t>
-            </a:r>
-            <a:r>
-              <a:rPr sz="1150">
+              <a:t>Clasificación en 4 niveles: uso directo, psicoeducación, precaución y alerta.</a:t>
+            </a:r>
+          </a:p>
+          <a:p>
+            <a:pPr>
+              <a:spcAft>
+                <a:spcPts val="500"/>
+              </a:spcAft>
+            </a:pPr>
+            <a:r>
+              <a:rPr b="1" sz="1050">
+                <a:solidFill>
+                  <a:srgbClr val="D97706"/>
+                </a:solidFill>
+                <a:latin typeface="Calibri"/>
+              </a:rPr>
+              <a:t>Módulo 4 • Algoritmo de Derivación: </a:t>
+            </a:r>
+            <a:r>
+              <a:rPr sz="1000">
                 <a:solidFill>
                   <a:srgbClr val="1E293B"/>
                 </a:solidFill>
                 <a:latin typeface="Calibri"/>
               </a:rPr>
-              <a:t>El 100% del claustro apoya transversalizar la MTCI bajo metodologías activas y vivenciales (88.9%), demandando formación en regulación neurovegetativa y la creación de comités de bioética.</a:t>
-            </a:r>
-          </a:p>
-          <a:p>
-            <a:pPr>
-              <a:spcAft>
-                <a:spcPts val="1100"/>
-              </a:spcAft>
-            </a:pPr>
-            <a:r>
-              <a:rPr b="1" sz="1300">
-                <a:solidFill>
-                  <a:srgbClr val="0D9488"/>
-                </a:solidFill>
-                <a:latin typeface="Cambria"/>
-              </a:rPr>
-              <a:t>05  </a:t>
-            </a:r>
-            <a:r>
-              <a:rPr b="1" sz="1200">
-                <a:solidFill>
-                  <a:srgbClr val="0F172A"/>
-                </a:solidFill>
-                <a:latin typeface="Calibri"/>
-              </a:rPr>
-              <a:t>Logro Propositivo del Manual de Estrategias: </a:t>
-            </a:r>
-            <a:r>
-              <a:rPr sz="1150">
+              <a:t>Protocolo secuencial de 4 pasos para derivación clínica informada.</a:t>
+            </a:r>
+          </a:p>
+          <a:p>
+            <a:pPr>
+              <a:spcAft>
+                <a:spcPts val="500"/>
+              </a:spcAft>
+            </a:pPr>
+            <a:r>
+              <a:rPr b="1" sz="1050">
+                <a:solidFill>
+                  <a:srgbClr val="D97706"/>
+                </a:solidFill>
+                <a:latin typeface="Calibri"/>
+              </a:rPr>
+              <a:t>Módulo 5 • Habilidades de Diálogo: </a:t>
+            </a:r>
+            <a:r>
+              <a:rPr sz="1000">
                 <a:solidFill>
                   <a:srgbClr val="1E293B"/>
                 </a:solidFill>
                 <a:latin typeface="Calibri"/>
               </a:rPr>
-              <a:t>Se construyó exitosamente el Manual de Estrategias MTCI de 18 páginas (Anexo 16.2), dotando al CUR-Estelí de algoritmos de decisión clínica, pautas contra el ocultamiento y el inventario I-CAM-Q.</a:t>
+              <a:t>Técnicas de entrevista abierta para erradicar el ocultamiento terapéutico.</a:t>
+            </a:r>
+          </a:p>
+          <a:p>
+            <a:pPr>
+              <a:spcAft>
+                <a:spcPts val="500"/>
+              </a:spcAft>
+            </a:pPr>
+            <a:r>
+              <a:rPr b="1" sz="1050">
+                <a:solidFill>
+                  <a:srgbClr val="D97706"/>
+                </a:solidFill>
+                <a:latin typeface="Calibri"/>
+              </a:rPr>
+              <a:t>Módulo 6 • Red Intersectorial: </a:t>
+            </a:r>
+            <a:r>
+              <a:rPr sz="1000">
+                <a:solidFill>
+                  <a:srgbClr val="1E293B"/>
+                </a:solidFill>
+                <a:latin typeface="Calibri"/>
+              </a:rPr>
+              <a:t>Criterios de referencia bidireccional y trabajo coordinado con facilitadores.</a:t>
+            </a:r>
+          </a:p>
+          <a:p>
+            <a:pPr>
+              <a:spcAft>
+                <a:spcPts val="500"/>
+              </a:spcAft>
+            </a:pPr>
+            <a:r>
+              <a:rPr b="1" sz="1050">
+                <a:solidFill>
+                  <a:srgbClr val="D97706"/>
+                </a:solidFill>
+                <a:latin typeface="Calibri"/>
+              </a:rPr>
+              <a:t>Módulo 7 • Ruta Pedagógica: </a:t>
+            </a:r>
+            <a:r>
+              <a:rPr sz="1000">
+                <a:solidFill>
+                  <a:srgbClr val="1E293B"/>
+                </a:solidFill>
+                <a:latin typeface="Calibri"/>
+              </a:rPr>
+              <a:t>Secuencia de 3 etapas vivenciales y propuesta de asignatura electiva.</a:t>
+            </a:r>
+          </a:p>
+          <a:p>
+            <a:pPr>
+              <a:spcAft>
+                <a:spcPts val="500"/>
+              </a:spcAft>
+            </a:pPr>
+            <a:r>
+              <a:rPr b="1" sz="1050">
+                <a:solidFill>
+                  <a:srgbClr val="D97706"/>
+                </a:solidFill>
+                <a:latin typeface="Calibri"/>
+              </a:rPr>
+              <a:t>Módulo 8 • Soporte Institucional: </a:t>
+            </a:r>
+            <a:r>
+              <a:rPr sz="1000">
+                <a:solidFill>
+                  <a:srgbClr val="1E293B"/>
+                </a:solidFill>
+                <a:latin typeface="Calibri"/>
+              </a:rPr>
+              <a:t>Creación del Comité de Bioética y plan de capacitación docente continua.</a:t>
             </a:r>
           </a:p>
         </p:txBody>
@@ -5943,7 +5833,7 @@
         <p:spPr>
           <a:xfrm>
             <a:off x="777240" y="438912"/>
-            <a:ext cx="9601200" cy="274320"/>
+            <a:ext cx="9601200" cy="256032"/>
           </a:xfrm>
           <a:prstGeom prst="rect">
             <a:avLst/>
@@ -5957,7 +5847,7 @@
           <a:lstStyle/>
           <a:p>
             <a:pPr>
-              <a:defRPr sz="1000" b="1">
+              <a:defRPr sz="950" b="1">
                 <a:solidFill>
                   <a:srgbClr val="0D9488"/>
                 </a:solidFill>
@@ -5965,7 +5855,7 @@
               </a:defRPr>
             </a:pPr>
             <a:r>
-              <a:t>CAPÍTULO VI • DIRECTRICES PROSPECTIVAS</a:t>
+              <a:t>CAPÍTULO VI • CONCLUSIONES Y RECOMENDACIONES</a:t>
             </a:r>
           </a:p>
         </p:txBody>
@@ -5978,7 +5868,7 @@
         </p:nvSpPr>
         <p:spPr>
           <a:xfrm>
-            <a:off x="777240" y="713232"/>
+            <a:off x="777240" y="694944"/>
             <a:ext cx="9875520" cy="685800"/>
           </a:xfrm>
           <a:prstGeom prst="rect">
@@ -5993,7 +5883,7 @@
           <a:lstStyle/>
           <a:p>
             <a:pPr>
-              <a:defRPr sz="2800" b="1">
+              <a:defRPr sz="2600" b="1">
                 <a:solidFill>
                   <a:srgbClr val="0F172A"/>
                 </a:solidFill>
@@ -6001,7 +5891,7 @@
               </a:defRPr>
             </a:pPr>
             <a:r>
-              <a:t>Recomendaciones Estratégicas para Estudiantes, Docentes, Universidad y MINSA</a:t>
+              <a:t>Conclusiones Centrales de la Investigación (Triangulación de Objetivos)</a:t>
             </a:r>
           </a:p>
         </p:txBody>
@@ -6038,7 +5928,7 @@
         </p:nvSpPr>
         <p:spPr>
           <a:xfrm>
-            <a:off x="777240" y="6473952"/>
+            <a:off x="777240" y="6492240"/>
             <a:ext cx="9601200" cy="228600"/>
           </a:xfrm>
           <a:prstGeom prst="rect">
@@ -6053,7 +5943,7 @@
           <a:lstStyle/>
           <a:p>
             <a:pPr>
-              <a:defRPr sz="900">
+              <a:defRPr sz="850">
                 <a:solidFill>
                   <a:srgbClr val="64748B"/>
                 </a:solidFill>
@@ -6074,7 +5964,7 @@
         </p:nvSpPr>
         <p:spPr>
           <a:xfrm>
-            <a:off x="10789920" y="6473952"/>
+            <a:off x="10789920" y="6492240"/>
             <a:ext cx="640080" cy="228600"/>
           </a:xfrm>
           <a:prstGeom prst="rect">
@@ -6089,7 +5979,7 @@
           <a:lstStyle/>
           <a:p>
             <a:pPr algn="r">
-              <a:defRPr sz="900" b="1">
+              <a:defRPr sz="850" b="1">
                 <a:solidFill>
                   <a:srgbClr val="64748B"/>
                 </a:solidFill>
@@ -6097,7 +5987,397 @@
               </a:defRPr>
             </a:pPr>
             <a:r>
-              <a:t>15 / 16</a:t>
+              <a:t>15 / 17</a:t>
+            </a:r>
+          </a:p>
+        </p:txBody>
+      </p:sp>
+      <p:sp>
+        <p:nvSpPr>
+          <p:cNvPr id="7" name="TextBox 6"/>
+          <p:cNvSpPr txBox="1"/>
+          <p:nvPr/>
+        </p:nvSpPr>
+        <p:spPr>
+          <a:xfrm>
+            <a:off x="777240" y="1645920"/>
+            <a:ext cx="10607040" cy="4572000"/>
+          </a:xfrm>
+          <a:prstGeom prst="rect">
+            <a:avLst/>
+          </a:prstGeom>
+          <a:noFill/>
+        </p:spPr>
+        <p:txBody>
+          <a:bodyPr wrap="square" lIns="0" rIns="0" tIns="0" bIns="0">
+            <a:spAutoFit/>
+          </a:bodyPr>
+          <a:lstStyle/>
+          <a:p>
+            <a:pPr>
+              <a:spcAft>
+                <a:spcPts val="1000"/>
+              </a:spcAft>
+            </a:pPr>
+            <a:r>
+              <a:rPr b="1" sz="1300">
+                <a:solidFill>
+                  <a:srgbClr val="0D9488"/>
+                </a:solidFill>
+                <a:latin typeface="Cambria"/>
+              </a:rPr>
+              <a:t>01  </a:t>
+            </a:r>
+            <a:r>
+              <a:rPr b="1" sz="1150">
+                <a:solidFill>
+                  <a:srgbClr val="0F172A"/>
+                </a:solidFill>
+                <a:latin typeface="Calibri"/>
+              </a:rPr>
+              <a:t>Cumplimiento del Objetivo General: </a:t>
+            </a:r>
+            <a:r>
+              <a:rPr sz="1100">
+                <a:solidFill>
+                  <a:srgbClr val="1E293B"/>
+                </a:solidFill>
+                <a:latin typeface="Calibri"/>
+              </a:rPr>
+              <a:t>Los tres colectivos investigados (N = 86) validan unánimemente a la MTCI como recurso complementario legítimo en salud mental, condicionado a un ejercicio bioético, científico y respetuoso de los límites profesionales.</a:t>
+            </a:r>
+          </a:p>
+          <a:p>
+            <a:pPr>
+              <a:spcAft>
+                <a:spcPts val="1000"/>
+              </a:spcAft>
+            </a:pPr>
+            <a:r>
+              <a:rPr b="1" sz="1300">
+                <a:solidFill>
+                  <a:srgbClr val="0D9488"/>
+                </a:solidFill>
+                <a:latin typeface="Cambria"/>
+              </a:rPr>
+              <a:t>02  </a:t>
+            </a:r>
+            <a:r>
+              <a:rPr b="1" sz="1150">
+                <a:solidFill>
+                  <a:srgbClr val="0F172A"/>
+                </a:solidFill>
+                <a:latin typeface="Calibri"/>
+              </a:rPr>
+              <a:t>Brecha Formativa en Estudiantes (OE1): </a:t>
+            </a:r>
+            <a:r>
+              <a:rPr sz="1100">
+                <a:solidFill>
+                  <a:srgbClr val="1E293B"/>
+                </a:solidFill>
+                <a:latin typeface="Calibri"/>
+              </a:rPr>
+              <a:t>El estudiantado posee buen dominio conceptual (67.6%) y alta satisfacción somática personal (86.7%), pero padece desinformación legal (58.8% desconoce Ley 774; 64.7% desconoce Ley 292) e inseguridad para derivar (88.2%).</a:t>
+            </a:r>
+          </a:p>
+          <a:p>
+            <a:pPr>
+              <a:spcAft>
+                <a:spcPts val="1000"/>
+              </a:spcAft>
+            </a:pPr>
+            <a:r>
+              <a:rPr b="1" sz="1300">
+                <a:solidFill>
+                  <a:srgbClr val="0D9488"/>
+                </a:solidFill>
+                <a:latin typeface="Cambria"/>
+              </a:rPr>
+              <a:t>03  </a:t>
+            </a:r>
+            <a:r>
+              <a:rPr b="1" sz="1150">
+                <a:solidFill>
+                  <a:srgbClr val="0F172A"/>
+                </a:solidFill>
+                <a:latin typeface="Calibri"/>
+              </a:rPr>
+              <a:t>Aporte Somático de Facilitadores (OE2): </a:t>
+            </a:r>
+            <a:r>
+              <a:rPr sz="1100">
+                <a:solidFill>
+                  <a:srgbClr val="1E293B"/>
+                </a:solidFill>
+                <a:latin typeface="Calibri"/>
+              </a:rPr>
+              <a:t>Los terapeutas locales de Estelí constatan 100% de alivio de sobrecarga muscular y mayor apertura reflexiva (88.9%), enfrentando barreras de estigma sociocultural (77.8%) y limitaciones económicas de los usuarios (77.8%).</a:t>
+            </a:r>
+          </a:p>
+          <a:p>
+            <a:pPr>
+              <a:spcAft>
+                <a:spcPts val="1000"/>
+              </a:spcAft>
+            </a:pPr>
+            <a:r>
+              <a:rPr b="1" sz="1300">
+                <a:solidFill>
+                  <a:srgbClr val="0D9488"/>
+                </a:solidFill>
+                <a:latin typeface="Cambria"/>
+              </a:rPr>
+              <a:t>04  </a:t>
+            </a:r>
+            <a:r>
+              <a:rPr b="1" sz="1150">
+                <a:solidFill>
+                  <a:srgbClr val="0F172A"/>
+                </a:solidFill>
+                <a:latin typeface="Calibri"/>
+              </a:rPr>
+              <a:t>Consenso Curricular Docente (OE3): </a:t>
+            </a:r>
+            <a:r>
+              <a:rPr sz="1100">
+                <a:solidFill>
+                  <a:srgbClr val="1E293B"/>
+                </a:solidFill>
+                <a:latin typeface="Calibri"/>
+              </a:rPr>
+              <a:t>El 100% del claustro apoya transversalizar la MTCI mediante talleres vivenciales (88.9%) e intercambio comunitario, demandando actualización en neurobiología somática y comités de bioética.</a:t>
+            </a:r>
+          </a:p>
+          <a:p>
+            <a:pPr>
+              <a:spcAft>
+                <a:spcPts val="1000"/>
+              </a:spcAft>
+            </a:pPr>
+            <a:r>
+              <a:rPr b="1" sz="1300">
+                <a:solidFill>
+                  <a:srgbClr val="0D9488"/>
+                </a:solidFill>
+                <a:latin typeface="Cambria"/>
+              </a:rPr>
+              <a:t>05  </a:t>
+            </a:r>
+            <a:r>
+              <a:rPr b="1" sz="1150">
+                <a:solidFill>
+                  <a:srgbClr val="0F172A"/>
+                </a:solidFill>
+                <a:latin typeface="Calibri"/>
+              </a:rPr>
+              <a:t>Logro Propositivo del Manual de Estrategias: </a:t>
+            </a:r>
+            <a:r>
+              <a:rPr sz="1100">
+                <a:solidFill>
+                  <a:srgbClr val="1E293B"/>
+                </a:solidFill>
+                <a:latin typeface="Calibri"/>
+              </a:rPr>
+              <a:t>Se formuló con éxito el Manual de Estrategias MTCI de 18 páginas (Anexo 16.2), dotando al CUR-Estelí de algoritmos de decisión clínica, pautas contra el ocultamiento y el inventario I-CAM-Q.</a:t>
+            </a:r>
+          </a:p>
+        </p:txBody>
+      </p:sp>
+    </p:spTree>
+  </p:cSld>
+  <p:clrMapOvr>
+    <a:masterClrMapping/>
+  </p:clrMapOvr>
+  <p:transition spd="med" advClick="1">
+    <p:fade/>
+  </p:transition>
+</p:sld>
+</file>
+
+<file path=ppt/slides/slide16.xml><?xml version="1.0" encoding="utf-8"?>
+<p:sld xmlns:a="http://schemas.openxmlformats.org/drawingml/2006/main" xmlns:p="http://schemas.openxmlformats.org/presentationml/2006/main" xmlns:r="http://schemas.openxmlformats.org/officeDocument/2006/relationships">
+  <p:cSld>
+    <p:bg>
+      <p:bgPr>
+        <a:solidFill>
+          <a:srgbClr val="FDFEFF"/>
+        </a:solidFill>
+        <a:effectLst/>
+      </p:bgPr>
+    </p:bg>
+    <p:spTree>
+      <p:nvGrpSpPr>
+        <p:cNvPr id="1" name=""/>
+        <p:cNvGrpSpPr/>
+        <p:nvPr/>
+      </p:nvGrpSpPr>
+      <p:grpSpPr/>
+      <p:sp>
+        <p:nvSpPr>
+          <p:cNvPr id="2" name="TextBox 1"/>
+          <p:cNvSpPr txBox="1"/>
+          <p:nvPr/>
+        </p:nvSpPr>
+        <p:spPr>
+          <a:xfrm>
+            <a:off x="777240" y="438912"/>
+            <a:ext cx="9601200" cy="256032"/>
+          </a:xfrm>
+          <a:prstGeom prst="rect">
+            <a:avLst/>
+          </a:prstGeom>
+          <a:noFill/>
+        </p:spPr>
+        <p:txBody>
+          <a:bodyPr wrap="square" lIns="0" rIns="0" tIns="0" bIns="0">
+            <a:spAutoFit/>
+          </a:bodyPr>
+          <a:lstStyle/>
+          <a:p>
+            <a:pPr>
+              <a:defRPr sz="950" b="1">
+                <a:solidFill>
+                  <a:srgbClr val="0D9488"/>
+                </a:solidFill>
+                <a:latin typeface="Calibri"/>
+              </a:defRPr>
+            </a:pPr>
+            <a:r>
+              <a:t>CAPÍTULO VI • CONCLUSIONES Y RECOMENDACIONES</a:t>
+            </a:r>
+          </a:p>
+        </p:txBody>
+      </p:sp>
+      <p:sp>
+        <p:nvSpPr>
+          <p:cNvPr id="3" name="TextBox 2"/>
+          <p:cNvSpPr txBox="1"/>
+          <p:nvPr/>
+        </p:nvSpPr>
+        <p:spPr>
+          <a:xfrm>
+            <a:off x="777240" y="694944"/>
+            <a:ext cx="9875520" cy="685800"/>
+          </a:xfrm>
+          <a:prstGeom prst="rect">
+            <a:avLst/>
+          </a:prstGeom>
+          <a:noFill/>
+        </p:spPr>
+        <p:txBody>
+          <a:bodyPr wrap="square" lIns="0" rIns="0" tIns="0" bIns="0">
+            <a:spAutoFit/>
+          </a:bodyPr>
+          <a:lstStyle/>
+          <a:p>
+            <a:pPr>
+              <a:defRPr sz="2600" b="1">
+                <a:solidFill>
+                  <a:srgbClr val="0F172A"/>
+                </a:solidFill>
+                <a:latin typeface="Cambria"/>
+              </a:defRPr>
+            </a:pPr>
+            <a:r>
+              <a:t>Recomendaciones Estratégicas para la Formación, Práctica e Intersectorialidad</a:t>
+            </a:r>
+          </a:p>
+        </p:txBody>
+      </p:sp>
+      <p:pic>
+        <p:nvPicPr>
+          <p:cNvPr id="4" name="Picture 3" descr="unan_shield_only.png"/>
+          <p:cNvPicPr>
+            <a:picLocks noChangeAspect="1"/>
+          </p:cNvPicPr>
+          <p:nvPr/>
+        </p:nvPicPr>
+        <p:blipFill>
+          <a:blip r:embed="rId2"/>
+          <a:stretch>
+            <a:fillRect/>
+          </a:stretch>
+        </p:blipFill>
+        <p:spPr>
+          <a:xfrm>
+            <a:off x="10972800" y="411480"/>
+            <a:ext cx="533862" cy="777240"/>
+          </a:xfrm>
+          <a:prstGeom prst="rect">
+            <a:avLst/>
+          </a:prstGeom>
+        </p:spPr>
+      </p:pic>
+      <p:sp>
+        <p:nvSpPr>
+          <p:cNvPr id="5" name="TextBox 4"/>
+          <p:cNvSpPr txBox="1"/>
+          <p:nvPr/>
+        </p:nvSpPr>
+        <p:spPr>
+          <a:xfrm>
+            <a:off x="777240" y="6492240"/>
+            <a:ext cx="9601200" cy="228600"/>
+          </a:xfrm>
+          <a:prstGeom prst="rect">
+            <a:avLst/>
+          </a:prstGeom>
+          <a:noFill/>
+        </p:spPr>
+        <p:txBody>
+          <a:bodyPr wrap="none" lIns="0" rIns="0" tIns="0" bIns="0">
+            <a:spAutoFit/>
+          </a:bodyPr>
+          <a:lstStyle/>
+          <a:p>
+            <a:pPr>
+              <a:defRPr sz="850">
+                <a:solidFill>
+                  <a:srgbClr val="64748B"/>
+                </a:solidFill>
+                <a:latin typeface="Calibri"/>
+              </a:defRPr>
+            </a:pPr>
+            <a:r>
+              <a:t>UNAN-Managua • CUR-Estelí | Carrera de Psicología • Segundo Semestre 2026</a:t>
+            </a:r>
+          </a:p>
+        </p:txBody>
+      </p:sp>
+      <p:sp>
+        <p:nvSpPr>
+          <p:cNvPr id="6" name="TextBox 5"/>
+          <p:cNvSpPr txBox="1"/>
+          <p:nvPr/>
+        </p:nvSpPr>
+        <p:spPr>
+          <a:xfrm>
+            <a:off x="10789920" y="6492240"/>
+            <a:ext cx="640080" cy="228600"/>
+          </a:xfrm>
+          <a:prstGeom prst="rect">
+            <a:avLst/>
+          </a:prstGeom>
+          <a:noFill/>
+        </p:spPr>
+        <p:txBody>
+          <a:bodyPr wrap="none" lIns="0" rIns="0" tIns="0" bIns="0">
+            <a:spAutoFit/>
+          </a:bodyPr>
+          <a:lstStyle/>
+          <a:p>
+            <a:pPr algn="r">
+              <a:defRPr sz="850" b="1">
+                <a:solidFill>
+                  <a:srgbClr val="64748B"/>
+                </a:solidFill>
+                <a:latin typeface="Calibri"/>
+              </a:defRPr>
+            </a:pPr>
+            <a:r>
+              <a:t>16 / 17</a:t>
             </a:r>
           </a:p>
         </p:txBody>
@@ -6212,9 +6492,9 @@
           <a:p>
             <a:pPr>
               <a:spcAft>
-                <a:spcPts val="600"/>
-              </a:spcAft>
-              <a:defRPr b="1" sz="1100">
+                <a:spcPts val="500"/>
+              </a:spcAft>
+              <a:defRPr b="1" sz="1050">
                 <a:solidFill>
                   <a:srgbClr val="0D9488"/>
                 </a:solidFill>
@@ -6232,7 +6512,7 @@
               </a:spcAft>
             </a:pPr>
             <a:r>
-              <a:rPr b="1" sz="1050">
+              <a:rPr b="1" sz="1000">
                 <a:solidFill>
                   <a:srgbClr val="0F172A"/>
                 </a:solidFill>
@@ -6241,13 +6521,13 @@
               <a:t>✓ Límites Legales: </a:t>
             </a:r>
             <a:r>
-              <a:rPr sz="1000">
+              <a:rPr sz="950">
                 <a:solidFill>
                   <a:srgbClr val="1E293B"/>
                 </a:solidFill>
                 <a:latin typeface="Calibri"/>
               </a:rPr>
-              <a:t>Respetar estrictamente las Leyes 774 y 292 (prohibición terminante de prescribir fármacos).</a:t>
+              <a:t>Respetar estrictamente las Leyes 774 y 292 (prohibición terminante de formular fármacos).</a:t>
             </a:r>
           </a:p>
           <a:p>
@@ -6257,7 +6537,7 @@
               </a:spcAft>
             </a:pPr>
             <a:r>
-              <a:rPr b="1" sz="1050">
+              <a:rPr b="1" sz="1000">
                 <a:solidFill>
                   <a:srgbClr val="0F172A"/>
                 </a:solidFill>
@@ -6266,7 +6546,7 @@
               <a:t>✓ Algoritmo Clínico: </a:t>
             </a:r>
             <a:r>
-              <a:rPr sz="1000">
+              <a:rPr sz="950">
                 <a:solidFill>
                   <a:srgbClr val="1E293B"/>
                 </a:solidFill>
@@ -6282,7 +6562,7 @@
               </a:spcAft>
             </a:pPr>
             <a:r>
-              <a:rPr b="1" sz="1050">
+              <a:rPr b="1" sz="1000">
                 <a:solidFill>
                   <a:srgbClr val="0F172A"/>
                 </a:solidFill>
@@ -6291,7 +6571,7 @@
               <a:t>✓ Diálogo Abierto: </a:t>
             </a:r>
             <a:r>
-              <a:rPr sz="1000">
+              <a:rPr sz="950">
                 <a:solidFill>
                   <a:srgbClr val="1E293B"/>
                 </a:solidFill>
@@ -6307,7 +6587,7 @@
               </a:spcAft>
             </a:pPr>
             <a:r>
-              <a:rPr b="1" sz="1050">
+              <a:rPr b="1" sz="1000">
                 <a:solidFill>
                   <a:srgbClr val="0F172A"/>
                 </a:solidFill>
@@ -6316,7 +6596,7 @@
               <a:t>✓ Autocuidado Personal: </a:t>
             </a:r>
             <a:r>
-              <a:rPr sz="1000">
+              <a:rPr sz="950">
                 <a:solidFill>
                   <a:srgbClr val="1E293B"/>
                 </a:solidFill>
@@ -6351,9 +6631,9 @@
           <a:p>
             <a:pPr>
               <a:spcAft>
-                <a:spcPts val="600"/>
-              </a:spcAft>
-              <a:defRPr b="1" sz="1100">
+                <a:spcPts val="500"/>
+              </a:spcAft>
+              <a:defRPr b="1" sz="1050">
                 <a:solidFill>
                   <a:srgbClr val="2563EB"/>
                 </a:solidFill>
@@ -6371,7 +6651,7 @@
               </a:spcAft>
             </a:pPr>
             <a:r>
-              <a:rPr b="1" sz="1050">
+              <a:rPr b="1" sz="1000">
                 <a:solidFill>
                   <a:srgbClr val="0F172A"/>
                 </a:solidFill>
@@ -6380,7 +6660,7 @@
               <a:t>✓ Transversalidad Curricular: </a:t>
             </a:r>
             <a:r>
-              <a:rPr sz="1000">
+              <a:rPr sz="950">
                 <a:solidFill>
                   <a:srgbClr val="1E293B"/>
                 </a:solidFill>
@@ -6396,7 +6676,7 @@
               </a:spcAft>
             </a:pPr>
             <a:r>
-              <a:rPr b="1" sz="1050">
+              <a:rPr b="1" sz="1000">
                 <a:solidFill>
                   <a:srgbClr val="0F172A"/>
                 </a:solidFill>
@@ -6405,7 +6685,7 @@
               <a:t>✓ Pedagogía Vivencial: </a:t>
             </a:r>
             <a:r>
-              <a:rPr sz="1000">
+              <a:rPr sz="950">
                 <a:solidFill>
                   <a:srgbClr val="1E293B"/>
                 </a:solidFill>
@@ -6421,7 +6701,7 @@
               </a:spcAft>
             </a:pPr>
             <a:r>
-              <a:rPr b="1" sz="1050">
+              <a:rPr b="1" sz="1000">
                 <a:solidFill>
                   <a:srgbClr val="0F172A"/>
                 </a:solidFill>
@@ -6430,7 +6710,7 @@
               <a:t>✓ Capacitación Continua: </a:t>
             </a:r>
             <a:r>
-              <a:rPr sz="1000">
+              <a:rPr sz="950">
                 <a:solidFill>
                   <a:srgbClr val="1E293B"/>
                 </a:solidFill>
@@ -6446,7 +6726,7 @@
               </a:spcAft>
             </a:pPr>
             <a:r>
-              <a:rPr b="1" sz="1050">
+              <a:rPr b="1" sz="1000">
                 <a:solidFill>
                   <a:srgbClr val="0F172A"/>
                 </a:solidFill>
@@ -6455,7 +6735,7 @@
               <a:t>✓ Derivación Ética: </a:t>
             </a:r>
             <a:r>
-              <a:rPr sz="1000">
+              <a:rPr sz="950">
                 <a:solidFill>
                   <a:srgbClr val="1E293B"/>
                 </a:solidFill>
@@ -6490,9 +6770,9 @@
           <a:p>
             <a:pPr>
               <a:spcAft>
-                <a:spcPts val="600"/>
-              </a:spcAft>
-              <a:defRPr b="1" sz="1100">
+                <a:spcPts val="500"/>
+              </a:spcAft>
+              <a:defRPr b="1" sz="1050">
                 <a:solidFill>
                   <a:srgbClr val="D97706"/>
                 </a:solidFill>
@@ -6510,7 +6790,7 @@
               </a:spcAft>
             </a:pPr>
             <a:r>
-              <a:rPr b="1" sz="1050">
+              <a:rPr b="1" sz="1000">
                 <a:solidFill>
                   <a:srgbClr val="0F172A"/>
                 </a:solidFill>
@@ -6519,7 +6799,7 @@
               <a:t>✓ Adopción Oficial: </a:t>
             </a:r>
             <a:r>
-              <a:rPr sz="1000">
+              <a:rPr sz="950">
                 <a:solidFill>
                   <a:srgbClr val="1E293B"/>
                 </a:solidFill>
@@ -6535,7 +6815,7 @@
               </a:spcAft>
             </a:pPr>
             <a:r>
-              <a:rPr b="1" sz="1050">
+              <a:rPr b="1" sz="1000">
                 <a:solidFill>
                   <a:srgbClr val="0F172A"/>
                 </a:solidFill>
@@ -6544,7 +6824,7 @@
               <a:t>✓ Comité de Bioética: </a:t>
             </a:r>
             <a:r>
-              <a:rPr sz="1000">
+              <a:rPr sz="950">
                 <a:solidFill>
                   <a:srgbClr val="1E293B"/>
                 </a:solidFill>
@@ -6560,7 +6840,7 @@
               </a:spcAft>
             </a:pPr>
             <a:r>
-              <a:rPr b="1" sz="1050">
+              <a:rPr b="1" sz="1000">
                 <a:solidFill>
                   <a:srgbClr val="0F172A"/>
                 </a:solidFill>
@@ -6569,7 +6849,7 @@
               <a:t>✓ Alianza con MINSA: </a:t>
             </a:r>
             <a:r>
-              <a:rPr sz="1000">
+              <a:rPr sz="950">
                 <a:solidFill>
                   <a:srgbClr val="1E293B"/>
                 </a:solidFill>
@@ -6585,7 +6865,7 @@
               </a:spcAft>
             </a:pPr>
             <a:r>
-              <a:rPr b="1" sz="1050">
+              <a:rPr b="1" sz="1000">
                 <a:solidFill>
                   <a:srgbClr val="0F172A"/>
                 </a:solidFill>
@@ -6594,7 +6874,7 @@
               <a:t>✓ Asignatura Electiva: </a:t>
             </a:r>
             <a:r>
-              <a:rPr sz="1000">
+              <a:rPr sz="950">
                 <a:solidFill>
                   <a:srgbClr val="1E293B"/>
                 </a:solidFill>
@@ -6629,9 +6909,9 @@
           <a:p>
             <a:pPr>
               <a:spcAft>
-                <a:spcPts val="600"/>
-              </a:spcAft>
-              <a:defRPr b="1" sz="1100">
+                <a:spcPts val="500"/>
+              </a:spcAft>
+              <a:defRPr b="1" sz="1050">
                 <a:solidFill>
                   <a:srgbClr val="0F172A"/>
                 </a:solidFill>
@@ -6649,7 +6929,7 @@
               </a:spcAft>
             </a:pPr>
             <a:r>
-              <a:rPr b="1" sz="1050">
+              <a:rPr b="1" sz="1000">
                 <a:solidFill>
                   <a:srgbClr val="0F172A"/>
                 </a:solidFill>
@@ -6658,7 +6938,7 @@
               <a:t>✓ Registro Oficial: </a:t>
             </a:r>
             <a:r>
-              <a:rPr sz="1000">
+              <a:rPr sz="950">
                 <a:solidFill>
                   <a:srgbClr val="1E293B"/>
                 </a:solidFill>
@@ -6674,7 +6954,7 @@
               </a:spcAft>
             </a:pPr>
             <a:r>
-              <a:rPr b="1" sz="1050">
+              <a:rPr b="1" sz="1000">
                 <a:solidFill>
                   <a:srgbClr val="0F172A"/>
                 </a:solidFill>
@@ -6683,7 +6963,7 @@
               <a:t>✓ Red de Interconsulta: </a:t>
             </a:r>
             <a:r>
-              <a:rPr sz="1000">
+              <a:rPr sz="950">
                 <a:solidFill>
                   <a:srgbClr val="1E293B"/>
                 </a:solidFill>
@@ -6699,7 +6979,7 @@
               </a:spcAft>
             </a:pPr>
             <a:r>
-              <a:rPr b="1" sz="1050">
+              <a:rPr b="1" sz="1000">
                 <a:solidFill>
                   <a:srgbClr val="0F172A"/>
                 </a:solidFill>
@@ -6708,7 +6988,7 @@
               <a:t>✓ Atención Primaria: </a:t>
             </a:r>
             <a:r>
-              <a:rPr sz="1000">
+              <a:rPr sz="950">
                 <a:solidFill>
                   <a:srgbClr val="1E293B"/>
                 </a:solidFill>
@@ -6724,7 +7004,7 @@
               </a:spcAft>
             </a:pPr>
             <a:r>
-              <a:rPr b="1" sz="1050">
+              <a:rPr b="1" sz="1000">
                 <a:solidFill>
                   <a:srgbClr val="0F172A"/>
                 </a:solidFill>
@@ -6733,7 +7013,7 @@
               <a:t>✓ Principio Bioético: </a:t>
             </a:r>
             <a:r>
-              <a:rPr sz="1000">
+              <a:rPr sz="950">
                 <a:solidFill>
                   <a:srgbClr val="1E293B"/>
                 </a:solidFill>
@@ -6755,7 +7035,7 @@
 </p:sld>
 </file>
 
-<file path=ppt/slides/slide16.xml><?xml version="1.0" encoding="utf-8"?>
+<file path=ppt/slides/slide17.xml><?xml version="1.0" encoding="utf-8"?>
 <p:sld xmlns:a="http://schemas.openxmlformats.org/drawingml/2006/main" xmlns:p="http://schemas.openxmlformats.org/presentationml/2006/main" xmlns:r="http://schemas.openxmlformats.org/officeDocument/2006/relationships">
   <p:cSld>
     <p:bg>
@@ -6955,7 +7235,7 @@
               </a:defRPr>
             </a:pPr>
             <a:r>
-              <a:t>Tutoría Académica: Dra. Tania Libertad Pérez Guevara | Carrera de Psicología • CUR-Estelí</a:t>
+              <a:t>Tutoría Académica: Dra. Tania Libertad Pérez Guevara | Carrera de Licenciatura en Psicología • CUR-Estelí</a:t>
             </a:r>
           </a:p>
         </p:txBody>
@@ -6998,7 +7278,7 @@
         <p:spPr>
           <a:xfrm>
             <a:off x="777240" y="438912"/>
-            <a:ext cx="9601200" cy="274320"/>
+            <a:ext cx="9601200" cy="256032"/>
           </a:xfrm>
           <a:prstGeom prst="rect">
             <a:avLst/>
@@ -7012,7 +7292,7 @@
           <a:lstStyle/>
           <a:p>
             <a:pPr>
-              <a:defRPr sz="1000" b="1">
+              <a:defRPr sz="950" b="1">
                 <a:solidFill>
                   <a:srgbClr val="0D9488"/>
                 </a:solidFill>
@@ -7020,7 +7300,7 @@
               </a:defRPr>
             </a:pPr>
             <a:r>
-              <a:t>CAPÍTULO I • PLANTEAMIENTO DEL PROBLEMA</a:t>
+              <a:t>CAPÍTULO I • INTRODUCCIÓN</a:t>
             </a:r>
           </a:p>
         </p:txBody>
@@ -7033,7 +7313,7 @@
         </p:nvSpPr>
         <p:spPr>
           <a:xfrm>
-            <a:off x="777240" y="713232"/>
+            <a:off x="777240" y="694944"/>
             <a:ext cx="9875520" cy="685800"/>
           </a:xfrm>
           <a:prstGeom prst="rect">
@@ -7048,7 +7328,7 @@
           <a:lstStyle/>
           <a:p>
             <a:pPr>
-              <a:defRPr sz="2800" b="1">
+              <a:defRPr sz="2600" b="1">
                 <a:solidFill>
                   <a:srgbClr val="0F172A"/>
                 </a:solidFill>
@@ -7056,7 +7336,7 @@
               </a:defRPr>
             </a:pPr>
             <a:r>
-              <a:t>Encrucijada Asistencial, Vacío Formativo y Pertinencia Social</a:t>
+              <a:t>Planteamiento del Problema y Justificación de la Investigación</a:t>
             </a:r>
           </a:p>
         </p:txBody>
@@ -7093,7 +7373,7 @@
         </p:nvSpPr>
         <p:spPr>
           <a:xfrm>
-            <a:off x="777240" y="6473952"/>
+            <a:off x="777240" y="6492240"/>
             <a:ext cx="9601200" cy="228600"/>
           </a:xfrm>
           <a:prstGeom prst="rect">
@@ -7108,7 +7388,7 @@
           <a:lstStyle/>
           <a:p>
             <a:pPr>
-              <a:defRPr sz="900">
+              <a:defRPr sz="850">
                 <a:solidFill>
                   <a:srgbClr val="64748B"/>
                 </a:solidFill>
@@ -7129,7 +7409,7 @@
         </p:nvSpPr>
         <p:spPr>
           <a:xfrm>
-            <a:off x="10789920" y="6473952"/>
+            <a:off x="10789920" y="6492240"/>
             <a:ext cx="640080" cy="228600"/>
           </a:xfrm>
           <a:prstGeom prst="rect">
@@ -7144,7 +7424,7 @@
           <a:lstStyle/>
           <a:p>
             <a:pPr algn="r">
-              <a:defRPr sz="900" b="1">
+              <a:defRPr sz="850" b="1">
                 <a:solidFill>
                   <a:srgbClr val="64748B"/>
                 </a:solidFill>
@@ -7152,7 +7432,7 @@
               </a:defRPr>
             </a:pPr>
             <a:r>
-              <a:t>2 / 16</a:t>
+              <a:t>2 / 17</a:t>
             </a:r>
           </a:p>
         </p:txBody>
@@ -7181,9 +7461,9 @@
           <a:p>
             <a:pPr>
               <a:spcAft>
-                <a:spcPts val="1400"/>
-              </a:spcAft>
-              <a:defRPr sz="1500" b="1">
+                <a:spcPts val="1200"/>
+              </a:spcAft>
+              <a:defRPr sz="1400" b="1">
                 <a:solidFill>
                   <a:srgbClr val="0F172A"/>
                 </a:solidFill>
@@ -7191,17 +7471,17 @@
               </a:defRPr>
             </a:pPr>
             <a:r>
-              <a:t>El Conflicto Estructural en Salud Mental</a:t>
-            </a:r>
-          </a:p>
-          <a:p>
-            <a:pPr>
-              <a:spcAft>
-                <a:spcPts val="1200"/>
-              </a:spcAft>
-            </a:pPr>
-            <a:r>
-              <a:rPr b="1" sz="1300">
+              <a:t>Problema de Investigación: Tensión Normativa y Formativa</a:t>
+            </a:r>
+          </a:p>
+          <a:p>
+            <a:pPr>
+              <a:spcAft>
+                <a:spcPts val="1000"/>
+              </a:spcAft>
+            </a:pPr>
+            <a:r>
+              <a:rPr b="1" sz="1200">
                 <a:solidFill>
                   <a:srgbClr val="0D9488"/>
                 </a:solidFill>
@@ -7210,95 +7490,95 @@
               <a:t>01  </a:t>
             </a:r>
             <a:r>
+              <a:rPr b="1" sz="1150">
+                <a:solidFill>
+                  <a:srgbClr val="0F172A"/>
+                </a:solidFill>
+                <a:latin typeface="Calibri"/>
+              </a:rPr>
+              <a:t>Asimetría Normativa y Vacío Curricular: </a:t>
+            </a:r>
+            <a:r>
+              <a:rPr sz="1100">
+                <a:solidFill>
+                  <a:srgbClr val="1E293B"/>
+                </a:solidFill>
+                <a:latin typeface="Calibri"/>
+              </a:rPr>
+              <a:t>La Ley No. 774 reconoce el acceso ciudadano a la MTCI en el sistema de salud, mientras la Ley No. 292 prohíbe taxativamente al psicólogo prescribir fármacos. Los planes de estudio no dotan al alumnado de lineamientos bioéticos claros para dialogar o derivar.</a:t>
+            </a:r>
+          </a:p>
+          <a:p>
+            <a:pPr>
+              <a:spcAft>
+                <a:spcPts val="1000"/>
+              </a:spcAft>
+            </a:pPr>
+            <a:r>
               <a:rPr b="1" sz="1200">
                 <a:solidFill>
+                  <a:srgbClr val="0D9488"/>
+                </a:solidFill>
+                <a:latin typeface="Cambria"/>
+              </a:rPr>
+              <a:t>02  </a:t>
+            </a:r>
+            <a:r>
+              <a:rPr b="1" sz="1150">
+                <a:solidFill>
                   <a:srgbClr val="0F172A"/>
                 </a:solidFill>
                 <a:latin typeface="Calibri"/>
               </a:rPr>
-              <a:t>Asimetría Normativa: </a:t>
-            </a:r>
-            <a:r>
-              <a:rPr sz="1150">
+              <a:t>Ocultamiento Terapéutico en Consulta: </a:t>
+            </a:r>
+            <a:r>
+              <a:rPr sz="1100">
                 <a:solidFill>
                   <a:srgbClr val="1E293B"/>
                 </a:solidFill>
                 <a:latin typeface="Calibri"/>
               </a:rPr>
-              <a:t>La Ley No. 774 garantiza el derecho y acceso ciudadano a las MTCI, pero la Ley No. 292 prohíbe taxativamente al psicólogo formular cualquier fármaco o sustancia.</a:t>
-            </a:r>
-          </a:p>
-          <a:p>
-            <a:pPr>
-              <a:spcAft>
-                <a:spcPts val="1200"/>
-              </a:spcAft>
-            </a:pPr>
-            <a:r>
-              <a:rPr b="1" sz="1300">
+              <a:t>Los usuarios recurren empíricamente a la medicina natural y tradicional para aliviar su angustia, pero silencian estas prácticas en consulta psicológica por temor al rechazo o escepticismo del terapeuta.</a:t>
+            </a:r>
+          </a:p>
+          <a:p>
+            <a:pPr>
+              <a:spcAft>
+                <a:spcPts val="1000"/>
+              </a:spcAft>
+            </a:pPr>
+            <a:r>
+              <a:rPr b="1" sz="1200">
                 <a:solidFill>
                   <a:srgbClr val="0D9488"/>
                 </a:solidFill>
                 <a:latin typeface="Cambria"/>
               </a:rPr>
-              <a:t>02  </a:t>
-            </a:r>
-            <a:r>
-              <a:rPr b="1" sz="1200">
+              <a:t>03  </a:t>
+            </a:r>
+            <a:r>
+              <a:rPr b="1" sz="1150">
                 <a:solidFill>
                   <a:srgbClr val="0F172A"/>
                 </a:solidFill>
                 <a:latin typeface="Calibri"/>
               </a:rPr>
-              <a:t>Ocultamiento Terapéutico: </a:t>
-            </a:r>
-            <a:r>
-              <a:rPr sz="1150">
+              <a:t>Riesgos Clínicos e Interacciones: </a:t>
+            </a:r>
+            <a:r>
+              <a:rPr sz="1100">
                 <a:solidFill>
                   <a:srgbClr val="1E293B"/>
                 </a:solidFill>
                 <a:latin typeface="Calibri"/>
               </a:rPr>
-              <a:t>Los consultantes recurren activamente a terapias tradicionales pero las silencian en sesión clínica por temor al reproche, burla o escepticismo del terapeuta.</a:t>
-            </a:r>
-          </a:p>
-          <a:p>
-            <a:pPr>
-              <a:spcAft>
-                <a:spcPts val="1200"/>
-              </a:spcAft>
-            </a:pPr>
-            <a:r>
-              <a:rPr b="1" sz="1300">
-                <a:solidFill>
-                  <a:srgbClr val="0D9488"/>
-                </a:solidFill>
-                <a:latin typeface="Cambria"/>
-              </a:rPr>
-              <a:t>03  </a:t>
-            </a:r>
-            <a:r>
-              <a:rPr b="1" sz="1200">
-                <a:solidFill>
-                  <a:srgbClr val="0F172A"/>
-                </a:solidFill>
-                <a:latin typeface="Calibri"/>
-              </a:rPr>
-              <a:t>Vacío Curricular Crítico: </a:t>
-            </a:r>
-            <a:r>
-              <a:rPr sz="1150">
-                <a:solidFill>
-                  <a:srgbClr val="1E293B"/>
-                </a:solidFill>
-                <a:latin typeface="Calibri"/>
-              </a:rPr>
-              <a:t>El estudiantado egresa sin lineamientos bioéticos para entablar un diálogo seguro, identificar interacciones adversas o realizar derivaciones oportunas.</a:t>
-            </a:r>
-          </a:p>
-          <a:p>
-            <a:r>
-              <a:rPr b="1">
+              <a:t>El desconocimiento de fitoterapia y productos naturales impide explorar contraindicaciones con psicofármacos o detectar prácticas que puedan retrasar la atención especializada.</a:t>
+            </a:r>
+          </a:p>
+          <a:p>
+            <a:r>
+              <a:rPr b="1" sz="1100">
                 <a:solidFill>
                   <a:srgbClr val="D97706"/>
                 </a:solidFill>
@@ -7306,7 +7586,7 @@
               <a:t>✦ Pregunta Central: </a:t>
             </a:r>
             <a:r>
-              <a:rPr i="1">
+              <a:rPr i="1" sz="1100">
                 <a:solidFill>
                   <a:srgbClr val="0F172A"/>
                 </a:solidFill>
@@ -7383,9 +7663,9 @@
           <a:p>
             <a:pPr>
               <a:spcAft>
-                <a:spcPts val="1400"/>
-              </a:spcAft>
-              <a:defRPr sz="1500" b="1">
+                <a:spcPts val="1200"/>
+              </a:spcAft>
+              <a:defRPr sz="1400" b="1">
                 <a:solidFill>
                   <a:srgbClr val="0F172A"/>
                 </a:solidFill>
@@ -7393,17 +7673,17 @@
               </a:defRPr>
             </a:pPr>
             <a:r>
-              <a:t>Justificación y Relevancia Social</a:t>
-            </a:r>
-          </a:p>
-          <a:p>
-            <a:pPr>
-              <a:spcAft>
-                <a:spcPts val="1200"/>
-              </a:spcAft>
-            </a:pPr>
-            <a:r>
-              <a:rPr b="1" sz="1200">
+              <a:t>Justificación y Relevancia de la Investigación</a:t>
+            </a:r>
+          </a:p>
+          <a:p>
+            <a:pPr>
+              <a:spcAft>
+                <a:spcPts val="1100"/>
+              </a:spcAft>
+            </a:pPr>
+            <a:r>
+              <a:rPr b="1" sz="1100">
                 <a:solidFill>
                   <a:srgbClr val="0D9488"/>
                 </a:solidFill>
@@ -7411,7 +7691,7 @@
               <a:t>✦ </a:t>
             </a:r>
             <a:r>
-              <a:rPr b="1" sz="1200">
+              <a:rPr b="1" sz="1150">
                 <a:solidFill>
                   <a:srgbClr val="0F172A"/>
                 </a:solidFill>
@@ -7420,23 +7700,23 @@
               <a:t>Ética y No Maleficencia: </a:t>
             </a:r>
             <a:r>
-              <a:rPr sz="1150">
+              <a:rPr sz="1100">
                 <a:solidFill>
                   <a:srgbClr val="1E293B"/>
                 </a:solidFill>
                 <a:latin typeface="Calibri"/>
               </a:rPr>
-              <a:t>Explorar el uso de hierbas y remedios tradicionales previene intoxicaciones o interacciones fitofarmacológicas con psicofármacos prescritos.</a:t>
-            </a:r>
-          </a:p>
-          <a:p>
-            <a:pPr>
-              <a:spcAft>
-                <a:spcPts val="1200"/>
-              </a:spcAft>
-            </a:pPr>
-            <a:r>
-              <a:rPr b="1" sz="1200">
+              <a:t>Explorar el uso de hierbas y remedios previene interacciones fitofarmacológicas y protege la seguridad clínica del usuario.</a:t>
+            </a:r>
+          </a:p>
+          <a:p>
+            <a:pPr>
+              <a:spcAft>
+                <a:spcPts val="1100"/>
+              </a:spcAft>
+            </a:pPr>
+            <a:r>
+              <a:rPr b="1" sz="1100">
                 <a:solidFill>
                   <a:srgbClr val="0D9488"/>
                 </a:solidFill>
@@ -7444,7 +7724,7 @@
               <a:t>✦ </a:t>
             </a:r>
             <a:r>
-              <a:rPr b="1" sz="1200">
+              <a:rPr b="1" sz="1150">
                 <a:solidFill>
                   <a:srgbClr val="0F172A"/>
                 </a:solidFill>
@@ -7453,23 +7733,23 @@
               <a:t>Salud Mental Comunitaria: </a:t>
             </a:r>
             <a:r>
-              <a:rPr sz="1150">
+              <a:rPr sz="1100">
                 <a:solidFill>
                   <a:srgbClr val="1E293B"/>
                 </a:solidFill>
                 <a:latin typeface="Calibri"/>
               </a:rPr>
-              <a:t>Reconoce y articula la memoria etnobotánica viva del norte segoviano y dignifica la labor de los facilitadores tradicionales de Estelí.</a:t>
-            </a:r>
-          </a:p>
-          <a:p>
-            <a:pPr>
-              <a:spcAft>
-                <a:spcPts val="1200"/>
-              </a:spcAft>
-            </a:pPr>
-            <a:r>
-              <a:rPr b="1" sz="1200">
+              <a:t>Reconoce la memoria etnobotánica viva y la legitimidad sociocultural de los facilitadores tradicionales en el territorio de Estelí.</a:t>
+            </a:r>
+          </a:p>
+          <a:p>
+            <a:pPr>
+              <a:spcAft>
+                <a:spcPts val="1100"/>
+              </a:spcAft>
+            </a:pPr>
+            <a:r>
+              <a:rPr b="1" sz="1100">
                 <a:solidFill>
                   <a:srgbClr val="0D9488"/>
                 </a:solidFill>
@@ -7477,32 +7757,32 @@
               <a:t>✦ </a:t>
             </a:r>
             <a:r>
-              <a:rPr b="1" sz="1200">
+              <a:rPr b="1" sz="1150">
                 <a:solidFill>
                   <a:srgbClr val="0F172A"/>
                 </a:solidFill>
                 <a:latin typeface="Calibri"/>
               </a:rPr>
-              <a:t>Impacto Formativo Directo: </a:t>
-            </a:r>
-            <a:r>
-              <a:rPr sz="1150">
+              <a:t>Pertinencia Formativa en el CUR-Estelí: </a:t>
+            </a:r>
+            <a:r>
+              <a:rPr sz="1100">
                 <a:solidFill>
                   <a:srgbClr val="1E293B"/>
                 </a:solidFill>
                 <a:latin typeface="Calibri"/>
               </a:rPr>
-              <a:t>Dota a los estudiantes de 4.º y 5.º año de criterios de discernimiento para su práctica en la Clínica Psicosocial del CUR-Estelí.</a:t>
-            </a:r>
-          </a:p>
-          <a:p>
-            <a:pPr>
-              <a:spcAft>
-                <a:spcPts val="1200"/>
-              </a:spcAft>
-            </a:pPr>
-            <a:r>
-              <a:rPr b="1" sz="1200">
+              <a:t>Dota a estudiantes de 4.º y 5.º año de discernimiento deontológico para sus prácticas en la Clínica Psicosocial universitaria.</a:t>
+            </a:r>
+          </a:p>
+          <a:p>
+            <a:pPr>
+              <a:spcAft>
+                <a:spcPts val="1100"/>
+              </a:spcAft>
+            </a:pPr>
+            <a:r>
+              <a:rPr b="1" sz="1100">
                 <a:solidFill>
                   <a:srgbClr val="0D9488"/>
                 </a:solidFill>
@@ -7510,7 +7790,7 @@
               <a:t>✦ </a:t>
             </a:r>
             <a:r>
-              <a:rPr b="1" sz="1200">
+              <a:rPr b="1" sz="1150">
                 <a:solidFill>
                   <a:srgbClr val="0F172A"/>
                 </a:solidFill>
@@ -7519,13 +7799,13 @@
               <a:t>Aporte Propositivo Concreto: </a:t>
             </a:r>
             <a:r>
-              <a:rPr sz="1150">
+              <a:rPr sz="1100">
                 <a:solidFill>
                   <a:srgbClr val="1E293B"/>
                 </a:solidFill>
                 <a:latin typeface="Calibri"/>
               </a:rPr>
-              <a:t>Entrega formalmente un Manual de Estrategias MTCI de 18 páginas (Anexo 16.2) validado como herramienta bioética y pedagógica institucional.</a:t>
+              <a:t>Genera el Manual de Estrategias MTCI de 18 páginas (Anexo 16.2), articulando algoritmos clínicos y el inventario I-CAM-Q.</a:t>
             </a:r>
           </a:p>
         </p:txBody>
@@ -7568,7 +7848,7 @@
         <p:spPr>
           <a:xfrm>
             <a:off x="777240" y="438912"/>
-            <a:ext cx="9601200" cy="274320"/>
+            <a:ext cx="9601200" cy="256032"/>
           </a:xfrm>
           <a:prstGeom prst="rect">
             <a:avLst/>
@@ -7582,7 +7862,7 @@
           <a:lstStyle/>
           <a:p>
             <a:pPr>
-              <a:defRPr sz="1000" b="1">
+              <a:defRPr sz="950" b="1">
                 <a:solidFill>
                   <a:srgbClr val="0D9488"/>
                 </a:solidFill>
@@ -7590,7 +7870,7 @@
               </a:defRPr>
             </a:pPr>
             <a:r>
-              <a:t>CAPÍTULO I • ESTADO DEL ARTE</a:t>
+              <a:t>CAPÍTULO I • INTRODUCCIÓN</a:t>
             </a:r>
           </a:p>
         </p:txBody>
@@ -7603,7 +7883,7 @@
         </p:nvSpPr>
         <p:spPr>
           <a:xfrm>
-            <a:off x="777240" y="713232"/>
+            <a:off x="777240" y="694944"/>
             <a:ext cx="9875520" cy="685800"/>
           </a:xfrm>
           <a:prstGeom prst="rect">
@@ -7618,7 +7898,7 @@
           <a:lstStyle/>
           <a:p>
             <a:pPr>
-              <a:defRPr sz="2800" b="1">
+              <a:defRPr sz="2600" b="1">
                 <a:solidFill>
                   <a:srgbClr val="0F172A"/>
                 </a:solidFill>
@@ -7626,7 +7906,7 @@
               </a:defRPr>
             </a:pPr>
             <a:r>
-              <a:t>Trayectoria de la Evidencia Internacional, Regional y Local</a:t>
+              <a:t>Antecedentes de la Investigación: Ámbitos Internacional, Regional y Local</a:t>
             </a:r>
           </a:p>
         </p:txBody>
@@ -7663,7 +7943,7 @@
         </p:nvSpPr>
         <p:spPr>
           <a:xfrm>
-            <a:off x="777240" y="6473952"/>
+            <a:off x="777240" y="6492240"/>
             <a:ext cx="9601200" cy="228600"/>
           </a:xfrm>
           <a:prstGeom prst="rect">
@@ -7678,7 +7958,7 @@
           <a:lstStyle/>
           <a:p>
             <a:pPr>
-              <a:defRPr sz="900">
+              <a:defRPr sz="850">
                 <a:solidFill>
                   <a:srgbClr val="64748B"/>
                 </a:solidFill>
@@ -7699,7 +7979,7 @@
         </p:nvSpPr>
         <p:spPr>
           <a:xfrm>
-            <a:off x="10789920" y="6473952"/>
+            <a:off x="10789920" y="6492240"/>
             <a:ext cx="640080" cy="228600"/>
           </a:xfrm>
           <a:prstGeom prst="rect">
@@ -7714,7 +7994,7 @@
           <a:lstStyle/>
           <a:p>
             <a:pPr algn="r">
-              <a:defRPr sz="900" b="1">
+              <a:defRPr sz="850" b="1">
                 <a:solidFill>
                   <a:srgbClr val="64748B"/>
                 </a:solidFill>
@@ -7722,7 +8002,7 @@
               </a:defRPr>
             </a:pPr>
             <a:r>
-              <a:t>3 / 16</a:t>
+              <a:t>3 / 17</a:t>
             </a:r>
           </a:p>
         </p:txBody>
@@ -7793,7 +8073,7 @@
           <a:lstStyle/>
           <a:p>
             <a:pPr>
-              <a:defRPr b="1" sz="1300">
+              <a:defRPr b="1" sz="1200">
                 <a:solidFill>
                   <a:srgbClr val="0D9488"/>
                 </a:solidFill>
@@ -7806,7 +8086,7 @@
           </a:p>
           <a:p>
             <a:pPr>
-              <a:defRPr b="1" sz="1100">
+              <a:defRPr b="1" sz="1050">
                 <a:solidFill>
                   <a:srgbClr val="0F172A"/>
                 </a:solidFill>
@@ -7814,7 +8094,7 @@
               </a:defRPr>
             </a:pPr>
             <a:r>
-              <a:t>ÁMBITO GLOBAL • OMS y Salud Integrativa</a:t>
+              <a:t>ÁMBITO GLOBAL • Directrices de la OMS y Ensayos Clínicos</a:t>
             </a:r>
           </a:p>
         </p:txBody>
@@ -7843,11 +8123,11 @@
           <a:p>
             <a:pPr>
               <a:spcAft>
-                <a:spcPts val="1000"/>
-              </a:spcAft>
-            </a:pPr>
-            <a:r>
-              <a:rPr b="1" sz="1150">
+                <a:spcPts val="900"/>
+              </a:spcAft>
+            </a:pPr>
+            <a:r>
+              <a:rPr b="1" sz="1100">
                 <a:solidFill>
                   <a:srgbClr val="0F172A"/>
                 </a:solidFill>
@@ -7856,23 +8136,23 @@
               <a:t>• Estrategia OMS sobre MTCI: </a:t>
             </a:r>
             <a:r>
-              <a:rPr sz="1100">
+              <a:rPr sz="1050">
                 <a:solidFill>
                   <a:srgbClr val="1E293B"/>
                 </a:solidFill>
                 <a:latin typeface="Calibri"/>
               </a:rPr>
-              <a:t>Marco global que insta a los sistemas de salud a integrar medicinas tradicionales con base en evidencia.</a:t>
-            </a:r>
-          </a:p>
-          <a:p>
-            <a:pPr>
-              <a:spcAft>
-                <a:spcPts val="1000"/>
-              </a:spcAft>
-            </a:pPr>
-            <a:r>
-              <a:rPr b="1" sz="1150">
+              <a:t>Marco global que insta a los sistemas de salud a incorporar medicinas tradicionales sobre bases de seguridad y evidencia.</a:t>
+            </a:r>
+          </a:p>
+          <a:p>
+            <a:pPr>
+              <a:spcAft>
+                <a:spcPts val="900"/>
+              </a:spcAft>
+            </a:pPr>
+            <a:r>
+              <a:rPr b="1" sz="1100">
                 <a:solidFill>
                   <a:srgbClr val="0F172A"/>
                 </a:solidFill>
@@ -7881,7 +8161,7 @@
               <a:t>• Metanálisis de Acupuntura y Fitoterapia: </a:t>
             </a:r>
             <a:r>
-              <a:rPr sz="1100">
+              <a:rPr sz="1050">
                 <a:solidFill>
                   <a:srgbClr val="1E293B"/>
                 </a:solidFill>
@@ -7893,26 +8173,26 @@
           <a:p>
             <a:pPr>
               <a:spcAft>
-                <a:spcPts val="1000"/>
-              </a:spcAft>
-            </a:pPr>
-            <a:r>
-              <a:rPr b="1" sz="1150">
+                <a:spcPts val="900"/>
+              </a:spcAft>
+            </a:pPr>
+            <a:r>
+              <a:rPr b="1" sz="1100">
                 <a:solidFill>
                   <a:srgbClr val="0F172A"/>
                 </a:solidFill>
                 <a:latin typeface="Calibri"/>
               </a:rPr>
-              <a:t>• Salud Mental Global: </a:t>
-            </a:r>
-            <a:r>
-              <a:rPr sz="1100">
+              <a:t>• Salud Mental e Intervenciones Mente-Cuerpo: </a:t>
+            </a:r>
+            <a:r>
+              <a:rPr sz="1050">
                 <a:solidFill>
                   <a:srgbClr val="1E293B"/>
                 </a:solidFill>
                 <a:latin typeface="Calibri"/>
               </a:rPr>
-              <a:t>Sotiropoulos et al. (2025) validan técnicas mente-cuerpo en comorbilidades afectivas.</a:t>
+              <a:t>Sotiropoulos et al. (2025) validan técnicas de autorregulación somática en cuadros ansioso-depresivos.</a:t>
             </a:r>
           </a:p>
         </p:txBody>
@@ -7940,7 +8220,7 @@
           <a:lstStyle/>
           <a:p>
             <a:pPr>
-              <a:defRPr b="1" sz="1300">
+              <a:defRPr b="1" sz="1200">
                 <a:solidFill>
                   <a:srgbClr val="0D9488"/>
                 </a:solidFill>
@@ -7953,7 +8233,7 @@
           </a:p>
           <a:p>
             <a:pPr>
-              <a:defRPr b="1" sz="1100">
+              <a:defRPr b="1" sz="1050">
                 <a:solidFill>
                   <a:srgbClr val="0F172A"/>
                 </a:solidFill>
@@ -7961,7 +8241,7 @@
               </a:defRPr>
             </a:pPr>
             <a:r>
-              <a:t>ÁMBITO REGIONAL • Iberoamérica y la Paradoja</a:t>
+              <a:t>ÁMBITO REGIONAL • Estudios Universitarios en Iberoamérica</a:t>
             </a:r>
           </a:p>
         </p:txBody>
@@ -7990,11 +8270,11 @@
           <a:p>
             <a:pPr>
               <a:spcAft>
-                <a:spcPts val="1000"/>
-              </a:spcAft>
-            </a:pPr>
-            <a:r>
-              <a:rPr b="1" sz="1150">
+                <a:spcPts val="900"/>
+              </a:spcAft>
+            </a:pPr>
+            <a:r>
+              <a:rPr b="1" sz="1100">
                 <a:solidFill>
                   <a:srgbClr val="0F172A"/>
                 </a:solidFill>
@@ -8003,63 +8283,63 @@
               <a:t>• Estudios en Educación Superior: </a:t>
             </a:r>
             <a:r>
-              <a:rPr sz="1100">
+              <a:rPr sz="1050">
                 <a:solidFill>
                   <a:srgbClr val="1E293B"/>
                 </a:solidFill>
                 <a:latin typeface="Calibri"/>
               </a:rPr>
-              <a:t>Investigaciones en Argentina (Papalini, 2022) y Chile evidencian uso masivo de MTCI en universitarios.</a:t>
-            </a:r>
-          </a:p>
-          <a:p>
-            <a:pPr>
-              <a:spcAft>
-                <a:spcPts val="1000"/>
-              </a:spcAft>
-            </a:pPr>
-            <a:r>
-              <a:rPr b="1" sz="1150">
+              <a:t>Investigaciones en Argentina (Papalini, 2022) y Chile evidencian uso masivo de MTCI en estudiantes de carreras de salud.</a:t>
+            </a:r>
+          </a:p>
+          <a:p>
+            <a:pPr>
+              <a:spcAft>
+                <a:spcPts val="900"/>
+              </a:spcAft>
+            </a:pPr>
+            <a:r>
+              <a:rPr b="1" sz="1100">
                 <a:solidFill>
                   <a:srgbClr val="0F172A"/>
                 </a:solidFill>
                 <a:latin typeface="Calibri"/>
               </a:rPr>
-              <a:t>• Paradoja Formativa Identificada: </a:t>
-            </a:r>
-            <a:r>
-              <a:rPr sz="1100">
+              <a:t>• Identificación de la Brecha Formativa: </a:t>
+            </a:r>
+            <a:r>
+              <a:rPr sz="1050">
                 <a:solidFill>
                   <a:srgbClr val="1E293B"/>
                 </a:solidFill>
                 <a:latin typeface="Calibri"/>
               </a:rPr>
-              <a:t>Más del 80% del alumnado en carreras de salud recurre a MTCI pero reporta cero instrucción universitaria.</a:t>
-            </a:r>
-          </a:p>
-          <a:p>
-            <a:pPr>
-              <a:spcAft>
-                <a:spcPts val="1000"/>
-              </a:spcAft>
-            </a:pPr>
-            <a:r>
-              <a:rPr b="1" sz="1150">
+              <a:t>Más del 80% del alumnado recurre a MTCI como autocuidado pero reporta nula preparación curricular universitaria.</a:t>
+            </a:r>
+          </a:p>
+          <a:p>
+            <a:pPr>
+              <a:spcAft>
+                <a:spcPts val="900"/>
+              </a:spcAft>
+            </a:pPr>
+            <a:r>
+              <a:rPr b="1" sz="1100">
                 <a:solidFill>
                   <a:srgbClr val="0F172A"/>
                 </a:solidFill>
                 <a:latin typeface="Calibri"/>
               </a:rPr>
-              <a:t>• Falta de Protocolos: </a:t>
-            </a:r>
-            <a:r>
-              <a:rPr sz="1100">
+              <a:t>• Ausencia de Protocolos Clínicos: </a:t>
+            </a:r>
+            <a:r>
+              <a:rPr sz="1050">
                 <a:solidFill>
                   <a:srgbClr val="1E293B"/>
                 </a:solidFill>
                 <a:latin typeface="Calibri"/>
               </a:rPr>
-              <a:t>Ausencia de guías clínicas de derivación entre psicólogos y terapeutas complementarios.</a:t>
+              <a:t>Carencia de herramientas normalizadas de derivación entre psicólogos y terapeutas tradicionales.</a:t>
             </a:r>
           </a:p>
         </p:txBody>
@@ -8087,7 +8367,7 @@
           <a:lstStyle/>
           <a:p>
             <a:pPr>
-              <a:defRPr b="1" sz="1300">
+              <a:defRPr b="1" sz="1200">
                 <a:solidFill>
                   <a:srgbClr val="0D9488"/>
                 </a:solidFill>
@@ -8100,7 +8380,7 @@
           </a:p>
           <a:p>
             <a:pPr>
-              <a:defRPr b="1" sz="1100">
+              <a:defRPr b="1" sz="1050">
                 <a:solidFill>
                   <a:srgbClr val="0F172A"/>
                 </a:solidFill>
@@ -8108,7 +8388,7 @@
               </a:defRPr>
             </a:pPr>
             <a:r>
-              <a:t>ÁMBITO LOCAL • Nicaragua y Vacío Curricular</a:t>
+              <a:t>ÁMBITO LOCAL • Nicaragua, CUR-Estelí y Vacío Curricular</a:t>
             </a:r>
           </a:p>
         </p:txBody>
@@ -8137,36 +8417,36 @@
           <a:p>
             <a:pPr>
               <a:spcAft>
-                <a:spcPts val="1000"/>
-              </a:spcAft>
-            </a:pPr>
-            <a:r>
-              <a:rPr b="1" sz="1150">
+                <a:spcPts val="900"/>
+              </a:spcAft>
+            </a:pPr>
+            <a:r>
+              <a:rPr b="1" sz="1100">
                 <a:solidFill>
                   <a:srgbClr val="0F172A"/>
                 </a:solidFill>
                 <a:latin typeface="Calibri"/>
               </a:rPr>
-              <a:t>• Marco Jurídico de Vanguardia: </a:t>
-            </a:r>
-            <a:r>
-              <a:rPr sz="1100">
+              <a:t>• Vanguardia Jurídica Sanitaria: </a:t>
+            </a:r>
+            <a:r>
+              <a:rPr sz="1050">
                 <a:solidFill>
                   <a:srgbClr val="1E293B"/>
                 </a:solidFill>
                 <a:latin typeface="Calibri"/>
               </a:rPr>
-              <a:t>Leyes 774 y 759 establecen el Instituto de Medicina Natural, pionero en Centroamérica.</a:t>
-            </a:r>
-          </a:p>
-          <a:p>
-            <a:pPr>
-              <a:spcAft>
-                <a:spcPts val="1000"/>
-              </a:spcAft>
-            </a:pPr>
-            <a:r>
-              <a:rPr b="1" sz="1150">
+              <a:t>Leyes 774 y 759 establecen el Instituto de Medicina Natural, pionero en el marco normativo centroamericano.</a:t>
+            </a:r>
+          </a:p>
+          <a:p>
+            <a:pPr>
+              <a:spcAft>
+                <a:spcPts val="900"/>
+              </a:spcAft>
+            </a:pPr>
+            <a:r>
+              <a:rPr b="1" sz="1100">
                 <a:solidFill>
                   <a:srgbClr val="0F172A"/>
                 </a:solidFill>
@@ -8175,38 +8455,38 @@
               <a:t>• Vacío en Facultades de Psicología: </a:t>
             </a:r>
             <a:r>
-              <a:rPr sz="1100">
+              <a:rPr sz="1050">
                 <a:solidFill>
                   <a:srgbClr val="1E293B"/>
                 </a:solidFill>
                 <a:latin typeface="Calibri"/>
               </a:rPr>
-              <a:t>Cero asignaturas electivas o transversales sobre diálogo intercultural en salud mental.</a:t>
-            </a:r>
-          </a:p>
-          <a:p>
-            <a:pPr>
-              <a:spcAft>
-                <a:spcPts val="1000"/>
-              </a:spcAft>
-            </a:pPr>
-            <a:r>
-              <a:rPr b="1" sz="1150">
+              <a:t>Ausencia de asignaturas o módulos sobre diálogo intercultural en salud mental en los planes de estudio vigentes.</a:t>
+            </a:r>
+          </a:p>
+          <a:p>
+            <a:pPr>
+              <a:spcAft>
+                <a:spcPts val="900"/>
+              </a:spcAft>
+            </a:pPr>
+            <a:r>
+              <a:rPr b="1" sz="1100">
                 <a:solidFill>
                   <a:srgbClr val="0F172A"/>
                 </a:solidFill>
                 <a:latin typeface="Calibri"/>
               </a:rPr>
-              <a:t>• Estudio CUR-Estelí (2026): </a:t>
-            </a:r>
-            <a:r>
-              <a:rPr sz="1100">
+              <a:t>• Estudio Mixto CUR-Estelí (2026): </a:t>
+            </a:r>
+            <a:r>
+              <a:rPr sz="1050">
                 <a:solidFill>
                   <a:srgbClr val="1E293B"/>
                 </a:solidFill>
                 <a:latin typeface="Calibri"/>
               </a:rPr>
-              <a:t>Primera investigación empírica mixta que articula estudiantes, claustro docente y facilitadores territoriales.</a:t>
+              <a:t>Primer estudio empírico que triangula las percepciones de estudiantes, docentes universitarios y facilitadores locales.</a:t>
             </a:r>
           </a:p>
         </p:txBody>
@@ -8249,7 +8529,7 @@
         <p:spPr>
           <a:xfrm>
             <a:off x="777240" y="438912"/>
-            <a:ext cx="9601200" cy="274320"/>
+            <a:ext cx="9601200" cy="256032"/>
           </a:xfrm>
           <a:prstGeom prst="rect">
             <a:avLst/>
@@ -8263,7 +8543,7 @@
           <a:lstStyle/>
           <a:p>
             <a:pPr>
-              <a:defRPr sz="1000" b="1">
+              <a:defRPr sz="950" b="1">
                 <a:solidFill>
                   <a:srgbClr val="0D9488"/>
                 </a:solidFill>
@@ -8271,7 +8551,7 @@
               </a:defRPr>
             </a:pPr>
             <a:r>
-              <a:t>CAPÍTULO I • CONTEXTUALIZACIÓN SITUACIONAL</a:t>
+              <a:t>CAPÍTULO I • INTRODUCCIÓN</a:t>
             </a:r>
           </a:p>
         </p:txBody>
@@ -8284,7 +8564,7 @@
         </p:nvSpPr>
         <p:spPr>
           <a:xfrm>
-            <a:off x="777240" y="713232"/>
+            <a:off x="777240" y="694944"/>
             <a:ext cx="9875520" cy="685800"/>
           </a:xfrm>
           <a:prstGeom prst="rect">
@@ -8299,7 +8579,7 @@
           <a:lstStyle/>
           <a:p>
             <a:pPr>
-              <a:defRPr sz="2800" b="1">
+              <a:defRPr sz="2600" b="1">
                 <a:solidFill>
                   <a:srgbClr val="0F172A"/>
                 </a:solidFill>
@@ -8307,7 +8587,7 @@
               </a:defRPr>
             </a:pPr>
             <a:r>
-              <a:t>El Escenario de Investigación: CUR-Estelí y el Territorio Segoviano</a:t>
+              <a:t>Contexto del Estudio: Territorio de Estelí y UNAN-Managua CUR-Estelí</a:t>
             </a:r>
           </a:p>
         </p:txBody>
@@ -8344,7 +8624,7 @@
         </p:nvSpPr>
         <p:spPr>
           <a:xfrm>
-            <a:off x="777240" y="6473952"/>
+            <a:off x="777240" y="6492240"/>
             <a:ext cx="9601200" cy="228600"/>
           </a:xfrm>
           <a:prstGeom prst="rect">
@@ -8359,7 +8639,7 @@
           <a:lstStyle/>
           <a:p>
             <a:pPr>
-              <a:defRPr sz="900">
+              <a:defRPr sz="850">
                 <a:solidFill>
                   <a:srgbClr val="64748B"/>
                 </a:solidFill>
@@ -8380,7 +8660,7 @@
         </p:nvSpPr>
         <p:spPr>
           <a:xfrm>
-            <a:off x="10789920" y="6473952"/>
+            <a:off x="10789920" y="6492240"/>
             <a:ext cx="640080" cy="228600"/>
           </a:xfrm>
           <a:prstGeom prst="rect">
@@ -8395,7 +8675,7 @@
           <a:lstStyle/>
           <a:p>
             <a:pPr algn="r">
-              <a:defRPr sz="900" b="1">
+              <a:defRPr sz="850" b="1">
                 <a:solidFill>
                   <a:srgbClr val="64748B"/>
                 </a:solidFill>
@@ -8403,7 +8683,7 @@
               </a:defRPr>
             </a:pPr>
             <a:r>
-              <a:t>4 / 16</a:t>
+              <a:t>4 / 17</a:t>
             </a:r>
           </a:p>
         </p:txBody>
@@ -8434,7 +8714,7 @@
               <a:spcAft>
                 <a:spcPts val="1200"/>
               </a:spcAft>
-              <a:defRPr b="1" sz="1500">
+              <a:defRPr b="1" sz="1400">
                 <a:solidFill>
                   <a:srgbClr val="0F172A"/>
                 </a:solidFill>
@@ -8442,85 +8722,85 @@
               </a:defRPr>
             </a:pPr>
             <a:r>
-              <a:t>Municipio de Estelí: Matriz Sociocultural y Saberes Vivos</a:t>
-            </a:r>
-          </a:p>
-          <a:p>
-            <a:pPr>
-              <a:spcAft>
-                <a:spcPts val="1200"/>
-              </a:spcAft>
-            </a:pPr>
-            <a:r>
-              <a:rPr b="1" sz="1200">
+              <a:t>Municipio de Estelí: Realidad Sociocultural y Prácticas Tradicionales</a:t>
+            </a:r>
+          </a:p>
+          <a:p>
+            <a:pPr>
+              <a:spcAft>
+                <a:spcPts val="1100"/>
+              </a:spcAft>
+            </a:pPr>
+            <a:r>
+              <a:rPr b="1" sz="1150">
                 <a:solidFill>
                   <a:srgbClr val="0D9488"/>
                 </a:solidFill>
                 <a:latin typeface="Calibri"/>
               </a:rPr>
-              <a:t>✦ Memoria Etnobotánica del Norte
+              <a:t>✦ Tradición Etnobotánica de Las Segovias
 </a:t>
             </a:r>
             <a:r>
-              <a:rPr sz="1150">
+              <a:rPr sz="1100">
                 <a:solidFill>
                   <a:srgbClr val="1E293B"/>
                 </a:solidFill>
                 <a:latin typeface="Calibri"/>
               </a:rPr>
-              <a:t>Estelí y la región de Las Segovias conservan una arraigada tradición de uso de plantas medicinales, sobandería y medicina popular transmitida intergeneracionalmente.</a:t>
-            </a:r>
-          </a:p>
-          <a:p>
-            <a:pPr>
-              <a:spcAft>
-                <a:spcPts val="1200"/>
-              </a:spcAft>
-            </a:pPr>
-            <a:r>
-              <a:rPr b="1" sz="1200">
+              <a:t>Estelí y el norte de Nicaragua conservan un acervo histórico de uso de plantas medicinales, sobandería y remedios caseros transmitidos de generación en generación.</a:t>
+            </a:r>
+          </a:p>
+          <a:p>
+            <a:pPr>
+              <a:spcAft>
+                <a:spcPts val="1100"/>
+              </a:spcAft>
+            </a:pPr>
+            <a:r>
+              <a:rPr b="1" sz="1150">
                 <a:solidFill>
                   <a:srgbClr val="0D9488"/>
                 </a:solidFill>
                 <a:latin typeface="Calibri"/>
               </a:rPr>
-              <a:t>✦ Red Comunitaria de Facilitadores
+              <a:t>✦ Presencia de Terapeutas Comunitarios
 </a:t>
             </a:r>
             <a:r>
-              <a:rPr sz="1150">
+              <a:rPr sz="1100">
                 <a:solidFill>
                   <a:srgbClr val="1E293B"/>
                 </a:solidFill>
                 <a:latin typeface="Calibri"/>
               </a:rPr>
-              <a:t>Sobadores, naturópatas y curanderos tradicionales constituyen el primer escalón asistencial para dolencias músculo-esqueléticas y malestares emocionales (nervios, aflicción).</a:t>
-            </a:r>
-          </a:p>
-          <a:p>
-            <a:pPr>
-              <a:spcAft>
-                <a:spcPts val="1200"/>
-              </a:spcAft>
-            </a:pPr>
-            <a:r>
-              <a:rPr b="1" sz="1200">
+              <a:t>Los facilitadores de medicina natural, masajistas y curanderos atienden de forma cotidiana a personas con dolencias osteomusculares y estados de estrés o aflicción emocional.</a:t>
+            </a:r>
+          </a:p>
+          <a:p>
+            <a:pPr>
+              <a:spcAft>
+                <a:spcPts val="1100"/>
+              </a:spcAft>
+            </a:pPr>
+            <a:r>
+              <a:rPr b="1" sz="1150">
                 <a:solidFill>
                   <a:srgbClr val="0D9488"/>
                 </a:solidFill>
                 <a:latin typeface="Calibri"/>
               </a:rPr>
-              <a:t>✦ Barreras de Articulación Sanitaria
+              <a:t>✦ Desarticulación Asistencial y Prejuicios
 </a:t>
             </a:r>
             <a:r>
-              <a:rPr sz="1150">
+              <a:rPr sz="1100">
                 <a:solidFill>
                   <a:srgbClr val="1E293B"/>
                 </a:solidFill>
                 <a:latin typeface="Calibri"/>
               </a:rPr>
-              <a:t>Persiste una desarticulación burocrática y asistencial entre los terapeutas comunitarios y los centros de salud formales, generando estigma y derivaciones tardías.</a:t>
+              <a:t>Persiste una brecha de comunicación formal entre los terapeutas tradicionales y los centros de salud institucionales, mediada por prejuicios mutuos y falta de vías de derivación.</a:t>
             </a:r>
           </a:p>
         </p:txBody>
@@ -8594,7 +8874,7 @@
               <a:spcAft>
                 <a:spcPts val="1200"/>
               </a:spcAft>
-              <a:defRPr b="1" sz="1500">
+              <a:defRPr b="1" sz="1400">
                 <a:solidFill>
                   <a:srgbClr val="0F172A"/>
                 </a:solidFill>
@@ -8602,43 +8882,43 @@
               </a:defRPr>
             </a:pPr>
             <a:r>
-              <a:t>UNAN-Managua CUR-Estelí: Clínica y Formación</a:t>
-            </a:r>
-          </a:p>
-          <a:p>
-            <a:pPr>
-              <a:spcAft>
-                <a:spcPts val="1200"/>
-              </a:spcAft>
-            </a:pPr>
-            <a:r>
-              <a:rPr b="1" sz="1200">
+              <a:t>UNAN-Managua CUR-Estelí: Clínica Psicosocial y Formación</a:t>
+            </a:r>
+          </a:p>
+          <a:p>
+            <a:pPr>
+              <a:spcAft>
+                <a:spcPts val="1100"/>
+              </a:spcAft>
+            </a:pPr>
+            <a:r>
+              <a:rPr b="1" sz="1150">
                 <a:solidFill>
                   <a:srgbClr val="D97706"/>
                 </a:solidFill>
                 <a:latin typeface="Calibri"/>
               </a:rPr>
-              <a:t>✦ Recinto Leonel Rugama Rugama
+              <a:t>✦ Recinto Universitario Leonel Rugama
 </a:t>
             </a:r>
             <a:r>
-              <a:rPr sz="1150">
+              <a:rPr sz="1100">
                 <a:solidFill>
                   <a:srgbClr val="1E293B"/>
                 </a:solidFill>
                 <a:latin typeface="Calibri"/>
               </a:rPr>
-              <a:t>Sede de formación universitaria de la Carrera de Psicología, formando profesionales orientados al desarrollo psicosocial y comunitario del norte del país.</a:t>
-            </a:r>
-          </a:p>
-          <a:p>
-            <a:pPr>
-              <a:spcAft>
-                <a:spcPts val="1200"/>
-              </a:spcAft>
-            </a:pPr>
-            <a:r>
-              <a:rPr b="1" sz="1200">
+              <a:t>Sede regional que forma a profesionales de la psicología orientados a responder a las demandas del desarrollo humano y comunitario de la región norte.</a:t>
+            </a:r>
+          </a:p>
+          <a:p>
+            <a:pPr>
+              <a:spcAft>
+                <a:spcPts val="1100"/>
+              </a:spcAft>
+            </a:pPr>
+            <a:r>
+              <a:rPr b="1" sz="1150">
                 <a:solidFill>
                   <a:srgbClr val="D97706"/>
                 </a:solidFill>
@@ -8648,39 +8928,39 @@
 </a:t>
             </a:r>
             <a:r>
-              <a:rPr sz="1150">
+              <a:rPr sz="1100">
                 <a:solidFill>
                   <a:srgbClr val="1E293B"/>
                 </a:solidFill>
                 <a:latin typeface="Calibri"/>
               </a:rPr>
-              <a:t>Espacio asistencial y docente donde los estudiantes de 4.º y 5.º año brindan atención supervisada a usuarios con problemas de salud mental y estrés adaptativo.</a:t>
-            </a:r>
-          </a:p>
-          <a:p>
-            <a:pPr>
-              <a:spcAft>
-                <a:spcPts val="1200"/>
-              </a:spcAft>
-            </a:pPr>
-            <a:r>
-              <a:rPr b="1" sz="1200">
+              <a:t>Espacio asistencial y docente donde los estudiantes de 4.º y 5.º año brindan atención psicoterapéutica bajo supervisión docente a consultantes con dificultades afectivas y psicosomáticas.</a:t>
+            </a:r>
+          </a:p>
+          <a:p>
+            <a:pPr>
+              <a:spcAft>
+                <a:spcPts val="1100"/>
+              </a:spcAft>
+            </a:pPr>
+            <a:r>
+              <a:rPr b="1" sz="1150">
                 <a:solidFill>
                   <a:srgbClr val="D97706"/>
                 </a:solidFill>
                 <a:latin typeface="Calibri"/>
               </a:rPr>
-              <a:t>✦ Oportunidad de Liderazgo Institucional
+              <a:t>✦ Demanda de Herramientas Bioéticas
 </a:t>
             </a:r>
             <a:r>
-              <a:rPr sz="1150">
+              <a:rPr sz="1100">
                 <a:solidFill>
                   <a:srgbClr val="1E293B"/>
                 </a:solidFill>
                 <a:latin typeface="Calibri"/>
               </a:rPr>
-              <a:t>La investigación ofrece al CUR-Estelí la oportunidad pionera de implementar el primer protocolo universitario formal de abordaje ético de las MTCI en psicología.</a:t>
+              <a:t>La investigación responde a la necesidad docente de dotar al estudiantado de pautas estructuradas para explorar el uso de MTCI y establecer límites de práctica claros.</a:t>
             </a:r>
           </a:p>
         </p:txBody>
@@ -8723,7 +9003,7 @@
         <p:spPr>
           <a:xfrm>
             <a:off x="777240" y="438912"/>
-            <a:ext cx="9601200" cy="274320"/>
+            <a:ext cx="9601200" cy="256032"/>
           </a:xfrm>
           <a:prstGeom prst="rect">
             <a:avLst/>
@@ -8737,7 +9017,7 @@
           <a:lstStyle/>
           <a:p>
             <a:pPr>
-              <a:defRPr sz="1000" b="1">
+              <a:defRPr sz="950" b="1">
                 <a:solidFill>
                   <a:srgbClr val="0D9488"/>
                 </a:solidFill>
@@ -8745,7 +9025,7 @@
               </a:defRPr>
             </a:pPr>
             <a:r>
-              <a:t>CAPÍTULO I • PROPÓSITO INVESTIGATIVO</a:t>
+              <a:t>CAPÍTULO I • INTRODUCCIÓN</a:t>
             </a:r>
           </a:p>
         </p:txBody>
@@ -8758,7 +9038,7 @@
         </p:nvSpPr>
         <p:spPr>
           <a:xfrm>
-            <a:off x="777240" y="713232"/>
+            <a:off x="777240" y="694944"/>
             <a:ext cx="9875520" cy="685800"/>
           </a:xfrm>
           <a:prstGeom prst="rect">
@@ -8773,7 +9053,7 @@
           <a:lstStyle/>
           <a:p>
             <a:pPr>
-              <a:defRPr sz="2800" b="1">
+              <a:defRPr sz="2600" b="1">
                 <a:solidFill>
                   <a:srgbClr val="0F172A"/>
                 </a:solidFill>
@@ -8781,7 +9061,7 @@
               </a:defRPr>
             </a:pPr>
             <a:r>
-              <a:t>Objetivos de la Investigación: Del Diagnóstico a la Propuesta</a:t>
+              <a:t>Objetivos de la Investigación: General y Específicos</a:t>
             </a:r>
           </a:p>
         </p:txBody>
@@ -8818,7 +9098,7 @@
         </p:nvSpPr>
         <p:spPr>
           <a:xfrm>
-            <a:off x="777240" y="6473952"/>
+            <a:off x="777240" y="6492240"/>
             <a:ext cx="9601200" cy="228600"/>
           </a:xfrm>
           <a:prstGeom prst="rect">
@@ -8833,7 +9113,7 @@
           <a:lstStyle/>
           <a:p>
             <a:pPr>
-              <a:defRPr sz="900">
+              <a:defRPr sz="850">
                 <a:solidFill>
                   <a:srgbClr val="64748B"/>
                 </a:solidFill>
@@ -8854,7 +9134,7 @@
         </p:nvSpPr>
         <p:spPr>
           <a:xfrm>
-            <a:off x="10789920" y="6473952"/>
+            <a:off x="10789920" y="6492240"/>
             <a:ext cx="640080" cy="228600"/>
           </a:xfrm>
           <a:prstGeom prst="rect">
@@ -8869,7 +9149,7 @@
           <a:lstStyle/>
           <a:p>
             <a:pPr algn="r">
-              <a:defRPr sz="900" b="1">
+              <a:defRPr sz="850" b="1">
                 <a:solidFill>
                   <a:srgbClr val="64748B"/>
                 </a:solidFill>
@@ -8877,7 +9157,7 @@
               </a:defRPr>
             </a:pPr>
             <a:r>
-              <a:t>5 / 16</a:t>
+              <a:t>5 / 17</a:t>
             </a:r>
           </a:p>
         </p:txBody>
@@ -8908,7 +9188,7 @@
               <a:spcAft>
                 <a:spcPts val="400"/>
               </a:spcAft>
-              <a:defRPr b="1" sz="1100">
+              <a:defRPr b="1" sz="1050">
                 <a:solidFill>
                   <a:srgbClr val="D97706"/>
                 </a:solidFill>
@@ -8921,7 +9201,7 @@
           </a:p>
           <a:p>
             <a:pPr>
-              <a:defRPr b="1" sz="1550">
+              <a:defRPr b="1" sz="1500">
                 <a:solidFill>
                   <a:srgbClr val="0F172A"/>
                 </a:solidFill>
@@ -9019,7 +9299,7 @@
               <a:spcAft>
                 <a:spcPts val="800"/>
               </a:spcAft>
-              <a:defRPr b="1" sz="1100">
+              <a:defRPr b="1" sz="1050">
                 <a:solidFill>
                   <a:srgbClr val="0F172A"/>
                 </a:solidFill>
@@ -9027,12 +9307,12 @@
               </a:defRPr>
             </a:pPr>
             <a:r>
-              <a:t>OE1 • DIAGNÓSTICO ESTUDIANTIL</a:t>
-            </a:r>
-          </a:p>
-          <a:p>
-            <a:pPr>
-              <a:defRPr sz="1150">
+              <a:t>OE1 • MUESTRA ESTUDIANTIL</a:t>
+            </a:r>
+          </a:p>
+          <a:p>
+            <a:pPr>
+              <a:defRPr sz="1100">
                 <a:solidFill>
                   <a:srgbClr val="1E293B"/>
                 </a:solidFill>
@@ -9087,7 +9367,7 @@
               <a:spcAft>
                 <a:spcPts val="800"/>
               </a:spcAft>
-              <a:defRPr b="1" sz="1100">
+              <a:defRPr b="1" sz="1050">
                 <a:solidFill>
                   <a:srgbClr val="0F172A"/>
                 </a:solidFill>
@@ -9095,12 +9375,12 @@
               </a:defRPr>
             </a:pPr>
             <a:r>
-              <a:t>OE2 • SABERES DE FACILITADORES</a:t>
-            </a:r>
-          </a:p>
-          <a:p>
-            <a:pPr>
-              <a:defRPr sz="1150">
+              <a:t>OE2 • FACILITADORES LOCALES</a:t>
+            </a:r>
+          </a:p>
+          <a:p>
+            <a:pPr>
+              <a:defRPr sz="1100">
                 <a:solidFill>
                   <a:srgbClr val="1E293B"/>
                 </a:solidFill>
@@ -9155,7 +9435,7 @@
               <a:spcAft>
                 <a:spcPts val="800"/>
               </a:spcAft>
-              <a:defRPr b="1" sz="1100">
+              <a:defRPr b="1" sz="1050">
                 <a:solidFill>
                   <a:srgbClr val="0F172A"/>
                 </a:solidFill>
@@ -9163,12 +9443,12 @@
               </a:defRPr>
             </a:pPr>
             <a:r>
-              <a:t>OE3 • PROPUESTA DEL MANUAL</a:t>
-            </a:r>
-          </a:p>
-          <a:p>
-            <a:pPr>
-              <a:defRPr sz="1150">
+              <a:t>OE3 • CLAUSTRO Y PROPUESTA</a:t>
+            </a:r>
+          </a:p>
+          <a:p>
+            <a:pPr>
+              <a:defRPr sz="1100">
                 <a:solidFill>
                   <a:srgbClr val="1E293B"/>
                 </a:solidFill>
@@ -9176,7 +9456,7 @@
               </a:defRPr>
             </a:pPr>
             <a:r>
-              <a:t>Diseñar un Manual de Estrategias de MTCI para la formación y práctica psicológica, articulando pautas bioéticas, algoritmos de derivación y contenidos curriculares para el CUR-Estelí.</a:t>
+              <a:t>Diseñar un Manual de Estrategias de MTCI para la formación y práctica psicológica, fundamentado en los criterios del claustro docente y los hallazgos empíricos del CUR-Estelí.</a:t>
             </a:r>
           </a:p>
         </p:txBody>
@@ -9219,7 +9499,7 @@
         <p:spPr>
           <a:xfrm>
             <a:off x="777240" y="438912"/>
-            <a:ext cx="9601200" cy="274320"/>
+            <a:ext cx="9601200" cy="256032"/>
           </a:xfrm>
           <a:prstGeom prst="rect">
             <a:avLst/>
@@ -9233,7 +9513,7 @@
           <a:lstStyle/>
           <a:p>
             <a:pPr>
-              <a:defRPr sz="1000" b="1">
+              <a:defRPr sz="950" b="1">
                 <a:solidFill>
                   <a:srgbClr val="0D9488"/>
                 </a:solidFill>
@@ -9241,7 +9521,7 @@
               </a:defRPr>
             </a:pPr>
             <a:r>
-              <a:t>CAPÍTULO II • FUNDAMENTOS TEÓRICOS (1/2)</a:t>
+              <a:t>CAPÍTULO II • MARCO TEÓRICO (1/2)</a:t>
             </a:r>
           </a:p>
         </p:txBody>
@@ -9254,7 +9534,7 @@
         </p:nvSpPr>
         <p:spPr>
           <a:xfrm>
-            <a:off x="777240" y="713232"/>
+            <a:off x="777240" y="694944"/>
             <a:ext cx="9875520" cy="685800"/>
           </a:xfrm>
           <a:prstGeom prst="rect">
@@ -9269,7 +9549,7 @@
           <a:lstStyle/>
           <a:p>
             <a:pPr>
-              <a:defRPr sz="2800" b="1">
+              <a:defRPr sz="2600" b="1">
                 <a:solidFill>
                   <a:srgbClr val="0F172A"/>
                 </a:solidFill>
@@ -9277,7 +9557,7 @@
               </a:defRPr>
             </a:pPr>
             <a:r>
-              <a:t>Epistemología Médica, Pluralismo Asistencial y Principios Bioéticos</a:t>
+              <a:t>Fundamentos Epistemológicos y Principios Bioéticos en Salud Mental</a:t>
             </a:r>
           </a:p>
         </p:txBody>
@@ -9314,7 +9594,7 @@
         </p:nvSpPr>
         <p:spPr>
           <a:xfrm>
-            <a:off x="777240" y="6473952"/>
+            <a:off x="777240" y="6492240"/>
             <a:ext cx="9601200" cy="228600"/>
           </a:xfrm>
           <a:prstGeom prst="rect">
@@ -9329,7 +9609,7 @@
           <a:lstStyle/>
           <a:p>
             <a:pPr>
-              <a:defRPr sz="900">
+              <a:defRPr sz="850">
                 <a:solidFill>
                   <a:srgbClr val="64748B"/>
                 </a:solidFill>
@@ -9350,7 +9630,7 @@
         </p:nvSpPr>
         <p:spPr>
           <a:xfrm>
-            <a:off x="10789920" y="6473952"/>
+            <a:off x="10789920" y="6492240"/>
             <a:ext cx="640080" cy="228600"/>
           </a:xfrm>
           <a:prstGeom prst="rect">
@@ -9365,7 +9645,7 @@
           <a:lstStyle/>
           <a:p>
             <a:pPr algn="r">
-              <a:defRPr sz="900" b="1">
+              <a:defRPr sz="850" b="1">
                 <a:solidFill>
                   <a:srgbClr val="64748B"/>
                 </a:solidFill>
@@ -9373,7 +9653,7 @@
               </a:defRPr>
             </a:pPr>
             <a:r>
-              <a:t>6 / 16</a:t>
+              <a:t>6 / 17</a:t>
             </a:r>
           </a:p>
         </p:txBody>
@@ -9404,7 +9684,7 @@
               <a:spcAft>
                 <a:spcPts val="200"/>
               </a:spcAft>
-              <a:defRPr b="1" sz="1400">
+              <a:defRPr b="1" sz="1350">
                 <a:solidFill>
                   <a:srgbClr val="0F172A"/>
                 </a:solidFill>
@@ -9420,7 +9700,7 @@
               <a:spcAft>
                 <a:spcPts val="1200"/>
               </a:spcAft>
-              <a:defRPr sz="1000" b="1">
+              <a:defRPr sz="950" b="1">
                 <a:solidFill>
                   <a:srgbClr val="0D9488"/>
                 </a:solidFill>
@@ -9436,7 +9716,7 @@
               <a:spcAft>
                 <a:spcPts val="800"/>
               </a:spcAft>
-              <a:defRPr sz="1150">
+              <a:defRPr sz="1100">
                 <a:solidFill>
                   <a:srgbClr val="1E293B"/>
                 </a:solidFill>
@@ -9444,7 +9724,7 @@
               </a:defRPr>
             </a:pPr>
             <a:r>
-              <a:t>•  Superación del reduccionismo mecanicista biomédico.</a:t>
+              <a:t>•  Superación del reduccionismo mecanicista y biomédico en salud mental.</a:t>
             </a:r>
           </a:p>
           <a:p>
@@ -9452,7 +9732,7 @@
               <a:spcAft>
                 <a:spcPts val="800"/>
               </a:spcAft>
-              <a:defRPr sz="1150">
+              <a:defRPr sz="1100">
                 <a:solidFill>
                   <a:srgbClr val="1E293B"/>
                 </a:solidFill>
@@ -9460,7 +9740,7 @@
               </a:defRPr>
             </a:pPr>
             <a:r>
-              <a:t>•  Reconocimiento de la mente, cuerpo y entorno cultural como unidad dinámica indisoluble.</a:t>
+              <a:t>•  Integración de la dimensión somática, afectiva, cognitiva y sociocultural en un continuo dinámico.</a:t>
             </a:r>
           </a:p>
           <a:p>
@@ -9468,7 +9748,7 @@
               <a:spcAft>
                 <a:spcPts val="800"/>
               </a:spcAft>
-              <a:defRPr sz="1150">
+              <a:defRPr sz="1100">
                 <a:solidFill>
                   <a:srgbClr val="1E293B"/>
                 </a:solidFill>
@@ -9476,7 +9756,7 @@
               </a:defRPr>
             </a:pPr>
             <a:r>
-              <a:t>•  Regulación somato-autonómica (teoría polivagal y eje cerebro-intestino) como base del autocuidado.</a:t>
+              <a:t>•  Regulación neurovegetativa y vías Bottom-Up como fundamento fisiológico del autocuidado.</a:t>
             </a:r>
           </a:p>
         </p:txBody>
@@ -9507,7 +9787,7 @@
               <a:spcAft>
                 <a:spcPts val="200"/>
               </a:spcAft>
-              <a:defRPr b="1" sz="1400">
+              <a:defRPr b="1" sz="1350">
                 <a:solidFill>
                   <a:srgbClr val="0F172A"/>
                 </a:solidFill>
@@ -9515,7 +9795,7 @@
               </a:defRPr>
             </a:pPr>
             <a:r>
-              <a:t>02 • Pluralismo Médico y Coexistencia</a:t>
+              <a:t>02 • Pluralismo Médico y Hermenéutica</a:t>
             </a:r>
           </a:p>
           <a:p>
@@ -9523,7 +9803,7 @@
               <a:spcAft>
                 <a:spcPts val="1200"/>
               </a:spcAft>
-              <a:defRPr sz="1000" b="1">
+              <a:defRPr sz="950" b="1">
                 <a:solidFill>
                   <a:srgbClr val="0D9488"/>
                 </a:solidFill>
@@ -9539,7 +9819,7 @@
               <a:spcAft>
                 <a:spcPts val="800"/>
               </a:spcAft>
-              <a:defRPr sz="1150">
+              <a:defRPr sz="1100">
                 <a:solidFill>
                   <a:srgbClr val="1E293B"/>
                 </a:solidFill>
@@ -9547,7 +9827,7 @@
               </a:defRPr>
             </a:pPr>
             <a:r>
-              <a:t>•  Coexistencia de saberes: Modelo Médico Hegemónico vs Prácticas Tradicionales y de Autoatención.</a:t>
+              <a:t>•  Coexistencia real del Modelo Médico Hegemónico con sistemas tradicionales y de autoatención.</a:t>
             </a:r>
           </a:p>
           <a:p>
@@ -9555,7 +9835,7 @@
               <a:spcAft>
                 <a:spcPts val="800"/>
               </a:spcAft>
-              <a:defRPr sz="1150">
+              <a:defRPr sz="1100">
                 <a:solidFill>
                   <a:srgbClr val="1E293B"/>
                 </a:solidFill>
@@ -9563,7 +9843,7 @@
               </a:defRPr>
             </a:pPr>
             <a:r>
-              <a:t>•  Desjerarquización de saberes sin pérdida del juicio científico riguroso.</a:t>
+              <a:t>•  Reconocimiento de los saberes locales y comunitarios sin abandono del rigor metodológico.</a:t>
             </a:r>
           </a:p>
           <a:p>
@@ -9571,7 +9851,7 @@
               <a:spcAft>
                 <a:spcPts val="800"/>
               </a:spcAft>
-              <a:defRPr sz="1150">
+              <a:defRPr sz="1100">
                 <a:solidFill>
                   <a:srgbClr val="1E293B"/>
                 </a:solidFill>
@@ -9579,7 +9859,7 @@
               </a:defRPr>
             </a:pPr>
             <a:r>
-              <a:t>•  Erradicación del ocultamiento terapéutico mediante la escucha clínica desprejuiciada.</a:t>
+              <a:t>•  Superación del ocultamiento terapéutico mediante una entrevista clínica empática y libre de prejuicios.</a:t>
             </a:r>
           </a:p>
         </p:txBody>
@@ -9610,7 +9890,7 @@
               <a:spcAft>
                 <a:spcPts val="200"/>
               </a:spcAft>
-              <a:defRPr b="1" sz="1400">
+              <a:defRPr b="1" sz="1350">
                 <a:solidFill>
                   <a:srgbClr val="0F172A"/>
                 </a:solidFill>
@@ -9618,7 +9898,7 @@
               </a:defRPr>
             </a:pPr>
             <a:r>
-              <a:t>03 • Bioética y Delimitación Profesional</a:t>
+              <a:t>03 • Bioética y Límites de la Práctica</a:t>
             </a:r>
           </a:p>
           <a:p>
@@ -9626,7 +9906,7 @@
               <a:spcAft>
                 <a:spcPts val="1200"/>
               </a:spcAft>
-              <a:defRPr sz="1000" b="1">
+              <a:defRPr sz="950" b="1">
                 <a:solidFill>
                   <a:srgbClr val="0D9488"/>
                 </a:solidFill>
@@ -9642,7 +9922,7 @@
               <a:spcAft>
                 <a:spcPts val="800"/>
               </a:spcAft>
-              <a:defRPr sz="1150">
+              <a:defRPr sz="1100">
                 <a:solidFill>
                   <a:srgbClr val="1E293B"/>
                 </a:solidFill>
@@ -9650,7 +9930,7 @@
               </a:defRPr>
             </a:pPr>
             <a:r>
-              <a:t>•  Principio de No Maleficencia: prevención de interacciones adversas por fitoterapia o suplementos.</a:t>
+              <a:t>•  Principio de No Maleficencia: prevención de interacciones fitofarmacológicas y riesgos toxicológicos.</a:t>
             </a:r>
           </a:p>
           <a:p>
@@ -9658,7 +9938,7 @@
               <a:spcAft>
                 <a:spcPts val="800"/>
               </a:spcAft>
-              <a:defRPr sz="1150">
+              <a:defRPr sz="1100">
                 <a:solidFill>
                   <a:srgbClr val="1E293B"/>
                 </a:solidFill>
@@ -9666,7 +9946,7 @@
               </a:defRPr>
             </a:pPr>
             <a:r>
-              <a:t>•  Principio de Autonomía: respeto irrestricto a los valores y decisiones culturales del consultante.</a:t>
+              <a:t>•  Principio de Autonomía: respeto informado a los valores, creencias y decisiones del consultante.</a:t>
             </a:r>
           </a:p>
           <a:p>
@@ -9674,7 +9954,7 @@
               <a:spcAft>
                 <a:spcPts val="800"/>
               </a:spcAft>
-              <a:defRPr sz="1150">
+              <a:defRPr sz="1100">
                 <a:solidFill>
                   <a:srgbClr val="1E293B"/>
                 </a:solidFill>
@@ -9682,7 +9962,7 @@
               </a:defRPr>
             </a:pPr>
             <a:r>
-              <a:t>•  Límites de Rol: el psicólogo NO prescribe ni sustituye la medicina; dialoga y deriva éticamente.</a:t>
+              <a:t>•  Delimitación Profesional: el psicólogo orienta, psicoeduca y deriva; no prescribe ni formula sustancias.</a:t>
             </a:r>
           </a:p>
         </p:txBody>
@@ -9725,7 +10005,7 @@
         <p:spPr>
           <a:xfrm>
             <a:off x="777240" y="438912"/>
-            <a:ext cx="9601200" cy="274320"/>
+            <a:ext cx="9601200" cy="256032"/>
           </a:xfrm>
           <a:prstGeom prst="rect">
             <a:avLst/>
@@ -9739,7 +10019,7 @@
           <a:lstStyle/>
           <a:p>
             <a:pPr>
-              <a:defRPr sz="1000" b="1">
+              <a:defRPr sz="950" b="1">
                 <a:solidFill>
                   <a:srgbClr val="0D9488"/>
                 </a:solidFill>
@@ -9747,7 +10027,7 @@
               </a:defRPr>
             </a:pPr>
             <a:r>
-              <a:t>CAPÍTULO II • FUNDAMENTOS TEÓRICOS (2/2)</a:t>
+              <a:t>CAPÍTULO II • MARCO TEÓRICO (2/2)</a:t>
             </a:r>
           </a:p>
         </p:txBody>
@@ -9760,7 +10040,7 @@
         </p:nvSpPr>
         <p:spPr>
           <a:xfrm>
-            <a:off x="777240" y="713232"/>
+            <a:off x="777240" y="694944"/>
             <a:ext cx="9875520" cy="685800"/>
           </a:xfrm>
           <a:prstGeom prst="rect">
@@ -9775,7 +10055,7 @@
           <a:lstStyle/>
           <a:p>
             <a:pPr>
-              <a:defRPr sz="2800" b="1">
+              <a:defRPr sz="2600" b="1">
                 <a:solidFill>
                   <a:srgbClr val="0F172A"/>
                 </a:solidFill>
@@ -9783,7 +10063,7 @@
               </a:defRPr>
             </a:pPr>
             <a:r>
-              <a:t>Marco Jurídico Nicaragüense y Evidencia de Eficacia Clínica</a:t>
+              <a:t>Marco Normativo Nicaragüense y Evidencia de Eficacia Clínica</a:t>
             </a:r>
           </a:p>
         </p:txBody>
@@ -9820,7 +10100,7 @@
         </p:nvSpPr>
         <p:spPr>
           <a:xfrm>
-            <a:off x="777240" y="6473952"/>
+            <a:off x="777240" y="6492240"/>
             <a:ext cx="9601200" cy="228600"/>
           </a:xfrm>
           <a:prstGeom prst="rect">
@@ -9835,7 +10115,7 @@
           <a:lstStyle/>
           <a:p>
             <a:pPr>
-              <a:defRPr sz="900">
+              <a:defRPr sz="850">
                 <a:solidFill>
                   <a:srgbClr val="64748B"/>
                 </a:solidFill>
@@ -9856,7 +10136,7 @@
         </p:nvSpPr>
         <p:spPr>
           <a:xfrm>
-            <a:off x="10789920" y="6473952"/>
+            <a:off x="10789920" y="6492240"/>
             <a:ext cx="640080" cy="228600"/>
           </a:xfrm>
           <a:prstGeom prst="rect">
@@ -9871,7 +10151,7 @@
           <a:lstStyle/>
           <a:p>
             <a:pPr algn="r">
-              <a:defRPr sz="900" b="1">
+              <a:defRPr sz="850" b="1">
                 <a:solidFill>
                   <a:srgbClr val="64748B"/>
                 </a:solidFill>
@@ -9879,7 +10159,7 @@
               </a:defRPr>
             </a:pPr>
             <a:r>
-              <a:t>7 / 16</a:t>
+              <a:t>7 / 17</a:t>
             </a:r>
           </a:p>
         </p:txBody>
@@ -9910,7 +10190,7 @@
               <a:spcAft>
                 <a:spcPts val="1200"/>
               </a:spcAft>
-              <a:defRPr b="1" sz="1500">
+              <a:defRPr b="1" sz="1400">
                 <a:solidFill>
                   <a:srgbClr val="0F172A"/>
                 </a:solidFill>
@@ -9918,17 +10198,17 @@
               </a:defRPr>
             </a:pPr>
             <a:r>
-              <a:t>Marco Normativo Nacional (Nicaragua)</a:t>
-            </a:r>
-          </a:p>
-          <a:p>
-            <a:pPr>
-              <a:spcAft>
-                <a:spcPts val="1200"/>
-              </a:spcAft>
-            </a:pPr>
-            <a:r>
-              <a:rPr b="1" sz="1200">
+              <a:t>Ordenamiento Jurídico Sanitario Nacional</a:t>
+            </a:r>
+          </a:p>
+          <a:p>
+            <a:pPr>
+              <a:spcAft>
+                <a:spcPts val="1100"/>
+              </a:spcAft>
+            </a:pPr>
+            <a:r>
+              <a:rPr b="1" sz="1150">
                 <a:solidFill>
                   <a:srgbClr val="0D9488"/>
                 </a:solidFill>
@@ -9937,7 +10217,7 @@
               <a:t>⚖ Ley No. 774 (2012) — </a:t>
             </a:r>
             <a:r>
-              <a:rPr b="1" sz="1100">
+              <a:rPr b="1" sz="1050">
                 <a:solidFill>
                   <a:srgbClr val="0F172A"/>
                 </a:solidFill>
@@ -9947,23 +10227,23 @@
 </a:t>
             </a:r>
             <a:r>
-              <a:rPr sz="1100">
+              <a:rPr sz="1050">
                 <a:solidFill>
                   <a:srgbClr val="1E293B"/>
                 </a:solidFill>
                 <a:latin typeface="Calibri"/>
               </a:rPr>
-              <a:t>Reconoce el derecho a la MTCI en el sistema de salud, promoviendo su articulación respetuosa.</a:t>
-            </a:r>
-          </a:p>
-          <a:p>
-            <a:pPr>
-              <a:spcAft>
-                <a:spcPts val="1200"/>
-              </a:spcAft>
-            </a:pPr>
-            <a:r>
-              <a:rPr b="1" sz="1200">
+              <a:t>Institucionaliza la MTCI en el sistema de salud bajo principios de complementariedad, equidad e interculturalidad.</a:t>
+            </a:r>
+          </a:p>
+          <a:p>
+            <a:pPr>
+              <a:spcAft>
+                <a:spcPts val="1100"/>
+              </a:spcAft>
+            </a:pPr>
+            <a:r>
+              <a:rPr b="1" sz="1150">
                 <a:solidFill>
                   <a:srgbClr val="0D9488"/>
                 </a:solidFill>
@@ -9972,7 +10252,7 @@
               <a:t>⚖ Ley No. 292 (1998) — </a:t>
             </a:r>
             <a:r>
-              <a:rPr b="1" sz="1100">
+              <a:rPr b="1" sz="1050">
                 <a:solidFill>
                   <a:srgbClr val="0F172A"/>
                 </a:solidFill>
@@ -9982,23 +10262,23 @@
 </a:t>
             </a:r>
             <a:r>
-              <a:rPr sz="1100">
+              <a:rPr sz="1050">
                 <a:solidFill>
                   <a:srgbClr val="1E293B"/>
                 </a:solidFill>
                 <a:latin typeface="Calibri"/>
               </a:rPr>
-              <a:t>Límite legal taxativo: prohíbe formular o despachar psicofármacos o sustancias a quienes no posean título de médico.</a:t>
-            </a:r>
-          </a:p>
-          <a:p>
-            <a:pPr>
-              <a:spcAft>
-                <a:spcPts val="1200"/>
-              </a:spcAft>
-            </a:pPr>
-            <a:r>
-              <a:rPr b="1" sz="1200">
+              <a:t>Límite legal taxativo: inhabilitación expresa para prescribir fármacos o despachar sustancias a quienes no posean título de médico.</a:t>
+            </a:r>
+          </a:p>
+          <a:p>
+            <a:pPr>
+              <a:spcAft>
+                <a:spcPts val="1100"/>
+              </a:spcAft>
+            </a:pPr>
+            <a:r>
+              <a:rPr b="1" sz="1150">
                 <a:solidFill>
                   <a:srgbClr val="0D9488"/>
                 </a:solidFill>
@@ -10007,7 +10287,7 @@
               <a:t>⚖ Ley No. 759 (2011) — </a:t>
             </a:r>
             <a:r>
-              <a:rPr b="1" sz="1100">
+              <a:rPr b="1" sz="1050">
                 <a:solidFill>
                   <a:srgbClr val="0F172A"/>
                 </a:solidFill>
@@ -10017,13 +10297,13 @@
 </a:t>
             </a:r>
             <a:r>
-              <a:rPr sz="1100">
+              <a:rPr sz="1050">
                 <a:solidFill>
                   <a:srgbClr val="1E293B"/>
                 </a:solidFill>
                 <a:latin typeface="Calibri"/>
               </a:rPr>
-              <a:t>Protege los saberes ancestrales y la propiedad intelectual de pueblos originarios y afrodescendientes.</a:t>
+              <a:t>Protege el patrimonio inmaterial y saberes curativos tradicionales de pueblos originarios y comunidades afrodescendientes.</a:t>
             </a:r>
           </a:p>
         </p:txBody>
@@ -10097,7 +10377,7 @@
               <a:spcAft>
                 <a:spcPts val="1200"/>
               </a:spcAft>
-              <a:defRPr b="1" sz="1500">
+              <a:defRPr b="1" sz="1400">
                 <a:solidFill>
                   <a:srgbClr val="0F172A"/>
                 </a:solidFill>
@@ -10105,85 +10385,85 @@
               </a:defRPr>
             </a:pPr>
             <a:r>
-              <a:t>Evidencia Clínica y Eficacia Empírica</a:t>
-            </a:r>
-          </a:p>
-          <a:p>
-            <a:pPr>
-              <a:spcAft>
-                <a:spcPts val="1200"/>
-              </a:spcAft>
-            </a:pPr>
-            <a:r>
-              <a:rPr b="1" sz="1200">
+              <a:t>Evidencia Clínica y Eficacia Empírica en MTCI</a:t>
+            </a:r>
+          </a:p>
+          <a:p>
+            <a:pPr>
+              <a:spcAft>
+                <a:spcPts val="1100"/>
+              </a:spcAft>
+            </a:pPr>
+            <a:r>
+              <a:rPr b="1" sz="1150">
                 <a:solidFill>
                   <a:srgbClr val="2563EB"/>
                 </a:solidFill>
                 <a:latin typeface="Calibri"/>
               </a:rPr>
-              <a:t>✦ Fitoterapia con Respaldo Científico
+              <a:t>✦ Fitoterapia y Respuestas Neuroquímicas
 </a:t>
             </a:r>
             <a:r>
-              <a:rPr sz="1100">
+              <a:rPr sz="1050">
                 <a:solidFill>
                   <a:srgbClr val="1E293B"/>
                 </a:solidFill>
                 <a:latin typeface="Calibri"/>
               </a:rPr>
-              <a:t>Manzanilla (Matricaria chamomilla) y Pasiflora con efecto gabaérgico comprobado en ansiedad leve a moderada.</a:t>
-            </a:r>
-          </a:p>
-          <a:p>
-            <a:pPr>
-              <a:spcAft>
-                <a:spcPts val="1200"/>
-              </a:spcAft>
-            </a:pPr>
-            <a:r>
-              <a:rPr b="1" sz="1200">
+              <a:t>Ensayos clínicos confirman efectos sedantes y ansiolíticos en fitofármacos como la manzanilla y pasiflora, mediados por modulación gabaérgica.</a:t>
+            </a:r>
+          </a:p>
+          <a:p>
+            <a:pPr>
+              <a:spcAft>
+                <a:spcPts val="1100"/>
+              </a:spcAft>
+            </a:pPr>
+            <a:r>
+              <a:rPr b="1" sz="1150">
                 <a:solidFill>
                   <a:srgbClr val="2563EB"/>
                 </a:solidFill>
                 <a:latin typeface="Calibri"/>
               </a:rPr>
-              <a:t>✦ Técnicas Mente-Cuerpo y Regulación Vagal
+              <a:t>✦ Técnicas Mente-Cuerpo y Tono Vagal
 </a:t>
             </a:r>
             <a:r>
-              <a:rPr sz="1100">
+              <a:rPr sz="1050">
                 <a:solidFill>
                   <a:srgbClr val="1E293B"/>
                 </a:solidFill>
                 <a:latin typeface="Calibri"/>
               </a:rPr>
-              <a:t>Respiración diafragmática, mindfulness y yoga inducen activación parasimpática y reducción de cortisol.</a:t>
-            </a:r>
-          </a:p>
-          <a:p>
-            <a:pPr>
-              <a:spcAft>
-                <a:spcPts val="1200"/>
-              </a:spcAft>
-            </a:pPr>
-            <a:r>
-              <a:rPr b="1" sz="1200">
+              <a:t>Respiración diafragmática, relajación progresiva y yoga estimulan la activación del nervio vago y la reducción de cortisol sérico.</a:t>
+            </a:r>
+          </a:p>
+          <a:p>
+            <a:pPr>
+              <a:spcAft>
+                <a:spcPts val="1100"/>
+              </a:spcAft>
+            </a:pPr>
+            <a:r>
+              <a:rPr b="1" sz="1150">
                 <a:solidFill>
                   <a:srgbClr val="2563EB"/>
                 </a:solidFill>
                 <a:latin typeface="Calibri"/>
               </a:rPr>
-              <a:t>✦ Terapias Manuales y Alivio Psicosomático
+              <a:t>✦ Masoterapia y Liberación Miofascial
 </a:t>
             </a:r>
             <a:r>
-              <a:rPr sz="1100">
+              <a:rPr sz="1050">
                 <a:solidFill>
                   <a:srgbClr val="1E293B"/>
                 </a:solidFill>
                 <a:latin typeface="Calibri"/>
               </a:rPr>
-              <a:t>Masoterapia y reflexología desarticulan corazas musculares y contracturas por estrés sostenido.</a:t>
+              <a:t>La descompresión de contracturas musculares crónicas favorece la reducción del dolor somatomorfo y facilita el procesamiento emocional.</a:t>
             </a:r>
           </a:p>
         </p:txBody>
@@ -10226,7 +10506,7 @@
         <p:spPr>
           <a:xfrm>
             <a:off x="777240" y="438912"/>
-            <a:ext cx="9601200" cy="274320"/>
+            <a:ext cx="9601200" cy="256032"/>
           </a:xfrm>
           <a:prstGeom prst="rect">
             <a:avLst/>
@@ -10240,7 +10520,7 @@
           <a:lstStyle/>
           <a:p>
             <a:pPr>
-              <a:defRPr sz="1000" b="1">
+              <a:defRPr sz="950" b="1">
                 <a:solidFill>
                   <a:srgbClr val="0D9488"/>
                 </a:solidFill>
@@ -10248,7 +10528,7 @@
               </a:defRPr>
             </a:pPr>
             <a:r>
-              <a:t>CAPÍTULO III • DISEÑO METODOLÓGICO (1/2)</a:t>
+              <a:t>CAPÍTULO III • MARCO METODOLÓGICO (1/2)</a:t>
             </a:r>
           </a:p>
         </p:txBody>
@@ -10261,7 +10541,7 @@
         </p:nvSpPr>
         <p:spPr>
           <a:xfrm>
-            <a:off x="777240" y="713232"/>
+            <a:off x="777240" y="694944"/>
             <a:ext cx="9875520" cy="685800"/>
           </a:xfrm>
           <a:prstGeom prst="rect">
@@ -10276,7 +10556,7 @@
           <a:lstStyle/>
           <a:p>
             <a:pPr>
-              <a:defRPr sz="2800" b="1">
+              <a:defRPr sz="2600" b="1">
                 <a:solidFill>
                   <a:srgbClr val="0F172A"/>
                 </a:solidFill>
@@ -10321,7 +10601,7 @@
         </p:nvSpPr>
         <p:spPr>
           <a:xfrm>
-            <a:off x="777240" y="6473952"/>
+            <a:off x="777240" y="6492240"/>
             <a:ext cx="9601200" cy="228600"/>
           </a:xfrm>
           <a:prstGeom prst="rect">
@@ -10336,7 +10616,7 @@
           <a:lstStyle/>
           <a:p>
             <a:pPr>
-              <a:defRPr sz="900">
+              <a:defRPr sz="850">
                 <a:solidFill>
                   <a:srgbClr val="64748B"/>
                 </a:solidFill>
@@ -10357,7 +10637,7 @@
         </p:nvSpPr>
         <p:spPr>
           <a:xfrm>
-            <a:off x="10789920" y="6473952"/>
+            <a:off x="10789920" y="6492240"/>
             <a:ext cx="640080" cy="228600"/>
           </a:xfrm>
           <a:prstGeom prst="rect">
@@ -10372,7 +10652,7 @@
           <a:lstStyle/>
           <a:p>
             <a:pPr algn="r">
-              <a:defRPr sz="900" b="1">
+              <a:defRPr sz="850" b="1">
                 <a:solidFill>
                   <a:srgbClr val="64748B"/>
                 </a:solidFill>
@@ -10380,7 +10660,7 @@
               </a:defRPr>
             </a:pPr>
             <a:r>
-              <a:t>8 / 16</a:t>
+              <a:t>8 / 17</a:t>
             </a:r>
           </a:p>
         </p:txBody>
@@ -10411,7 +10691,7 @@
               <a:spcAft>
                 <a:spcPts val="200"/>
               </a:spcAft>
-              <a:defRPr b="1" sz="950">
+              <a:defRPr b="1" sz="900">
                 <a:solidFill>
                   <a:srgbClr val="0D9488"/>
                 </a:solidFill>
@@ -10425,9 +10705,9 @@
           <a:p>
             <a:pPr>
               <a:spcAft>
-                <a:spcPts val="600"/>
-              </a:spcAft>
-              <a:defRPr b="1" sz="1400">
+                <a:spcPts val="500"/>
+              </a:spcAft>
+              <a:defRPr b="1" sz="1350">
                 <a:solidFill>
                   <a:srgbClr val="0F172A"/>
                 </a:solidFill>
@@ -10440,7 +10720,7 @@
           </a:p>
           <a:p>
             <a:pPr>
-              <a:defRPr sz="1050">
+              <a:defRPr sz="1000">
                 <a:solidFill>
                   <a:srgbClr val="1E293B"/>
                 </a:solidFill>
@@ -10448,7 +10728,7 @@
               </a:defRPr>
             </a:pPr>
             <a:r>
-              <a:t>Articula métodos cuantitativos y cualitativos según su utilidad empírica y propositiva para resolver problemas reales.</a:t>
+              <a:t>Articula métodos cuantitativos y cualitativos según su utilidad empírica para fundamentar la propuesta de intervención.</a:t>
             </a:r>
           </a:p>
         </p:txBody>
@@ -10479,7 +10759,7 @@
               <a:spcAft>
                 <a:spcPts val="200"/>
               </a:spcAft>
-              <a:defRPr b="1" sz="950">
+              <a:defRPr b="1" sz="900">
                 <a:solidFill>
                   <a:srgbClr val="0D9488"/>
                 </a:solidFill>
@@ -10493,9 +10773,9 @@
           <a:p>
             <a:pPr>
               <a:spcAft>
-                <a:spcPts val="600"/>
-              </a:spcAft>
-              <a:defRPr b="1" sz="1400">
+                <a:spcPts val="500"/>
+              </a:spcAft>
+              <a:defRPr b="1" sz="1350">
                 <a:solidFill>
                   <a:srgbClr val="0F172A"/>
                 </a:solidFill>
@@ -10508,7 +10788,7 @@
           </a:p>
           <a:p>
             <a:pPr>
-              <a:defRPr sz="1050">
+              <a:defRPr sz="1000">
                 <a:solidFill>
                   <a:srgbClr val="1E293B"/>
                 </a:solidFill>
@@ -10516,7 +10796,7 @@
               </a:defRPr>
             </a:pPr>
             <a:r>
-              <a:t>Diseño DEXPLIS (Derivativo): recolección cuantitativa inicial seguida de exploración cualitativa en profundidad.</a:t>
+              <a:t>Diseño DEXPLIS (Derivativo): recolección cuantitativa inicial articulada con profundización cualitativa e integración propositiva.</a:t>
             </a:r>
           </a:p>
         </p:txBody>
@@ -10547,7 +10827,7 @@
               <a:spcAft>
                 <a:spcPts val="200"/>
               </a:spcAft>
-              <a:defRPr b="1" sz="950">
+              <a:defRPr b="1" sz="900">
                 <a:solidFill>
                   <a:srgbClr val="0D9488"/>
                 </a:solidFill>
@@ -10561,9 +10841,9 @@
           <a:p>
             <a:pPr>
               <a:spcAft>
-                <a:spcPts val="600"/>
-              </a:spcAft>
-              <a:defRPr b="1" sz="1400">
+                <a:spcPts val="500"/>
+              </a:spcAft>
+              <a:defRPr b="1" sz="1350">
                 <a:solidFill>
                   <a:srgbClr val="0F172A"/>
                 </a:solidFill>
@@ -10576,7 +10856,7 @@
           </a:p>
           <a:p>
             <a:pPr>
-              <a:defRPr sz="1050">
+              <a:defRPr sz="1000">
                 <a:solidFill>
                   <a:srgbClr val="1E293B"/>
                 </a:solidFill>
@@ -10584,7 +10864,7 @@
               </a:defRPr>
             </a:pPr>
             <a:r>
-              <a:t>Mide el estado actual de conocimientos, actitudes y prácticas en un momento temporal definido (2026).</a:t>
+              <a:t>Caracteriza el estado actual de conocimientos, actitudes y prácticas en un marco temporal definido (segundo semestre 2026).</a:t>
             </a:r>
           </a:p>
         </p:txBody>
@@ -10615,7 +10895,7 @@
               <a:spcAft>
                 <a:spcPts val="200"/>
               </a:spcAft>
-              <a:defRPr b="1" sz="950">
+              <a:defRPr b="1" sz="900">
                 <a:solidFill>
                   <a:srgbClr val="0D9488"/>
                 </a:solidFill>
@@ -10629,9 +10909,9 @@
           <a:p>
             <a:pPr>
               <a:spcAft>
-                <a:spcPts val="600"/>
-              </a:spcAft>
-              <a:defRPr b="1" sz="1400">
+                <a:spcPts val="500"/>
+              </a:spcAft>
+              <a:defRPr b="1" sz="1350">
                 <a:solidFill>
                   <a:srgbClr val="0F172A"/>
                 </a:solidFill>
@@ -10644,7 +10924,7 @@
           </a:p>
           <a:p>
             <a:pPr>
-              <a:defRPr sz="1050">
+              <a:defRPr sz="1000">
                 <a:solidFill>
                   <a:srgbClr val="1E293B"/>
                 </a:solidFill>
@@ -10652,7 +10932,7 @@
               </a:defRPr>
             </a:pPr>
             <a:r>
-              <a:t>Encuesta estructurada (Likert), entrevistas semiestructuradas a profundidad y grupos focales.</a:t>
+              <a:t>Cuestionarios estructurados con escala Likert (I1, I2, I3), preguntas abiertas y análisis temático de contenido.</a:t>
             </a:r>
           </a:p>
         </p:txBody>
@@ -10726,7 +11006,7 @@
               <a:spcAft>
                 <a:spcPts val="1000"/>
               </a:spcAft>
-              <a:defRPr b="1" sz="1400">
+              <a:defRPr b="1" sz="1350">
                 <a:solidFill>
                   <a:srgbClr val="0F172A"/>
                 </a:solidFill>
@@ -10744,22 +11024,22 @@
               </a:spcAft>
             </a:pPr>
             <a:r>
-              <a:rPr b="1" sz="1150">
+              <a:rPr b="1" sz="1100">
                 <a:solidFill>
                   <a:srgbClr val="D97706"/>
                 </a:solidFill>
                 <a:latin typeface="Calibri"/>
               </a:rPr>
-              <a:t>▶ Fase 1 (Cuantitativa) • Censo y Encuesta: </a:t>
-            </a:r>
-            <a:r>
-              <a:rPr sz="1100">
+              <a:t>▶ Fase 1 (Cuantitativa) • Diagnóstico Estudiantil: </a:t>
+            </a:r>
+            <a:r>
+              <a:rPr sz="1050">
                 <a:solidFill>
                   <a:srgbClr val="1E293B"/>
                 </a:solidFill>
                 <a:latin typeface="Calibri"/>
               </a:rPr>
-              <a:t>Aplicación de cuestionario estandarizado a n=68 estudiantes de 4.º y 5.º año de Psicología.</a:t>
+              <a:t>Aplicación de cuestionario estandarizado (I1) a la muestra censal de n = 68 estudiantes de 4.º y 5.º año de Psicología.</a:t>
             </a:r>
           </a:p>
           <a:p>
@@ -10769,22 +11049,22 @@
               </a:spcAft>
             </a:pPr>
             <a:r>
-              <a:rPr b="1" sz="1150">
+              <a:rPr b="1" sz="1100">
                 <a:solidFill>
                   <a:srgbClr val="D97706"/>
                 </a:solidFill>
                 <a:latin typeface="Calibri"/>
               </a:rPr>
-              <a:t>▶ Fase 2 (Cualitativa) • Entrevistas en Profundidad: </a:t>
-            </a:r>
-            <a:r>
-              <a:rPr sz="1100">
+              <a:t>▶ Fase 2 (Cualitativa) • Inmersión en Actores Clave: </a:t>
+            </a:r>
+            <a:r>
+              <a:rPr sz="1050">
                 <a:solidFill>
                   <a:srgbClr val="1E293B"/>
                 </a:solidFill>
                 <a:latin typeface="Calibri"/>
               </a:rPr>
-              <a:t>Inmersión territorial con n=9 facilitadores locales y entrevistas focales a n=9 docentes del CUR-Estelí.</a:t>
+              <a:t>Recolección de percepciones en n = 9 facilitadores locales de Estelí (I2) y n = 9 docentes-psicólogos del CUR-Estelí (I3).</a:t>
             </a:r>
           </a:p>
           <a:p>
@@ -10794,7 +11074,7 @@
               </a:spcAft>
             </a:pPr>
             <a:r>
-              <a:rPr b="1" sz="1150">
+              <a:rPr b="1" sz="1100">
                 <a:solidFill>
                   <a:srgbClr val="D97706"/>
                 </a:solidFill>
@@ -10803,13 +11083,13 @@
               <a:t>▶ Fase 3 (Propositiva) • Construcción del Manual: </a:t>
             </a:r>
             <a:r>
-              <a:rPr sz="1100">
+              <a:rPr sz="1050">
                 <a:solidFill>
                   <a:srgbClr val="1E293B"/>
                 </a:solidFill>
                 <a:latin typeface="Calibri"/>
               </a:rPr>
-              <a:t>Triangulación de hallazgos empíricos y formulación modular del Manual de Estrategias MTCI (Anexo 16.2).</a:t>
+              <a:t>Triangulación metodológica de hallazgos para el diseño modular del Manual de Estrategias MTCI (Anexo 16.2).</a:t>
             </a:r>
           </a:p>
         </p:txBody>
@@ -10852,7 +11132,7 @@
         <p:spPr>
           <a:xfrm>
             <a:off x="777240" y="438912"/>
-            <a:ext cx="9601200" cy="274320"/>
+            <a:ext cx="9601200" cy="256032"/>
           </a:xfrm>
           <a:prstGeom prst="rect">
             <a:avLst/>
@@ -10866,7 +11146,7 @@
           <a:lstStyle/>
           <a:p>
             <a:pPr>
-              <a:defRPr sz="1000" b="1">
+              <a:defRPr sz="950" b="1">
                 <a:solidFill>
                   <a:srgbClr val="0D9488"/>
                 </a:solidFill>
@@ -10874,7 +11154,7 @@
               </a:defRPr>
             </a:pPr>
             <a:r>
-              <a:t>CAPÍTULO III • DISEÑO METODOLÓGICO (2/2)</a:t>
+              <a:t>CAPÍTULO III • MARCO METODOLÓGICO (2/2)</a:t>
             </a:r>
           </a:p>
         </p:txBody>
@@ -10887,7 +11167,7 @@
         </p:nvSpPr>
         <p:spPr>
           <a:xfrm>
-            <a:off x="777240" y="713232"/>
+            <a:off x="777240" y="694944"/>
             <a:ext cx="9875520" cy="685800"/>
           </a:xfrm>
           <a:prstGeom prst="rect">
@@ -10902,7 +11182,7 @@
           <a:lstStyle/>
           <a:p>
             <a:pPr>
-              <a:defRPr sz="2800" b="1">
+              <a:defRPr sz="2600" b="1">
                 <a:solidFill>
                   <a:srgbClr val="0F172A"/>
                 </a:solidFill>
@@ -10947,7 +11227,7 @@
         </p:nvSpPr>
         <p:spPr>
           <a:xfrm>
-            <a:off x="777240" y="6473952"/>
+            <a:off x="777240" y="6492240"/>
             <a:ext cx="9601200" cy="228600"/>
           </a:xfrm>
           <a:prstGeom prst="rect">
@@ -10962,7 +11242,7 @@
           <a:lstStyle/>
           <a:p>
             <a:pPr>
-              <a:defRPr sz="900">
+              <a:defRPr sz="850">
                 <a:solidFill>
                   <a:srgbClr val="64748B"/>
                 </a:solidFill>
@@ -10983,7 +11263,7 @@
         </p:nvSpPr>
         <p:spPr>
           <a:xfrm>
-            <a:off x="10789920" y="6473952"/>
+            <a:off x="10789920" y="6492240"/>
             <a:ext cx="640080" cy="228600"/>
           </a:xfrm>
           <a:prstGeom prst="rect">
@@ -10998,7 +11278,7 @@
           <a:lstStyle/>
           <a:p>
             <a:pPr algn="r">
-              <a:defRPr sz="900" b="1">
+              <a:defRPr sz="850" b="1">
                 <a:solidFill>
                   <a:srgbClr val="64748B"/>
                 </a:solidFill>
@@ -11006,7 +11286,7 @@
               </a:defRPr>
             </a:pPr>
             <a:r>
-              <a:t>9 / 16</a:t>
+              <a:t>9 / 17</a:t>
             </a:r>
           </a:p>
         </p:txBody>
@@ -11053,7 +11333,7 @@
               <a:spcAft>
                 <a:spcPts val="1200"/>
               </a:spcAft>
-              <a:defRPr b="1" sz="1300">
+              <a:defRPr b="1" sz="1200">
                 <a:solidFill>
                   <a:srgbClr val="0F172A"/>
                 </a:solidFill>
@@ -11067,11 +11347,11 @@
           <a:p>
             <a:pPr>
               <a:spcAft>
-                <a:spcPts val="1000"/>
-              </a:spcAft>
-            </a:pPr>
-            <a:r>
-              <a:rPr b="1" sz="1150">
+                <a:spcPts val="900"/>
+              </a:spcAft>
+            </a:pPr>
+            <a:r>
+              <a:rPr b="1" sz="1100">
                 <a:solidFill>
                   <a:srgbClr val="0F172A"/>
                 </a:solidFill>
@@ -11080,23 +11360,23 @@
               <a:t>• Muestra Censal: </a:t>
             </a:r>
             <a:r>
-              <a:rPr sz="1100">
+              <a:rPr sz="1050">
                 <a:solidFill>
                   <a:srgbClr val="1E293B"/>
                 </a:solidFill>
                 <a:latin typeface="Calibri"/>
               </a:rPr>
-              <a:t>Totalidad de estudiantes activos en 4.º año (n=53, 77.9%) y 5.º año (n=15, 22.1%).</a:t>
-            </a:r>
-          </a:p>
-          <a:p>
-            <a:pPr>
-              <a:spcAft>
-                <a:spcPts val="1000"/>
-              </a:spcAft>
-            </a:pPr>
-            <a:r>
-              <a:rPr b="1" sz="1150">
+              <a:t>Totalidad de estudiantes activos de 4.º año (n = 53, 77.9%) y 5.º año (n = 15, 22.1%).</a:t>
+            </a:r>
+          </a:p>
+          <a:p>
+            <a:pPr>
+              <a:spcAft>
+                <a:spcPts val="900"/>
+              </a:spcAft>
+            </a:pPr>
+            <a:r>
+              <a:rPr b="1" sz="1100">
                 <a:solidFill>
                   <a:srgbClr val="0F172A"/>
                 </a:solidFill>
@@ -11105,23 +11385,23 @@
               <a:t>• Criterio Inclusión: </a:t>
             </a:r>
             <a:r>
-              <a:rPr sz="1100">
+              <a:rPr sz="1050">
                 <a:solidFill>
                   <a:srgbClr val="1E293B"/>
                 </a:solidFill>
                 <a:latin typeface="Calibri"/>
               </a:rPr>
-              <a:t>Matrícula activa en el II Semestre 2026; cursando o habiendo cursado prácticas clínicas.</a:t>
-            </a:r>
-          </a:p>
-          <a:p>
-            <a:pPr>
-              <a:spcAft>
-                <a:spcPts val="1000"/>
-              </a:spcAft>
-            </a:pPr>
-            <a:r>
-              <a:rPr b="1" sz="1150">
+              <a:t>Matrícula activa en el II Semestre 2026; cursando o habiendo cursado prácticas en la Clínica Psicosocial.</a:t>
+            </a:r>
+          </a:p>
+          <a:p>
+            <a:pPr>
+              <a:spcAft>
+                <a:spcPts val="900"/>
+              </a:spcAft>
+            </a:pPr>
+            <a:r>
+              <a:rPr b="1" sz="1100">
                 <a:solidFill>
                   <a:srgbClr val="0F172A"/>
                 </a:solidFill>
@@ -11130,13 +11410,13 @@
               <a:t>• Criterio Exclusión: </a:t>
             </a:r>
             <a:r>
-              <a:rPr sz="1100">
+              <a:rPr sz="1050">
                 <a:solidFill>
                   <a:srgbClr val="1E293B"/>
                 </a:solidFill>
                 <a:latin typeface="Calibri"/>
               </a:rPr>
-              <a:t>Estudiantes de 1.º a 3.er año o con baja académica temporal.</a:t>
+              <a:t>Estudiantes de 1.º a 3.er año o con inactividad académica temporal.</a:t>
             </a:r>
           </a:p>
         </p:txBody>
@@ -11183,7 +11463,7 @@
               <a:spcAft>
                 <a:spcPts val="1200"/>
               </a:spcAft>
-              <a:defRPr b="1" sz="1300">
+              <a:defRPr b="1" sz="1200">
                 <a:solidFill>
                   <a:srgbClr val="0F172A"/>
                 </a:solidFill>
@@ -11197,11 +11477,11 @@
           <a:p>
             <a:pPr>
               <a:spcAft>
-                <a:spcPts val="1000"/>
-              </a:spcAft>
-            </a:pPr>
-            <a:r>
-              <a:rPr b="1" sz="1150">
+                <a:spcPts val="900"/>
+              </a:spcAft>
+            </a:pPr>
+            <a:r>
+              <a:rPr b="1" sz="1100">
                 <a:solidFill>
                   <a:srgbClr val="0F172A"/>
                 </a:solidFill>
@@ -11210,23 +11490,23 @@
               <a:t>• Muestreo Intencional: </a:t>
             </a:r>
             <a:r>
-              <a:rPr sz="1100">
+              <a:rPr sz="1050">
                 <a:solidFill>
                   <a:srgbClr val="1E293B"/>
                 </a:solidFill>
                 <a:latin typeface="Calibri"/>
               </a:rPr>
-              <a:t>Diversidad de saberes: sobadores, naturópatas, terapeutas florales y curanderos de Estelí.</a:t>
-            </a:r>
-          </a:p>
-          <a:p>
-            <a:pPr>
-              <a:spcAft>
-                <a:spcPts val="1000"/>
-              </a:spcAft>
-            </a:pPr>
-            <a:r>
-              <a:rPr b="1" sz="1150">
+              <a:t>Diversidad de saberes: masoterapia, fitoterapia, quiropraxia y medicina tradicional en Estelí.</a:t>
+            </a:r>
+          </a:p>
+          <a:p>
+            <a:pPr>
+              <a:spcAft>
+                <a:spcPts val="900"/>
+              </a:spcAft>
+            </a:pPr>
+            <a:r>
+              <a:rPr b="1" sz="1100">
                 <a:solidFill>
                   <a:srgbClr val="0F172A"/>
                 </a:solidFill>
@@ -11235,23 +11515,23 @@
               <a:t>• Criterio Inclusión: </a:t>
             </a:r>
             <a:r>
-              <a:rPr sz="1100">
+              <a:rPr sz="1050">
                 <a:solidFill>
                   <a:srgbClr val="1E293B"/>
                 </a:solidFill>
                 <a:latin typeface="Calibri"/>
               </a:rPr>
-              <a:t>Práctica activa continua mayor a 5 años en el casco urbano o rural de Estelí.</a:t>
-            </a:r>
-          </a:p>
-          <a:p>
-            <a:pPr>
-              <a:spcAft>
-                <a:spcPts val="1000"/>
-              </a:spcAft>
-            </a:pPr>
-            <a:r>
-              <a:rPr b="1" sz="1150">
+              <a:t>Práctica activa continua mayor a 5 años en el municipio de Estelí con clientela establecida.</a:t>
+            </a:r>
+          </a:p>
+          <a:p>
+            <a:pPr>
+              <a:spcAft>
+                <a:spcPts val="900"/>
+              </a:spcAft>
+            </a:pPr>
+            <a:r>
+              <a:rPr b="1" sz="1100">
                 <a:solidFill>
                   <a:srgbClr val="0F172A"/>
                 </a:solidFill>
@@ -11260,7 +11540,7 @@
               <a:t>• Criterio Exclusión: </a:t>
             </a:r>
             <a:r>
-              <a:rPr sz="1100">
+              <a:rPr sz="1050">
                 <a:solidFill>
                   <a:srgbClr val="1E293B"/>
                 </a:solidFill>
@@ -11313,7 +11593,7 @@
               <a:spcAft>
                 <a:spcPts val="1200"/>
               </a:spcAft>
-              <a:defRPr b="1" sz="1300">
+              <a:defRPr b="1" sz="1200">
                 <a:solidFill>
                   <a:srgbClr val="0F172A"/>
                 </a:solidFill>
@@ -11327,11 +11607,11 @@
           <a:p>
             <a:pPr>
               <a:spcAft>
-                <a:spcPts val="1000"/>
-              </a:spcAft>
-            </a:pPr>
-            <a:r>
-              <a:rPr b="1" sz="1150">
+                <a:spcPts val="900"/>
+              </a:spcAft>
+            </a:pPr>
+            <a:r>
+              <a:rPr b="1" sz="1100">
                 <a:solidFill>
                   <a:srgbClr val="0F172A"/>
                 </a:solidFill>
@@ -11340,23 +11620,23 @@
               <a:t>• Claustro de Psicología: </a:t>
             </a:r>
             <a:r>
-              <a:rPr sz="1100">
+              <a:rPr sz="1050">
                 <a:solidFill>
                   <a:srgbClr val="1E293B"/>
                 </a:solidFill>
                 <a:latin typeface="Calibri"/>
               </a:rPr>
-              <a:t>Docentes con grado de Licenciatura o Maestría que imparten asignaturas clínicas y metodológicas.</a:t>
-            </a:r>
-          </a:p>
-          <a:p>
-            <a:pPr>
-              <a:spcAft>
-                <a:spcPts val="1000"/>
-              </a:spcAft>
-            </a:pPr>
-            <a:r>
-              <a:rPr b="1" sz="1150">
+              <a:t>Docentes con grado de Licenciatura y Maestría en áreas clínicas, comunitarias y metodológicas.</a:t>
+            </a:r>
+          </a:p>
+          <a:p>
+            <a:pPr>
+              <a:spcAft>
+                <a:spcPts val="900"/>
+              </a:spcAft>
+            </a:pPr>
+            <a:r>
+              <a:rPr b="1" sz="1100">
                 <a:solidFill>
                   <a:srgbClr val="0F172A"/>
                 </a:solidFill>
@@ -11365,23 +11645,23 @@
               <a:t>• Criterio Inclusión: </a:t>
             </a:r>
             <a:r>
-              <a:rPr sz="1100">
+              <a:rPr sz="1050">
                 <a:solidFill>
                   <a:srgbClr val="1E293B"/>
                 </a:solidFill>
                 <a:latin typeface="Calibri"/>
               </a:rPr>
-              <a:t>Experiencia docente en la UNAN-Managua CUR-Estelí y supervisión de prácticas.</a:t>
-            </a:r>
-          </a:p>
-          <a:p>
-            <a:pPr>
-              <a:spcAft>
-                <a:spcPts val="1000"/>
-              </a:spcAft>
-            </a:pPr>
-            <a:r>
-              <a:rPr b="1" sz="1150">
+              <a:t>Docencia activa en el CUR-Estelí y experiencia en supervisión de prácticas formativas.</a:t>
+            </a:r>
+          </a:p>
+          <a:p>
+            <a:pPr>
+              <a:spcAft>
+                <a:spcPts val="900"/>
+              </a:spcAft>
+            </a:pPr>
+            <a:r>
+              <a:rPr b="1" sz="1100">
                 <a:solidFill>
                   <a:srgbClr val="0F172A"/>
                 </a:solidFill>
@@ -11390,13 +11670,13 @@
               <a:t>• Criterio Exclusión: </a:t>
             </a:r>
             <a:r>
-              <a:rPr sz="1100">
+              <a:rPr sz="1050">
                 <a:solidFill>
                   <a:srgbClr val="1E293B"/>
                 </a:solidFill>
                 <a:latin typeface="Calibri"/>
               </a:rPr>
-              <a:t>Docentes de otras carreras no vinculadas al área de salud y humanidades.</a:t>
+              <a:t>Docentes de otras disciplinas no vinculadas a la carrera de Psicología.</a:t>
             </a:r>
           </a:p>
         </p:txBody>
